--- a/13_Hash.pptx
+++ b/13_Hash.pptx
@@ -17377,7 +17377,7 @@
                 </a:solidFill>
                 <a:sym typeface="Wingdings" panose="05000000000000000000" pitchFamily="2" charset="2"/>
               </a:rPr>
-              <a:t>2. AuthTag 16 byte </a:t>
+              <a:t>2. IV, AuthTag 16 byte </a:t>
             </a:r>
             <a:r>
               <a:rPr lang="ko-KR" altLang="en-US">
@@ -18330,6 +18330,79 @@
           </a:graphicData>
         </a:graphic>
       </p:graphicFrame>
+      <p:sp>
+        <p:nvSpPr>
+          <p:cNvPr id="4" name="TextBox 3">
+            <a:extLst>
+              <a:ext uri="{FF2B5EF4-FFF2-40B4-BE49-F238E27FC236}">
+                <a16:creationId xmlns:a16="http://schemas.microsoft.com/office/drawing/2014/main" id="{FDD57013-05B1-5ECF-84DE-6F5F7E3C037B}"/>
+              </a:ext>
+            </a:extLst>
+          </p:cNvPr>
+          <p:cNvSpPr txBox="1"/>
+          <p:nvPr/>
+        </p:nvSpPr>
+        <p:spPr>
+          <a:xfrm>
+            <a:off x="729574" y="4791650"/>
+            <a:ext cx="3424137" cy="230832"/>
+          </a:xfrm>
+          <a:prstGeom prst="rect">
+            <a:avLst/>
+          </a:prstGeom>
+          <a:noFill/>
+        </p:spPr>
+        <p:txBody>
+          <a:bodyPr wrap="square" rtlCol="0">
+            <a:spAutoFit/>
+          </a:bodyPr>
+          <a:lstStyle/>
+          <a:p>
+            <a:r>
+              <a:rPr lang="en-US" altLang="ko-KR" sz="900">
+                <a:latin typeface="페이퍼로지 1 Thin" pitchFamily="2" charset="-127"/>
+                <a:ea typeface="페이퍼로지 1 Thin" pitchFamily="2" charset="-127"/>
+              </a:rPr>
+              <a:t>spec: specification (</a:t>
+            </a:r>
+            <a:r>
+              <a:rPr lang="ko-KR" altLang="en-US" sz="900">
+                <a:latin typeface="페이퍼로지 1 Thin" pitchFamily="2" charset="-127"/>
+                <a:ea typeface="페이퍼로지 1 Thin" pitchFamily="2" charset="-127"/>
+              </a:rPr>
+              <a:t>명세</a:t>
+            </a:r>
+            <a:r>
+              <a:rPr lang="en-US" altLang="ko-KR" sz="900">
+                <a:latin typeface="페이퍼로지 1 Thin" pitchFamily="2" charset="-127"/>
+                <a:ea typeface="페이퍼로지 1 Thin" pitchFamily="2" charset="-127"/>
+              </a:rPr>
+              <a:t>, </a:t>
+            </a:r>
+            <a:r>
+              <a:rPr lang="ko-KR" altLang="en-US" sz="900">
+                <a:latin typeface="페이퍼로지 1 Thin" pitchFamily="2" charset="-127"/>
+                <a:ea typeface="페이퍼로지 1 Thin" pitchFamily="2" charset="-127"/>
+              </a:rPr>
+              <a:t>사양</a:t>
+            </a:r>
+            <a:r>
+              <a:rPr lang="en-US" altLang="ko-KR" sz="900">
+                <a:latin typeface="페이퍼로지 1 Thin" pitchFamily="2" charset="-127"/>
+                <a:ea typeface="페이퍼로지 1 Thin" pitchFamily="2" charset="-127"/>
+              </a:rPr>
+              <a:t>) = </a:t>
+            </a:r>
+            <a:r>
+              <a:rPr lang="ko-KR" altLang="en-US" sz="900">
+                <a:latin typeface="페이퍼로지 1 Thin" pitchFamily="2" charset="-127"/>
+                <a:ea typeface="페이퍼로지 1 Thin" pitchFamily="2" charset="-127"/>
+              </a:rPr>
+              <a:t>필요한 파라미터를 정의 </a:t>
+            </a:r>
+          </a:p>
+        </p:txBody>
+      </p:sp>
     </p:spTree>
     <p:extLst>
       <p:ext uri="{BB962C8B-B14F-4D97-AF65-F5344CB8AC3E}">

--- a/13_Hash.pptx
+++ b/13_Hash.pptx
@@ -5,7 +5,7 @@
     <p:sldMasterId id="2147483662" r:id="rId1"/>
   </p:sldMasterIdLst>
   <p:notesMasterIdLst>
-    <p:notesMasterId r:id="rId24"/>
+    <p:notesMasterId r:id="rId26"/>
   </p:notesMasterIdLst>
   <p:sldIdLst>
     <p:sldId id="256" r:id="rId2"/>
@@ -26,47 +26,60 @@
     <p:sldId id="408" r:id="rId17"/>
     <p:sldId id="404" r:id="rId18"/>
     <p:sldId id="405" r:id="rId19"/>
-    <p:sldId id="406" r:id="rId20"/>
-    <p:sldId id="407" r:id="rId21"/>
-    <p:sldId id="409" r:id="rId22"/>
-    <p:sldId id="287" r:id="rId23"/>
+    <p:sldId id="410" r:id="rId20"/>
+    <p:sldId id="411" r:id="rId21"/>
+    <p:sldId id="406" r:id="rId22"/>
+    <p:sldId id="407" r:id="rId23"/>
+    <p:sldId id="409" r:id="rId24"/>
+    <p:sldId id="287" r:id="rId25"/>
   </p:sldIdLst>
   <p:sldSz cx="9144000" cy="5143500" type="screen16x9"/>
   <p:notesSz cx="6858000" cy="9144000"/>
   <p:embeddedFontLst>
     <p:embeddedFont>
+      <p:font typeface="Cambria Math" panose="02040503050406030204" pitchFamily="18" charset="0"/>
+      <p:regular r:id="rId27"/>
+    </p:embeddedFont>
+    <p:embeddedFont>
+      <p:font typeface="Cascadia Code" panose="020B0609020000020004" pitchFamily="49" charset="0"/>
+      <p:regular r:id="rId28"/>
+      <p:bold r:id="rId29"/>
+      <p:italic r:id="rId30"/>
+      <p:boldItalic r:id="rId31"/>
+    </p:embeddedFont>
+    <p:embeddedFont>
       <p:font typeface="Montserrat" panose="00000500000000000000" pitchFamily="2" charset="0"/>
-      <p:regular r:id="rId25"/>
-      <p:bold r:id="rId26"/>
-      <p:italic r:id="rId27"/>
-      <p:boldItalic r:id="rId28"/>
+      <p:regular r:id="rId32"/>
+      <p:bold r:id="rId33"/>
+      <p:italic r:id="rId34"/>
+      <p:boldItalic r:id="rId35"/>
     </p:embeddedFont>
     <p:embeddedFont>
       <p:font typeface="Montserrat Medium" panose="00000600000000000000" pitchFamily="2" charset="0"/>
-      <p:regular r:id="rId29"/>
-      <p:bold r:id="rId30"/>
-      <p:italic r:id="rId31"/>
-      <p:boldItalic r:id="rId32"/>
+      <p:regular r:id="rId36"/>
+      <p:bold r:id="rId37"/>
+      <p:italic r:id="rId38"/>
+      <p:boldItalic r:id="rId39"/>
     </p:embeddedFont>
     <p:embeddedFont>
       <p:font typeface="페이퍼로지 1 Thin" pitchFamily="2" charset="-127"/>
-      <p:regular r:id="rId33"/>
+      <p:regular r:id="rId40"/>
     </p:embeddedFont>
     <p:embeddedFont>
       <p:font typeface="페이퍼로지 2 ExtraLight" pitchFamily="2" charset="-127"/>
-      <p:regular r:id="rId34"/>
+      <p:regular r:id="rId41"/>
     </p:embeddedFont>
     <p:embeddedFont>
       <p:font typeface="페이퍼로지 3 Light" pitchFamily="2" charset="-127"/>
-      <p:regular r:id="rId35"/>
+      <p:regular r:id="rId42"/>
     </p:embeddedFont>
     <p:embeddedFont>
       <p:font typeface="페이퍼로지 4 Regular" pitchFamily="2" charset="-127"/>
-      <p:regular r:id="rId36"/>
+      <p:regular r:id="rId43"/>
     </p:embeddedFont>
     <p:embeddedFont>
       <p:font typeface="페이퍼로지 6 SemiBold" pitchFamily="2" charset="-127"/>
-      <p:bold r:id="rId37"/>
+      <p:bold r:id="rId44"/>
     </p:embeddedFont>
   </p:embeddedFontLst>
   <p:defaultTextStyle>
@@ -1807,7 +1820,7 @@
         <p:cNvPr id="1" name="Shape 164">
           <a:extLst>
             <a:ext uri="{FF2B5EF4-FFF2-40B4-BE49-F238E27FC236}">
-              <a16:creationId xmlns:a16="http://schemas.microsoft.com/office/drawing/2014/main" id="{FAC8ED97-096F-A737-27D8-726E9DFE9328}"/>
+              <a16:creationId xmlns:a16="http://schemas.microsoft.com/office/drawing/2014/main" id="{9AE5B123-60C5-AFFB-CC6A-389328E7BC3E}"/>
             </a:ext>
           </a:extLst>
         </p:cNvPr>
@@ -1827,7 +1840,7 @@
           <p:cNvPr id="165" name="Google Shape;165;g344fced8951_0_265:notes">
             <a:extLst>
               <a:ext uri="{FF2B5EF4-FFF2-40B4-BE49-F238E27FC236}">
-                <a16:creationId xmlns:a16="http://schemas.microsoft.com/office/drawing/2014/main" id="{B3817821-C013-3EDE-97B0-D0CEDE5327CA}"/>
+                <a16:creationId xmlns:a16="http://schemas.microsoft.com/office/drawing/2014/main" id="{C5D37C75-F252-A7B4-6F6F-04D518D15F26}"/>
               </a:ext>
             </a:extLst>
           </p:cNvPr>
@@ -1874,7 +1887,7 @@
           <p:cNvPr id="166" name="Google Shape;166;g344fced8951_0_265:notes">
             <a:extLst>
               <a:ext uri="{FF2B5EF4-FFF2-40B4-BE49-F238E27FC236}">
-                <a16:creationId xmlns:a16="http://schemas.microsoft.com/office/drawing/2014/main" id="{F0A12A18-40D6-19A7-EAAD-830323228065}"/>
+                <a16:creationId xmlns:a16="http://schemas.microsoft.com/office/drawing/2014/main" id="{7553C64D-106B-3DA0-92B8-52E848058E55}"/>
               </a:ext>
             </a:extLst>
           </p:cNvPr>
@@ -1916,7 +1929,7 @@
     </p:spTree>
     <p:extLst>
       <p:ext uri="{BB962C8B-B14F-4D97-AF65-F5344CB8AC3E}">
-        <p14:creationId xmlns:p14="http://schemas.microsoft.com/office/powerpoint/2010/main" val="4273782711"/>
+        <p14:creationId xmlns:p14="http://schemas.microsoft.com/office/powerpoint/2010/main" val="816253491"/>
       </p:ext>
     </p:extLst>
   </p:cSld>
@@ -2061,6 +2074,260 @@
         <p:cNvPr id="1" name="Shape 164">
           <a:extLst>
             <a:ext uri="{FF2B5EF4-FFF2-40B4-BE49-F238E27FC236}">
+              <a16:creationId xmlns:a16="http://schemas.microsoft.com/office/drawing/2014/main" id="{7E827B3D-0693-4324-5031-8322C67B8E69}"/>
+            </a:ext>
+          </a:extLst>
+        </p:cNvPr>
+        <p:cNvGrpSpPr/>
+        <p:nvPr/>
+      </p:nvGrpSpPr>
+      <p:grpSpPr>
+        <a:xfrm>
+          <a:off x="0" y="0"/>
+          <a:ext cx="0" cy="0"/>
+          <a:chOff x="0" y="0"/>
+          <a:chExt cx="0" cy="0"/>
+        </a:xfrm>
+      </p:grpSpPr>
+      <p:sp>
+        <p:nvSpPr>
+          <p:cNvPr id="165" name="Google Shape;165;g344fced8951_0_265:notes">
+            <a:extLst>
+              <a:ext uri="{FF2B5EF4-FFF2-40B4-BE49-F238E27FC236}">
+                <a16:creationId xmlns:a16="http://schemas.microsoft.com/office/drawing/2014/main" id="{EDCD6BDD-60A5-67A8-2CC8-0FF2E89129DF}"/>
+              </a:ext>
+            </a:extLst>
+          </p:cNvPr>
+          <p:cNvSpPr>
+            <a:spLocks noGrp="1" noRot="1" noChangeAspect="1"/>
+          </p:cNvSpPr>
+          <p:nvPr>
+            <p:ph type="sldImg" idx="2"/>
+          </p:nvPr>
+        </p:nvSpPr>
+        <p:spPr>
+          <a:xfrm>
+            <a:off x="381000" y="685800"/>
+            <a:ext cx="6096000" cy="3429000"/>
+          </a:xfrm>
+          <a:custGeom>
+            <a:avLst/>
+            <a:gdLst/>
+            <a:ahLst/>
+            <a:cxnLst/>
+            <a:rect l="l" t="t" r="r" b="b"/>
+            <a:pathLst>
+              <a:path w="120000" h="120000" extrusionOk="0">
+                <a:moveTo>
+                  <a:pt x="0" y="0"/>
+                </a:moveTo>
+                <a:lnTo>
+                  <a:pt x="120000" y="0"/>
+                </a:lnTo>
+                <a:lnTo>
+                  <a:pt x="120000" y="120000"/>
+                </a:lnTo>
+                <a:lnTo>
+                  <a:pt x="0" y="120000"/>
+                </a:lnTo>
+                <a:close/>
+              </a:path>
+            </a:pathLst>
+          </a:custGeom>
+        </p:spPr>
+      </p:sp>
+      <p:sp>
+        <p:nvSpPr>
+          <p:cNvPr id="166" name="Google Shape;166;g344fced8951_0_265:notes">
+            <a:extLst>
+              <a:ext uri="{FF2B5EF4-FFF2-40B4-BE49-F238E27FC236}">
+                <a16:creationId xmlns:a16="http://schemas.microsoft.com/office/drawing/2014/main" id="{76FCACF0-8F22-E823-5678-3C37B96CE0B5}"/>
+              </a:ext>
+            </a:extLst>
+          </p:cNvPr>
+          <p:cNvSpPr txBox="1">
+            <a:spLocks noGrp="1"/>
+          </p:cNvSpPr>
+          <p:nvPr>
+            <p:ph type="body" idx="1"/>
+          </p:nvPr>
+        </p:nvSpPr>
+        <p:spPr>
+          <a:xfrm>
+            <a:off x="685800" y="4343400"/>
+            <a:ext cx="5486400" cy="4114800"/>
+          </a:xfrm>
+          <a:prstGeom prst="rect">
+            <a:avLst/>
+          </a:prstGeom>
+        </p:spPr>
+        <p:txBody>
+          <a:bodyPr spcFirstLastPara="1" wrap="square" lIns="91425" tIns="91425" rIns="91425" bIns="91425" anchor="t" anchorCtr="0">
+            <a:noAutofit/>
+          </a:bodyPr>
+          <a:lstStyle/>
+          <a:p>
+            <a:pPr marL="0" lvl="0" indent="0" algn="l" rtl="0">
+              <a:spcBef>
+                <a:spcPts val="0"/>
+              </a:spcBef>
+              <a:spcAft>
+                <a:spcPts val="0"/>
+              </a:spcAft>
+              <a:buNone/>
+            </a:pPr>
+            <a:endParaRPr dirty="0"/>
+          </a:p>
+        </p:txBody>
+      </p:sp>
+    </p:spTree>
+    <p:extLst>
+      <p:ext uri="{BB962C8B-B14F-4D97-AF65-F5344CB8AC3E}">
+        <p14:creationId xmlns:p14="http://schemas.microsoft.com/office/powerpoint/2010/main" val="1349514568"/>
+      </p:ext>
+    </p:extLst>
+  </p:cSld>
+  <p:clrMapOvr>
+    <a:masterClrMapping/>
+  </p:clrMapOvr>
+</p:notes>
+</file>
+
+<file path=ppt/notesSlides/notesSlide21.xml><?xml version="1.0" encoding="utf-8"?>
+<p:notes xmlns:a="http://schemas.openxmlformats.org/drawingml/2006/main" xmlns:r="http://schemas.openxmlformats.org/officeDocument/2006/relationships" xmlns:p="http://schemas.openxmlformats.org/presentationml/2006/main" showMasterSp="0" showMasterPhAnim="0">
+  <p:cSld>
+    <p:spTree>
+      <p:nvGrpSpPr>
+        <p:cNvPr id="1" name="Shape 164">
+          <a:extLst>
+            <a:ext uri="{FF2B5EF4-FFF2-40B4-BE49-F238E27FC236}">
+              <a16:creationId xmlns:a16="http://schemas.microsoft.com/office/drawing/2014/main" id="{FAC8ED97-096F-A737-27D8-726E9DFE9328}"/>
+            </a:ext>
+          </a:extLst>
+        </p:cNvPr>
+        <p:cNvGrpSpPr/>
+        <p:nvPr/>
+      </p:nvGrpSpPr>
+      <p:grpSpPr>
+        <a:xfrm>
+          <a:off x="0" y="0"/>
+          <a:ext cx="0" cy="0"/>
+          <a:chOff x="0" y="0"/>
+          <a:chExt cx="0" cy="0"/>
+        </a:xfrm>
+      </p:grpSpPr>
+      <p:sp>
+        <p:nvSpPr>
+          <p:cNvPr id="165" name="Google Shape;165;g344fced8951_0_265:notes">
+            <a:extLst>
+              <a:ext uri="{FF2B5EF4-FFF2-40B4-BE49-F238E27FC236}">
+                <a16:creationId xmlns:a16="http://schemas.microsoft.com/office/drawing/2014/main" id="{B3817821-C013-3EDE-97B0-D0CEDE5327CA}"/>
+              </a:ext>
+            </a:extLst>
+          </p:cNvPr>
+          <p:cNvSpPr>
+            <a:spLocks noGrp="1" noRot="1" noChangeAspect="1"/>
+          </p:cNvSpPr>
+          <p:nvPr>
+            <p:ph type="sldImg" idx="2"/>
+          </p:nvPr>
+        </p:nvSpPr>
+        <p:spPr>
+          <a:xfrm>
+            <a:off x="381000" y="685800"/>
+            <a:ext cx="6096000" cy="3429000"/>
+          </a:xfrm>
+          <a:custGeom>
+            <a:avLst/>
+            <a:gdLst/>
+            <a:ahLst/>
+            <a:cxnLst/>
+            <a:rect l="l" t="t" r="r" b="b"/>
+            <a:pathLst>
+              <a:path w="120000" h="120000" extrusionOk="0">
+                <a:moveTo>
+                  <a:pt x="0" y="0"/>
+                </a:moveTo>
+                <a:lnTo>
+                  <a:pt x="120000" y="0"/>
+                </a:lnTo>
+                <a:lnTo>
+                  <a:pt x="120000" y="120000"/>
+                </a:lnTo>
+                <a:lnTo>
+                  <a:pt x="0" y="120000"/>
+                </a:lnTo>
+                <a:close/>
+              </a:path>
+            </a:pathLst>
+          </a:custGeom>
+        </p:spPr>
+      </p:sp>
+      <p:sp>
+        <p:nvSpPr>
+          <p:cNvPr id="166" name="Google Shape;166;g344fced8951_0_265:notes">
+            <a:extLst>
+              <a:ext uri="{FF2B5EF4-FFF2-40B4-BE49-F238E27FC236}">
+                <a16:creationId xmlns:a16="http://schemas.microsoft.com/office/drawing/2014/main" id="{F0A12A18-40D6-19A7-EAAD-830323228065}"/>
+              </a:ext>
+            </a:extLst>
+          </p:cNvPr>
+          <p:cNvSpPr txBox="1">
+            <a:spLocks noGrp="1"/>
+          </p:cNvSpPr>
+          <p:nvPr>
+            <p:ph type="body" idx="1"/>
+          </p:nvPr>
+        </p:nvSpPr>
+        <p:spPr>
+          <a:xfrm>
+            <a:off x="685800" y="4343400"/>
+            <a:ext cx="5486400" cy="4114800"/>
+          </a:xfrm>
+          <a:prstGeom prst="rect">
+            <a:avLst/>
+          </a:prstGeom>
+        </p:spPr>
+        <p:txBody>
+          <a:bodyPr spcFirstLastPara="1" wrap="square" lIns="91425" tIns="91425" rIns="91425" bIns="91425" anchor="t" anchorCtr="0">
+            <a:noAutofit/>
+          </a:bodyPr>
+          <a:lstStyle/>
+          <a:p>
+            <a:pPr marL="0" lvl="0" indent="0" algn="l" rtl="0">
+              <a:spcBef>
+                <a:spcPts val="0"/>
+              </a:spcBef>
+              <a:spcAft>
+                <a:spcPts val="0"/>
+              </a:spcAft>
+              <a:buNone/>
+            </a:pPr>
+            <a:endParaRPr dirty="0"/>
+          </a:p>
+        </p:txBody>
+      </p:sp>
+    </p:spTree>
+    <p:extLst>
+      <p:ext uri="{BB962C8B-B14F-4D97-AF65-F5344CB8AC3E}">
+        <p14:creationId xmlns:p14="http://schemas.microsoft.com/office/powerpoint/2010/main" val="4273782711"/>
+      </p:ext>
+    </p:extLst>
+  </p:cSld>
+  <p:clrMapOvr>
+    <a:masterClrMapping/>
+  </p:clrMapOvr>
+</p:notes>
+</file>
+
+<file path=ppt/notesSlides/notesSlide22.xml><?xml version="1.0" encoding="utf-8"?>
+<p:notes xmlns:a="http://schemas.openxmlformats.org/drawingml/2006/main" xmlns:r="http://schemas.openxmlformats.org/officeDocument/2006/relationships" xmlns:p="http://schemas.openxmlformats.org/presentationml/2006/main" showMasterSp="0" showMasterPhAnim="0">
+  <p:cSld>
+    <p:spTree>
+      <p:nvGrpSpPr>
+        <p:cNvPr id="1" name="Shape 164">
+          <a:extLst>
+            <a:ext uri="{FF2B5EF4-FFF2-40B4-BE49-F238E27FC236}">
               <a16:creationId xmlns:a16="http://schemas.microsoft.com/office/drawing/2014/main" id="{B1A7369A-4430-AFC3-77D5-60AE3B9E62B3}"/>
             </a:ext>
           </a:extLst>
@@ -2180,7 +2447,7 @@
 </p:notes>
 </file>
 
-<file path=ppt/notesSlides/notesSlide21.xml><?xml version="1.0" encoding="utf-8"?>
+<file path=ppt/notesSlides/notesSlide23.xml><?xml version="1.0" encoding="utf-8"?>
 <p:notes xmlns:a="http://schemas.openxmlformats.org/drawingml/2006/main" xmlns:r="http://schemas.openxmlformats.org/officeDocument/2006/relationships" xmlns:p="http://schemas.openxmlformats.org/presentationml/2006/main" showMasterSp="0" showMasterPhAnim="0">
   <p:cSld>
     <p:spTree>
@@ -2307,7 +2574,7 @@
 </p:notes>
 </file>
 
-<file path=ppt/notesSlides/notesSlide22.xml><?xml version="1.0" encoding="utf-8"?>
+<file path=ppt/notesSlides/notesSlide24.xml><?xml version="1.0" encoding="utf-8"?>
 <p:notes xmlns:a="http://schemas.openxmlformats.org/drawingml/2006/main" xmlns:r="http://schemas.openxmlformats.org/officeDocument/2006/relationships" xmlns:p="http://schemas.openxmlformats.org/presentationml/2006/main" showMasterSp="0" showMasterPhAnim="0">
   <p:cSld>
     <p:spTree>
@@ -12885,7 +13152,7 @@
           <p:nvPr>
             <p:extLst>
               <p:ext uri="{D42A27DB-BD31-4B8C-83A1-F6EECF244321}">
-                <p14:modId xmlns:p14="http://schemas.microsoft.com/office/powerpoint/2010/main" val="1059438286"/>
+                <p14:modId xmlns:p14="http://schemas.microsoft.com/office/powerpoint/2010/main" val="3722525025"/>
               </p:ext>
             </p:extLst>
           </p:nvPr>
@@ -12931,7 +13198,10 @@
                     <a:p>
                       <a:pPr latinLnBrk="1"/>
                       <a:r>
-                        <a:rPr lang="ko-KR" altLang="en-US" sz="1200"/>
+                        <a:rPr lang="ko-KR" altLang="en-US" sz="1200">
+                          <a:latin typeface="페이퍼로지 4 Regular" pitchFamily="2" charset="-127"/>
+                          <a:ea typeface="페이퍼로지 4 Regular" pitchFamily="2" charset="-127"/>
+                        </a:rPr>
                         <a:t>구분</a:t>
                       </a:r>
                     </a:p>
@@ -12951,10 +13221,16 @@
                     <a:p>
                       <a:pPr latinLnBrk="1"/>
                       <a:r>
-                        <a:rPr lang="en-US" altLang="ko-KR" sz="1200"/>
+                        <a:rPr lang="en-US" altLang="ko-KR" sz="1200">
+                          <a:latin typeface="페이퍼로지 4 Regular" pitchFamily="2" charset="-127"/>
+                          <a:ea typeface="페이퍼로지 4 Regular" pitchFamily="2" charset="-127"/>
+                        </a:rPr>
                         <a:t>CheckSum</a:t>
                       </a:r>
-                      <a:endParaRPr lang="ko-KR" altLang="en-US" sz="1200"/>
+                      <a:endParaRPr lang="ko-KR" altLang="en-US" sz="1200">
+                        <a:latin typeface="페이퍼로지 4 Regular" pitchFamily="2" charset="-127"/>
+                        <a:ea typeface="페이퍼로지 4 Regular" pitchFamily="2" charset="-127"/>
+                      </a:endParaRPr>
                     </a:p>
                   </a:txBody>
                   <a:tcPr anchor="ctr">
@@ -12972,11 +13248,17 @@
                     <a:p>
                       <a:pPr latinLnBrk="1"/>
                       <a:r>
-                        <a:rPr lang="en-US" altLang="ko-KR" sz="1200"/>
+                        <a:rPr lang="en-US" altLang="ko-KR" sz="1200">
+                          <a:latin typeface="페이퍼로지 4 Regular" pitchFamily="2" charset="-127"/>
+                          <a:ea typeface="페이퍼로지 4 Regular" pitchFamily="2" charset="-127"/>
+                        </a:rPr>
                         <a:t>Hash</a:t>
                       </a:r>
                       <a:r>
-                        <a:rPr lang="ko-KR" altLang="en-US" sz="1200"/>
+                        <a:rPr lang="ko-KR" altLang="en-US" sz="1200">
+                          <a:latin typeface="페이퍼로지 4 Regular" pitchFamily="2" charset="-127"/>
+                          <a:ea typeface="페이퍼로지 4 Regular" pitchFamily="2" charset="-127"/>
+                        </a:rPr>
                         <a:t> </a:t>
                       </a:r>
                     </a:p>
@@ -13003,7 +13285,10 @@
                     <a:p>
                       <a:pPr latinLnBrk="1"/>
                       <a:r>
-                        <a:rPr lang="ko-KR" altLang="en-US" sz="1200"/>
+                        <a:rPr lang="ko-KR" altLang="en-US" sz="1200">
+                          <a:latin typeface="페이퍼로지 4 Regular" pitchFamily="2" charset="-127"/>
+                          <a:ea typeface="페이퍼로지 4 Regular" pitchFamily="2" charset="-127"/>
+                        </a:rPr>
                         <a:t>목적</a:t>
                       </a:r>
                     </a:p>
@@ -13017,7 +13302,10 @@
                     <a:p>
                       <a:pPr latinLnBrk="1"/>
                       <a:r>
-                        <a:rPr lang="ko-KR" altLang="en-US" sz="1200"/>
+                        <a:rPr lang="ko-KR" altLang="en-US" sz="1200">
+                          <a:latin typeface="페이퍼로지 4 Regular" pitchFamily="2" charset="-127"/>
+                          <a:ea typeface="페이퍼로지 4 Regular" pitchFamily="2" charset="-127"/>
+                        </a:rPr>
                         <a:t>에러 검출</a:t>
                       </a:r>
                     </a:p>
@@ -13031,7 +13319,10 @@
                     <a:p>
                       <a:pPr latinLnBrk="1"/>
                       <a:r>
-                        <a:rPr lang="ko-KR" altLang="en-US" sz="1200"/>
+                        <a:rPr lang="ko-KR" altLang="en-US" sz="1200">
+                          <a:latin typeface="페이퍼로지 4 Regular" pitchFamily="2" charset="-127"/>
+                          <a:ea typeface="페이퍼로지 4 Regular" pitchFamily="2" charset="-127"/>
+                        </a:rPr>
                         <a:t>의도적인 변조 방지</a:t>
                       </a:r>
                     </a:p>
@@ -13052,7 +13343,10 @@
                     <a:p>
                       <a:pPr latinLnBrk="1"/>
                       <a:r>
-                        <a:rPr lang="ko-KR" altLang="en-US" sz="1200"/>
+                        <a:rPr lang="ko-KR" altLang="en-US" sz="1200">
+                          <a:latin typeface="페이퍼로지 4 Regular" pitchFamily="2" charset="-127"/>
+                          <a:ea typeface="페이퍼로지 4 Regular" pitchFamily="2" charset="-127"/>
+                        </a:rPr>
                         <a:t>보안</a:t>
                       </a:r>
                     </a:p>
@@ -13066,22 +13360,37 @@
                     <a:p>
                       <a:pPr latinLnBrk="1"/>
                       <a:r>
-                        <a:rPr lang="ko-KR" altLang="en-US" sz="1200"/>
+                        <a:rPr lang="ko-KR" altLang="en-US" sz="1200">
+                          <a:latin typeface="페이퍼로지 4 Regular" pitchFamily="2" charset="-127"/>
+                          <a:ea typeface="페이퍼로지 4 Regular" pitchFamily="2" charset="-127"/>
+                        </a:rPr>
                         <a:t>낮음 </a:t>
                       </a:r>
                       <a:r>
-                        <a:rPr lang="en-US" altLang="ko-KR" sz="1200"/>
+                        <a:rPr lang="en-US" altLang="ko-KR" sz="1200">
+                          <a:latin typeface="페이퍼로지 4 Regular" pitchFamily="2" charset="-127"/>
+                          <a:ea typeface="페이퍼로지 4 Regular" pitchFamily="2" charset="-127"/>
+                        </a:rPr>
                         <a:t>(</a:t>
                       </a:r>
                       <a:r>
-                        <a:rPr lang="ko-KR" altLang="en-US" sz="1200"/>
+                        <a:rPr lang="ko-KR" altLang="en-US" sz="1200">
+                          <a:latin typeface="페이퍼로지 4 Regular" pitchFamily="2" charset="-127"/>
+                          <a:ea typeface="페이퍼로지 4 Regular" pitchFamily="2" charset="-127"/>
+                        </a:rPr>
                         <a:t>값 맞추기 쉬움</a:t>
                       </a:r>
                       <a:r>
-                        <a:rPr lang="en-US" altLang="ko-KR" sz="1200"/>
+                        <a:rPr lang="en-US" altLang="ko-KR" sz="1200">
+                          <a:latin typeface="페이퍼로지 4 Regular" pitchFamily="2" charset="-127"/>
+                          <a:ea typeface="페이퍼로지 4 Regular" pitchFamily="2" charset="-127"/>
+                        </a:rPr>
                         <a:t>)</a:t>
                       </a:r>
-                      <a:endParaRPr lang="ko-KR" altLang="en-US" sz="1200"/>
+                      <a:endParaRPr lang="ko-KR" altLang="en-US" sz="1200">
+                        <a:latin typeface="페이퍼로지 4 Regular" pitchFamily="2" charset="-127"/>
+                        <a:ea typeface="페이퍼로지 4 Regular" pitchFamily="2" charset="-127"/>
+                      </a:endParaRPr>
                     </a:p>
                   </a:txBody>
                   <a:tcPr anchor="ctr"/>
@@ -13093,22 +13402,37 @@
                     <a:p>
                       <a:pPr latinLnBrk="1"/>
                       <a:r>
-                        <a:rPr lang="ko-KR" altLang="en-US" sz="1200"/>
+                        <a:rPr lang="ko-KR" altLang="en-US" sz="1200">
+                          <a:latin typeface="페이퍼로지 4 Regular" pitchFamily="2" charset="-127"/>
+                          <a:ea typeface="페이퍼로지 4 Regular" pitchFamily="2" charset="-127"/>
+                        </a:rPr>
                         <a:t>높음 </a:t>
                       </a:r>
                       <a:r>
-                        <a:rPr lang="en-US" altLang="ko-KR" sz="1200"/>
+                        <a:rPr lang="en-US" altLang="ko-KR" sz="1200">
+                          <a:latin typeface="페이퍼로지 4 Regular" pitchFamily="2" charset="-127"/>
+                          <a:ea typeface="페이퍼로지 4 Regular" pitchFamily="2" charset="-127"/>
+                        </a:rPr>
                         <a:t>(</a:t>
                       </a:r>
                       <a:r>
-                        <a:rPr lang="ko-KR" altLang="en-US" sz="1200"/>
+                        <a:rPr lang="ko-KR" altLang="en-US" sz="1200">
+                          <a:latin typeface="페이퍼로지 4 Regular" pitchFamily="2" charset="-127"/>
+                          <a:ea typeface="페이퍼로지 4 Regular" pitchFamily="2" charset="-127"/>
+                        </a:rPr>
                         <a:t>충돌 저항</a:t>
                       </a:r>
                       <a:r>
-                        <a:rPr lang="en-US" altLang="ko-KR" sz="1200"/>
+                        <a:rPr lang="en-US" altLang="ko-KR" sz="1200">
+                          <a:latin typeface="페이퍼로지 4 Regular" pitchFamily="2" charset="-127"/>
+                          <a:ea typeface="페이퍼로지 4 Regular" pitchFamily="2" charset="-127"/>
+                        </a:rPr>
                         <a:t>)</a:t>
                       </a:r>
-                      <a:endParaRPr lang="ko-KR" altLang="en-US" sz="1200"/>
+                      <a:endParaRPr lang="ko-KR" altLang="en-US" sz="1200">
+                        <a:latin typeface="페이퍼로지 4 Regular" pitchFamily="2" charset="-127"/>
+                        <a:ea typeface="페이퍼로지 4 Regular" pitchFamily="2" charset="-127"/>
+                      </a:endParaRPr>
                     </a:p>
                   </a:txBody>
                   <a:tcPr anchor="ctr"/>
@@ -13127,7 +13451,10 @@
                     <a:p>
                       <a:pPr latinLnBrk="1"/>
                       <a:r>
-                        <a:rPr lang="ko-KR" altLang="en-US" sz="1200"/>
+                        <a:rPr lang="ko-KR" altLang="en-US" sz="1200">
+                          <a:latin typeface="페이퍼로지 4 Regular" pitchFamily="2" charset="-127"/>
+                          <a:ea typeface="페이퍼로지 4 Regular" pitchFamily="2" charset="-127"/>
+                        </a:rPr>
                         <a:t>복잡도</a:t>
                       </a:r>
                     </a:p>
@@ -13141,15 +13468,24 @@
                     <a:p>
                       <a:pPr latinLnBrk="1"/>
                       <a:r>
-                        <a:rPr lang="ko-KR" altLang="en-US" sz="1200"/>
+                        <a:rPr lang="ko-KR" altLang="en-US" sz="1200">
+                          <a:latin typeface="페이퍼로지 4 Regular" pitchFamily="2" charset="-127"/>
+                          <a:ea typeface="페이퍼로지 4 Regular" pitchFamily="2" charset="-127"/>
+                        </a:rPr>
                         <a:t>단순 덧셈 </a:t>
                       </a:r>
                       <a:r>
-                        <a:rPr lang="en-US" altLang="ko-KR" sz="1200"/>
+                        <a:rPr lang="en-US" altLang="ko-KR" sz="1200">
+                          <a:latin typeface="페이퍼로지 4 Regular" pitchFamily="2" charset="-127"/>
+                          <a:ea typeface="페이퍼로지 4 Regular" pitchFamily="2" charset="-127"/>
+                        </a:rPr>
                         <a:t>|| </a:t>
                       </a:r>
                       <a:r>
-                        <a:rPr lang="ko-KR" altLang="en-US" sz="1200"/>
+                        <a:rPr lang="ko-KR" altLang="en-US" sz="1200">
+                          <a:latin typeface="페이퍼로지 4 Regular" pitchFamily="2" charset="-127"/>
+                          <a:ea typeface="페이퍼로지 4 Regular" pitchFamily="2" charset="-127"/>
+                        </a:rPr>
                         <a:t>비트 연산</a:t>
                       </a:r>
                     </a:p>
@@ -13163,7 +13499,10 @@
                     <a:p>
                       <a:pPr latinLnBrk="1"/>
                       <a:r>
-                        <a:rPr lang="ko-KR" altLang="en-US" sz="1200"/>
+                        <a:rPr lang="ko-KR" altLang="en-US" sz="1200">
+                          <a:latin typeface="페이퍼로지 4 Regular" pitchFamily="2" charset="-127"/>
+                          <a:ea typeface="페이퍼로지 4 Regular" pitchFamily="2" charset="-127"/>
+                        </a:rPr>
                         <a:t>복잡한 라운드와 압축</a:t>
                       </a:r>
                     </a:p>
@@ -13581,7 +13920,39 @@
                 <a:cs typeface="Montserrat SemiBold"/>
                 <a:sym typeface="Wingdings" panose="05000000000000000000" pitchFamily="2" charset="2"/>
               </a:rPr>
-              <a:t>SubBytes, ShiftRows, MixColumns, AddRoundKey </a:t>
+              <a:t>SubBytes, ShiftRows, MixColumns,            </a:t>
+            </a:r>
+          </a:p>
+          <a:p>
+            <a:pPr marR="0" lvl="0" algn="l" rtl="0">
+              <a:lnSpc>
+                <a:spcPct val="100000"/>
+              </a:lnSpc>
+              <a:spcBef>
+                <a:spcPts val="0"/>
+              </a:spcBef>
+              <a:spcAft>
+                <a:spcPts val="0"/>
+              </a:spcAft>
+              <a:buClr>
+                <a:srgbClr val="000000"/>
+              </a:buClr>
+              <a:buSzPts val="1600"/>
+            </a:pPr>
+            <a:r>
+              <a:rPr lang="en-US" altLang="ko-KR" sz="1600">
+                <a:solidFill>
+                  <a:schemeClr val="tx1">
+                    <a:lumMod val="65000"/>
+                    <a:lumOff val="35000"/>
+                  </a:schemeClr>
+                </a:solidFill>
+                <a:latin typeface="페이퍼로지 4 Regular" charset="-127"/>
+                <a:ea typeface="페이퍼로지 4 Regular" charset="-127"/>
+                <a:cs typeface="Montserrat SemiBold"/>
+                <a:sym typeface="Wingdings" panose="05000000000000000000" pitchFamily="2" charset="2"/>
+              </a:rPr>
+              <a:t>	         AddRoundKey </a:t>
             </a:r>
             <a:r>
               <a:rPr lang="ko-KR" altLang="en-US" sz="1600">
@@ -14127,6 +14498,48 @@
                 <a:sym typeface="Wingdings" panose="05000000000000000000" pitchFamily="2" charset="2"/>
               </a:rPr>
             </a:br>
+            <a:r>
+              <a:rPr lang="en-US" altLang="ko-KR" sz="1800">
+                <a:solidFill>
+                  <a:schemeClr val="accent3">
+                    <a:lumMod val="50000"/>
+                  </a:schemeClr>
+                </a:solidFill>
+                <a:latin typeface="페이퍼로지 4 Regular" charset="-127"/>
+                <a:ea typeface="페이퍼로지 4 Regular" charset="-127"/>
+                <a:cs typeface="Montserrat SemiBold"/>
+                <a:sym typeface="Wingdings" panose="05000000000000000000" pitchFamily="2" charset="2"/>
+              </a:rPr>
+              <a:t>CBC... : </a:t>
+            </a:r>
+            <a:r>
+              <a:rPr lang="ko-KR" altLang="en-US" sz="1800">
+                <a:solidFill>
+                  <a:schemeClr val="accent3">
+                    <a:lumMod val="50000"/>
+                  </a:schemeClr>
+                </a:solidFill>
+                <a:latin typeface="페이퍼로지 4 Regular" charset="-127"/>
+                <a:ea typeface="페이퍼로지 4 Regular" charset="-127"/>
+                <a:cs typeface="Montserrat SemiBold"/>
+                <a:sym typeface="Wingdings" panose="05000000000000000000" pitchFamily="2" charset="2"/>
+              </a:rPr>
+              <a:t>이전 블록의 결과를 기다려</a:t>
+            </a:r>
+            <a:r>
+              <a:rPr lang="en-US" altLang="ko-KR" sz="1800">
+                <a:solidFill>
+                  <a:schemeClr val="accent3">
+                    <a:lumMod val="50000"/>
+                  </a:schemeClr>
+                </a:solidFill>
+                <a:latin typeface="페이퍼로지 4 Regular" charset="-127"/>
+                <a:ea typeface="페이퍼로지 4 Regular" charset="-127"/>
+                <a:cs typeface="Montserrat SemiBold"/>
+                <a:sym typeface="Wingdings" panose="05000000000000000000" pitchFamily="2" charset="2"/>
+              </a:rPr>
+              <a:t>... = IV... = Vuln...</a:t>
+            </a:r>
             <a:endParaRPr lang="en-US" altLang="ko-KR" sz="1800">
               <a:solidFill>
                 <a:schemeClr val="tx1"/>
@@ -14712,7 +15125,7 @@
           <p:nvPr>
             <p:extLst>
               <p:ext uri="{D42A27DB-BD31-4B8C-83A1-F6EECF244321}">
-                <p14:modId xmlns:p14="http://schemas.microsoft.com/office/powerpoint/2010/main" val="1240624976"/>
+                <p14:modId xmlns:p14="http://schemas.microsoft.com/office/powerpoint/2010/main" val="864424164"/>
               </p:ext>
             </p:extLst>
           </p:nvPr>
@@ -14765,7 +15178,10 @@
                     <a:p>
                       <a:pPr latinLnBrk="1"/>
                       <a:r>
-                        <a:rPr lang="ko-KR" altLang="en-US" sz="1100"/>
+                        <a:rPr lang="ko-KR" altLang="en-US" sz="1100">
+                          <a:latin typeface="페이퍼로지 4 Regular" pitchFamily="2" charset="-127"/>
+                          <a:ea typeface="페이퍼로지 4 Regular" pitchFamily="2" charset="-127"/>
+                        </a:rPr>
                         <a:t>요소</a:t>
                       </a:r>
                     </a:p>
@@ -14785,7 +15201,10 @@
                     <a:p>
                       <a:pPr latinLnBrk="1"/>
                       <a:r>
-                        <a:rPr lang="ko-KR" altLang="en-US" sz="1100"/>
+                        <a:rPr lang="ko-KR" altLang="en-US" sz="1100">
+                          <a:latin typeface="페이퍼로지 4 Regular" pitchFamily="2" charset="-127"/>
+                          <a:ea typeface="페이퍼로지 4 Regular" pitchFamily="2" charset="-127"/>
+                        </a:rPr>
                         <a:t>의미</a:t>
                       </a:r>
                     </a:p>
@@ -14805,7 +15224,10 @@
                     <a:p>
                       <a:pPr latinLnBrk="1"/>
                       <a:r>
-                        <a:rPr lang="ko-KR" altLang="en-US" sz="1100"/>
+                        <a:rPr lang="ko-KR" altLang="en-US" sz="1100">
+                          <a:latin typeface="페이퍼로지 4 Regular" pitchFamily="2" charset="-127"/>
+                          <a:ea typeface="페이퍼로지 4 Regular" pitchFamily="2" charset="-127"/>
+                        </a:rPr>
                         <a:t>역할</a:t>
                       </a:r>
                     </a:p>
@@ -14825,7 +15247,10 @@
                     <a:p>
                       <a:pPr latinLnBrk="1"/>
                       <a:r>
-                        <a:rPr lang="ko-KR" altLang="en-US" sz="1100"/>
+                        <a:rPr lang="ko-KR" altLang="en-US" sz="1100">
+                          <a:latin typeface="페이퍼로지 4 Regular" pitchFamily="2" charset="-127"/>
+                          <a:ea typeface="페이퍼로지 4 Regular" pitchFamily="2" charset="-127"/>
+                        </a:rPr>
                         <a:t>비고</a:t>
                       </a:r>
                     </a:p>
@@ -14852,10 +15277,16 @@
                     <a:p>
                       <a:pPr latinLnBrk="1"/>
                       <a:r>
-                        <a:rPr lang="en-US" altLang="ko-KR" sz="1100"/>
+                        <a:rPr lang="en-US" altLang="ko-KR" sz="1100">
+                          <a:latin typeface="페이퍼로지 4 Regular" pitchFamily="2" charset="-127"/>
+                          <a:ea typeface="페이퍼로지 4 Regular" pitchFamily="2" charset="-127"/>
+                        </a:rPr>
                         <a:t>Key</a:t>
                       </a:r>
-                      <a:endParaRPr lang="ko-KR" altLang="en-US" sz="1100"/>
+                      <a:endParaRPr lang="ko-KR" altLang="en-US" sz="1100">
+                        <a:latin typeface="페이퍼로지 4 Regular" pitchFamily="2" charset="-127"/>
+                        <a:ea typeface="페이퍼로지 4 Regular" pitchFamily="2" charset="-127"/>
+                      </a:endParaRPr>
                     </a:p>
                   </a:txBody>
                   <a:tcPr anchor="ctr"/>
@@ -14867,17 +15298,29 @@
                     <a:p>
                       <a:pPr latinLnBrk="1"/>
                       <a:r>
-                        <a:rPr lang="ko-KR" altLang="en-US" sz="1100"/>
+                        <a:rPr lang="ko-KR" altLang="en-US" sz="1100">
+                          <a:latin typeface="페이퍼로지 4 Regular" pitchFamily="2" charset="-127"/>
+                          <a:ea typeface="페이퍼로지 4 Regular" pitchFamily="2" charset="-127"/>
+                        </a:rPr>
                         <a:t>암호 키</a:t>
                       </a:r>
                       <a:br>
-                        <a:rPr lang="en-US" altLang="ko-KR" sz="1100"/>
+                        <a:rPr lang="en-US" altLang="ko-KR" sz="1100">
+                          <a:latin typeface="페이퍼로지 4 Regular" pitchFamily="2" charset="-127"/>
+                          <a:ea typeface="페이퍼로지 4 Regular" pitchFamily="2" charset="-127"/>
+                        </a:rPr>
                       </a:br>
                       <a:r>
-                        <a:rPr lang="en-US" altLang="ko-KR" sz="1100"/>
+                        <a:rPr lang="en-US" altLang="ko-KR" sz="1100">
+                          <a:latin typeface="페이퍼로지 4 Regular" pitchFamily="2" charset="-127"/>
+                          <a:ea typeface="페이퍼로지 4 Regular" pitchFamily="2" charset="-127"/>
+                        </a:rPr>
                         <a:t>32 byte(256)</a:t>
                       </a:r>
-                      <a:endParaRPr lang="ko-KR" altLang="en-US" sz="1100"/>
+                      <a:endParaRPr lang="ko-KR" altLang="en-US" sz="1100">
+                        <a:latin typeface="페이퍼로지 4 Regular" pitchFamily="2" charset="-127"/>
+                        <a:ea typeface="페이퍼로지 4 Regular" pitchFamily="2" charset="-127"/>
+                      </a:endParaRPr>
                     </a:p>
                   </a:txBody>
                   <a:tcPr anchor="ctr"/>
@@ -14889,11 +15332,17 @@
                     <a:p>
                       <a:pPr latinLnBrk="1"/>
                       <a:r>
-                        <a:rPr lang="en-US" altLang="ko-KR" sz="1100"/>
+                        <a:rPr lang="en-US" altLang="ko-KR" sz="1100">
+                          <a:latin typeface="페이퍼로지 4 Regular" pitchFamily="2" charset="-127"/>
+                          <a:ea typeface="페이퍼로지 4 Regular" pitchFamily="2" charset="-127"/>
+                        </a:rPr>
                         <a:t>256 bit </a:t>
                       </a:r>
                       <a:r>
-                        <a:rPr lang="ko-KR" altLang="en-US" sz="1100"/>
+                        <a:rPr lang="ko-KR" altLang="en-US" sz="1100">
+                          <a:latin typeface="페이퍼로지 4 Regular" pitchFamily="2" charset="-127"/>
+                          <a:ea typeface="페이퍼로지 4 Regular" pitchFamily="2" charset="-127"/>
+                        </a:rPr>
                         <a:t>비밀 값</a:t>
                       </a:r>
                     </a:p>
@@ -14907,15 +15356,24 @@
                     <a:p>
                       <a:pPr latinLnBrk="1"/>
                       <a:r>
-                        <a:rPr lang="ko-KR" altLang="en-US" sz="1100"/>
+                        <a:rPr lang="ko-KR" altLang="en-US" sz="1100">
+                          <a:latin typeface="페이퍼로지 4 Regular" pitchFamily="2" charset="-127"/>
+                          <a:ea typeface="페이퍼로지 4 Regular" pitchFamily="2" charset="-127"/>
+                        </a:rPr>
                         <a:t>메모리 덤프나 </a:t>
                       </a:r>
                       <a:r>
-                        <a:rPr lang="en-US" altLang="ko-KR" sz="1100"/>
+                        <a:rPr lang="en-US" altLang="ko-KR" sz="1100">
+                          <a:latin typeface="페이퍼로지 4 Regular" pitchFamily="2" charset="-127"/>
+                          <a:ea typeface="페이퍼로지 4 Regular" pitchFamily="2" charset="-127"/>
+                        </a:rPr>
                         <a:t>**DPAPI**</a:t>
                       </a:r>
                       <a:r>
-                        <a:rPr lang="ko-KR" altLang="en-US" sz="1100"/>
+                        <a:rPr lang="ko-KR" altLang="en-US" sz="1100">
+                          <a:latin typeface="페이퍼로지 4 Regular" pitchFamily="2" charset="-127"/>
+                          <a:ea typeface="페이퍼로지 4 Regular" pitchFamily="2" charset="-127"/>
+                        </a:rPr>
                         <a:t>를 통해 확보</a:t>
                       </a:r>
                     </a:p>
@@ -14936,10 +15394,16 @@
                     <a:p>
                       <a:pPr latinLnBrk="1"/>
                       <a:r>
-                        <a:rPr lang="en-US" altLang="ko-KR" sz="1100"/>
+                        <a:rPr lang="en-US" altLang="ko-KR" sz="1100">
+                          <a:latin typeface="페이퍼로지 4 Regular" pitchFamily="2" charset="-127"/>
+                          <a:ea typeface="페이퍼로지 4 Regular" pitchFamily="2" charset="-127"/>
+                        </a:rPr>
                         <a:t>Nonce / IV</a:t>
                       </a:r>
-                      <a:endParaRPr lang="ko-KR" altLang="en-US" sz="1100"/>
+                      <a:endParaRPr lang="ko-KR" altLang="en-US" sz="1100">
+                        <a:latin typeface="페이퍼로지 4 Regular" pitchFamily="2" charset="-127"/>
+                        <a:ea typeface="페이퍼로지 4 Regular" pitchFamily="2" charset="-127"/>
+                      </a:endParaRPr>
                     </a:p>
                   </a:txBody>
                   <a:tcPr anchor="ctr"/>
@@ -14951,17 +15415,29 @@
                     <a:p>
                       <a:pPr latinLnBrk="1"/>
                       <a:r>
-                        <a:rPr lang="ko-KR" altLang="en-US" sz="1100"/>
+                        <a:rPr lang="ko-KR" altLang="en-US" sz="1100">
+                          <a:latin typeface="페이퍼로지 4 Regular" pitchFamily="2" charset="-127"/>
+                          <a:ea typeface="페이퍼로지 4 Regular" pitchFamily="2" charset="-127"/>
+                        </a:rPr>
                         <a:t>초기화 벡터</a:t>
                       </a:r>
                       <a:br>
-                        <a:rPr lang="en-US" altLang="ko-KR" sz="1100"/>
+                        <a:rPr lang="en-US" altLang="ko-KR" sz="1100">
+                          <a:latin typeface="페이퍼로지 4 Regular" pitchFamily="2" charset="-127"/>
+                          <a:ea typeface="페이퍼로지 4 Regular" pitchFamily="2" charset="-127"/>
+                        </a:rPr>
                       </a:br>
                       <a:r>
-                        <a:rPr lang="en-US" altLang="ko-KR" sz="1100"/>
+                        <a:rPr lang="en-US" altLang="ko-KR" sz="1100">
+                          <a:latin typeface="페이퍼로지 4 Regular" pitchFamily="2" charset="-127"/>
+                          <a:ea typeface="페이퍼로지 4 Regular" pitchFamily="2" charset="-127"/>
+                        </a:rPr>
                         <a:t>12 byte</a:t>
                       </a:r>
-                      <a:endParaRPr lang="ko-KR" altLang="en-US" sz="1100"/>
+                      <a:endParaRPr lang="ko-KR" altLang="en-US" sz="1100">
+                        <a:latin typeface="페이퍼로지 4 Regular" pitchFamily="2" charset="-127"/>
+                        <a:ea typeface="페이퍼로지 4 Regular" pitchFamily="2" charset="-127"/>
+                      </a:endParaRPr>
                     </a:p>
                   </a:txBody>
                   <a:tcPr anchor="ctr"/>
@@ -14973,7 +15449,10 @@
                     <a:p>
                       <a:pPr latinLnBrk="1"/>
                       <a:r>
-                        <a:rPr lang="ko-KR" altLang="en-US" sz="1100"/>
+                        <a:rPr lang="ko-KR" altLang="en-US" sz="1100">
+                          <a:latin typeface="페이퍼로지 4 Regular" pitchFamily="2" charset="-127"/>
+                          <a:ea typeface="페이퍼로지 4 Regular" pitchFamily="2" charset="-127"/>
+                        </a:rPr>
                         <a:t>매번 바뀌는 고유 번호</a:t>
                       </a:r>
                     </a:p>
@@ -14987,14 +15466,23 @@
                     <a:p>
                       <a:pPr latinLnBrk="1"/>
                       <a:r>
-                        <a:rPr lang="ko-KR" altLang="en-US" sz="1100"/>
+                        <a:rPr lang="ko-KR" altLang="en-US" sz="1100">
+                          <a:latin typeface="페이퍼로지 4 Regular" pitchFamily="2" charset="-127"/>
+                          <a:ea typeface="페이퍼로지 4 Regular" pitchFamily="2" charset="-127"/>
+                        </a:rPr>
                         <a:t>절대 재사용 금지</a:t>
                       </a:r>
                       <a:r>
-                        <a:rPr lang="en-US" altLang="ko-KR" sz="1100"/>
+                        <a:rPr lang="en-US" altLang="ko-KR" sz="1100">
+                          <a:latin typeface="페이퍼로지 4 Regular" pitchFamily="2" charset="-127"/>
+                          <a:ea typeface="페이퍼로지 4 Regular" pitchFamily="2" charset="-127"/>
+                        </a:rPr>
                         <a:t>. </a:t>
                       </a:r>
-                      <a:endParaRPr lang="ko-KR" altLang="en-US" sz="1100"/>
+                      <a:endParaRPr lang="ko-KR" altLang="en-US" sz="1100">
+                        <a:latin typeface="페이퍼로지 4 Regular" pitchFamily="2" charset="-127"/>
+                        <a:ea typeface="페이퍼로지 4 Regular" pitchFamily="2" charset="-127"/>
+                      </a:endParaRPr>
                     </a:p>
                   </a:txBody>
                   <a:tcPr anchor="ctr"/>
@@ -15013,10 +15501,16 @@
                     <a:p>
                       <a:pPr latinLnBrk="1"/>
                       <a:r>
-                        <a:rPr lang="en-US" altLang="ko-KR" sz="1100"/>
+                        <a:rPr lang="en-US" altLang="ko-KR" sz="1100">
+                          <a:latin typeface="페이퍼로지 4 Regular" pitchFamily="2" charset="-127"/>
+                          <a:ea typeface="페이퍼로지 4 Regular" pitchFamily="2" charset="-127"/>
+                        </a:rPr>
                         <a:t>Ciphertext</a:t>
                       </a:r>
-                      <a:endParaRPr lang="ko-KR" altLang="en-US" sz="1100"/>
+                      <a:endParaRPr lang="ko-KR" altLang="en-US" sz="1100">
+                        <a:latin typeface="페이퍼로지 4 Regular" pitchFamily="2" charset="-127"/>
+                        <a:ea typeface="페이퍼로지 4 Regular" pitchFamily="2" charset="-127"/>
+                      </a:endParaRPr>
                     </a:p>
                   </a:txBody>
                   <a:tcPr anchor="ctr"/>
@@ -15028,17 +15522,29 @@
                     <a:p>
                       <a:pPr latinLnBrk="1"/>
                       <a:r>
-                        <a:rPr lang="ko-KR" altLang="en-US" sz="1100"/>
+                        <a:rPr lang="ko-KR" altLang="en-US" sz="1100">
+                          <a:latin typeface="페이퍼로지 4 Regular" pitchFamily="2" charset="-127"/>
+                          <a:ea typeface="페이퍼로지 4 Regular" pitchFamily="2" charset="-127"/>
+                        </a:rPr>
                         <a:t>암호문</a:t>
                       </a:r>
                       <a:br>
-                        <a:rPr lang="en-US" altLang="ko-KR" sz="1100"/>
+                        <a:rPr lang="en-US" altLang="ko-KR" sz="1100">
+                          <a:latin typeface="페이퍼로지 4 Regular" pitchFamily="2" charset="-127"/>
+                          <a:ea typeface="페이퍼로지 4 Regular" pitchFamily="2" charset="-127"/>
+                        </a:rPr>
                       </a:br>
                       <a:r>
-                        <a:rPr lang="en-US" altLang="ko-KR" sz="1100"/>
+                        <a:rPr lang="en-US" altLang="ko-KR" sz="1100">
+                          <a:latin typeface="페이퍼로지 4 Regular" pitchFamily="2" charset="-127"/>
+                          <a:ea typeface="페이퍼로지 4 Regular" pitchFamily="2" charset="-127"/>
+                        </a:rPr>
                         <a:t>var</a:t>
                       </a:r>
-                      <a:endParaRPr lang="ko-KR" altLang="en-US" sz="1100"/>
+                      <a:endParaRPr lang="ko-KR" altLang="en-US" sz="1100">
+                        <a:latin typeface="페이퍼로지 4 Regular" pitchFamily="2" charset="-127"/>
+                        <a:ea typeface="페이퍼로지 4 Regular" pitchFamily="2" charset="-127"/>
+                      </a:endParaRPr>
                     </a:p>
                   </a:txBody>
                   <a:tcPr anchor="ctr"/>
@@ -15050,7 +15556,10 @@
                     <a:p>
                       <a:pPr latinLnBrk="1"/>
                       <a:r>
-                        <a:rPr lang="ko-KR" altLang="en-US" sz="1100"/>
+                        <a:rPr lang="ko-KR" altLang="en-US" sz="1100">
+                          <a:latin typeface="페이퍼로지 4 Regular" pitchFamily="2" charset="-127"/>
+                          <a:ea typeface="페이퍼로지 4 Regular" pitchFamily="2" charset="-127"/>
+                        </a:rPr>
                         <a:t>암호화된 실제 데이터</a:t>
                       </a:r>
                     </a:p>
@@ -15064,7 +15573,10 @@
                     <a:p>
                       <a:pPr latinLnBrk="1"/>
                       <a:r>
-                        <a:rPr lang="ko-KR" altLang="en-US" sz="1100"/>
+                        <a:rPr lang="ko-KR" altLang="en-US" sz="1100">
+                          <a:latin typeface="페이퍼로지 4 Regular" pitchFamily="2" charset="-127"/>
+                          <a:ea typeface="페이퍼로지 4 Regular" pitchFamily="2" charset="-127"/>
+                        </a:rPr>
                         <a:t>분석 대상</a:t>
                       </a:r>
                     </a:p>
@@ -15085,10 +15597,16 @@
                     <a:p>
                       <a:pPr latinLnBrk="1"/>
                       <a:r>
-                        <a:rPr lang="en-US" altLang="ko-KR" sz="1100"/>
+                        <a:rPr lang="en-US" altLang="ko-KR" sz="1100">
+                          <a:latin typeface="페이퍼로지 4 Regular" pitchFamily="2" charset="-127"/>
+                          <a:ea typeface="페이퍼로지 4 Regular" pitchFamily="2" charset="-127"/>
+                        </a:rPr>
                         <a:t>Auth Tag</a:t>
                       </a:r>
-                      <a:endParaRPr lang="ko-KR" altLang="en-US" sz="1100"/>
+                      <a:endParaRPr lang="ko-KR" altLang="en-US" sz="1100">
+                        <a:latin typeface="페이퍼로지 4 Regular" pitchFamily="2" charset="-127"/>
+                        <a:ea typeface="페이퍼로지 4 Regular" pitchFamily="2" charset="-127"/>
+                      </a:endParaRPr>
                     </a:p>
                   </a:txBody>
                   <a:tcPr anchor="ctr"/>
@@ -15100,17 +15618,29 @@
                     <a:p>
                       <a:pPr latinLnBrk="1"/>
                       <a:r>
-                        <a:rPr lang="ko-KR" altLang="en-US" sz="1100"/>
+                        <a:rPr lang="ko-KR" altLang="en-US" sz="1100">
+                          <a:latin typeface="페이퍼로지 4 Regular" pitchFamily="2" charset="-127"/>
+                          <a:ea typeface="페이퍼로지 4 Regular" pitchFamily="2" charset="-127"/>
+                        </a:rPr>
                         <a:t>인증 태그</a:t>
                       </a:r>
                       <a:br>
-                        <a:rPr lang="en-US" altLang="ko-KR" sz="1100"/>
+                        <a:rPr lang="en-US" altLang="ko-KR" sz="1100">
+                          <a:latin typeface="페이퍼로지 4 Regular" pitchFamily="2" charset="-127"/>
+                          <a:ea typeface="페이퍼로지 4 Regular" pitchFamily="2" charset="-127"/>
+                        </a:rPr>
                       </a:br>
                       <a:r>
-                        <a:rPr lang="en-US" altLang="ko-KR" sz="1100"/>
+                        <a:rPr lang="en-US" altLang="ko-KR" sz="1100">
+                          <a:latin typeface="페이퍼로지 4 Regular" pitchFamily="2" charset="-127"/>
+                          <a:ea typeface="페이퍼로지 4 Regular" pitchFamily="2" charset="-127"/>
+                        </a:rPr>
                         <a:t>16 byte</a:t>
                       </a:r>
-                      <a:endParaRPr lang="ko-KR" altLang="en-US" sz="1100"/>
+                      <a:endParaRPr lang="ko-KR" altLang="en-US" sz="1100">
+                        <a:latin typeface="페이퍼로지 4 Regular" pitchFamily="2" charset="-127"/>
+                        <a:ea typeface="페이퍼로지 4 Regular" pitchFamily="2" charset="-127"/>
+                      </a:endParaRPr>
                     </a:p>
                   </a:txBody>
                   <a:tcPr anchor="ctr"/>
@@ -15122,22 +15652,37 @@
                     <a:p>
                       <a:pPr latinLnBrk="1"/>
                       <a:r>
-                        <a:rPr lang="ko-KR" altLang="en-US" sz="1100"/>
+                        <a:rPr lang="ko-KR" altLang="en-US" sz="1100">
+                          <a:latin typeface="페이퍼로지 4 Regular" pitchFamily="2" charset="-127"/>
+                          <a:ea typeface="페이퍼로지 4 Regular" pitchFamily="2" charset="-127"/>
+                        </a:rPr>
                         <a:t>데이터의 </a:t>
                       </a:r>
                       <a:r>
-                        <a:rPr lang="en-US" altLang="ko-KR" sz="1100"/>
+                        <a:rPr lang="en-US" altLang="ko-KR" sz="1100">
+                          <a:latin typeface="페이퍼로지 4 Regular" pitchFamily="2" charset="-127"/>
+                          <a:ea typeface="페이퍼로지 4 Regular" pitchFamily="2" charset="-127"/>
+                        </a:rPr>
                         <a:t>“</a:t>
                       </a:r>
                       <a:r>
-                        <a:rPr lang="ko-KR" altLang="en-US" sz="1100"/>
+                        <a:rPr lang="ko-KR" altLang="en-US" sz="1100">
+                          <a:latin typeface="페이퍼로지 4 Regular" pitchFamily="2" charset="-127"/>
+                          <a:ea typeface="페이퍼로지 4 Regular" pitchFamily="2" charset="-127"/>
+                        </a:rPr>
                         <a:t>봉인 스티커</a:t>
                       </a:r>
                       <a:r>
-                        <a:rPr lang="en-US" altLang="ko-KR" sz="1100"/>
+                        <a:rPr lang="en-US" altLang="ko-KR" sz="1100">
+                          <a:latin typeface="페이퍼로지 4 Regular" pitchFamily="2" charset="-127"/>
+                          <a:ea typeface="페이퍼로지 4 Regular" pitchFamily="2" charset="-127"/>
+                        </a:rPr>
                         <a:t>”</a:t>
                       </a:r>
-                      <a:endParaRPr lang="ko-KR" altLang="en-US" sz="1100"/>
+                      <a:endParaRPr lang="ko-KR" altLang="en-US" sz="1100">
+                        <a:latin typeface="페이퍼로지 4 Regular" pitchFamily="2" charset="-127"/>
+                        <a:ea typeface="페이퍼로지 4 Regular" pitchFamily="2" charset="-127"/>
+                      </a:endParaRPr>
                     </a:p>
                   </a:txBody>
                   <a:tcPr anchor="ctr"/>
@@ -15149,22 +15694,37 @@
                     <a:p>
                       <a:pPr latinLnBrk="1"/>
                       <a:r>
-                        <a:rPr lang="ko-KR" altLang="en-US" sz="1100"/>
+                        <a:rPr lang="ko-KR" altLang="en-US" sz="1100">
+                          <a:latin typeface="페이퍼로지 4 Regular" pitchFamily="2" charset="-127"/>
+                          <a:ea typeface="페이퍼로지 4 Regular" pitchFamily="2" charset="-127"/>
+                        </a:rPr>
                         <a:t>데이터 조작 검증 </a:t>
                       </a:r>
                       <a:r>
-                        <a:rPr lang="en-US" altLang="ko-KR" sz="1100"/>
+                        <a:rPr lang="en-US" altLang="ko-KR" sz="1100">
+                          <a:latin typeface="페이퍼로지 4 Regular" pitchFamily="2" charset="-127"/>
+                          <a:ea typeface="페이퍼로지 4 Regular" pitchFamily="2" charset="-127"/>
+                        </a:rPr>
                         <a:t>(</a:t>
                       </a:r>
                       <a:r>
-                        <a:rPr lang="ko-KR" altLang="en-US" sz="1100"/>
+                        <a:rPr lang="ko-KR" altLang="en-US" sz="1100">
+                          <a:latin typeface="페이퍼로지 4 Regular" pitchFamily="2" charset="-127"/>
+                          <a:ea typeface="페이퍼로지 4 Regular" pitchFamily="2" charset="-127"/>
+                        </a:rPr>
                         <a:t>해시 같은 역할</a:t>
                       </a:r>
                       <a:r>
-                        <a:rPr lang="en-US" altLang="ko-KR" sz="1100"/>
+                        <a:rPr lang="en-US" altLang="ko-KR" sz="1100">
+                          <a:latin typeface="페이퍼로지 4 Regular" pitchFamily="2" charset="-127"/>
+                          <a:ea typeface="페이퍼로지 4 Regular" pitchFamily="2" charset="-127"/>
+                        </a:rPr>
                         <a:t>)</a:t>
                       </a:r>
-                      <a:endParaRPr lang="ko-KR" altLang="en-US" sz="1100"/>
+                      <a:endParaRPr lang="ko-KR" altLang="en-US" sz="1100">
+                        <a:latin typeface="페이퍼로지 4 Regular" pitchFamily="2" charset="-127"/>
+                        <a:ea typeface="페이퍼로지 4 Regular" pitchFamily="2" charset="-127"/>
+                      </a:endParaRPr>
                     </a:p>
                   </a:txBody>
                   <a:tcPr anchor="ctr"/>
@@ -15482,14 +16042,14 @@
           <p:nvPr>
             <p:extLst>
               <p:ext uri="{D42A27DB-BD31-4B8C-83A1-F6EECF244321}">
-                <p14:modId xmlns:p14="http://schemas.microsoft.com/office/powerpoint/2010/main" val="1338600162"/>
+                <p14:modId xmlns:p14="http://schemas.microsoft.com/office/powerpoint/2010/main" val="4151442593"/>
               </p:ext>
             </p:extLst>
           </p:nvPr>
         </p:nvGraphicFramePr>
         <p:xfrm>
           <a:off x="811200" y="1324550"/>
-          <a:ext cx="6096000" cy="1483360"/>
+          <a:ext cx="6096000" cy="1925320"/>
         </p:xfrm>
         <a:graphic>
           <a:graphicData uri="http://schemas.openxmlformats.org/drawingml/2006/table">
@@ -15534,7 +16094,10 @@
                     <a:lstStyle/>
                     <a:p>
                       <a:pPr latinLnBrk="1"/>
-                      <a:endParaRPr lang="ko-KR" altLang="en-US" sz="1100"/>
+                      <a:endParaRPr lang="ko-KR" altLang="en-US" sz="1400">
+                        <a:latin typeface="페이퍼로지 4 Regular" pitchFamily="2" charset="-127"/>
+                        <a:ea typeface="페이퍼로지 4 Regular" pitchFamily="2" charset="-127"/>
+                      </a:endParaRPr>
                     </a:p>
                   </a:txBody>
                   <a:tcPr anchor="ctr">
@@ -15552,10 +16115,16 @@
                     <a:p>
                       <a:pPr latinLnBrk="1"/>
                       <a:r>
-                        <a:rPr lang="en-US" altLang="ko-KR" sz="1100"/>
+                        <a:rPr lang="en-US" altLang="ko-KR" sz="1400">
+                          <a:latin typeface="페이퍼로지 4 Regular" pitchFamily="2" charset="-127"/>
+                          <a:ea typeface="페이퍼로지 4 Regular" pitchFamily="2" charset="-127"/>
+                        </a:rPr>
                         <a:t>CheckSum</a:t>
                       </a:r>
-                      <a:endParaRPr lang="ko-KR" altLang="en-US" sz="1100"/>
+                      <a:endParaRPr lang="ko-KR" altLang="en-US" sz="1400">
+                        <a:latin typeface="페이퍼로지 4 Regular" pitchFamily="2" charset="-127"/>
+                        <a:ea typeface="페이퍼로지 4 Regular" pitchFamily="2" charset="-127"/>
+                      </a:endParaRPr>
                     </a:p>
                   </a:txBody>
                   <a:tcPr anchor="ctr">
@@ -15573,10 +16142,16 @@
                     <a:p>
                       <a:pPr latinLnBrk="1"/>
                       <a:r>
-                        <a:rPr lang="en-US" altLang="ko-KR" sz="1100"/>
+                        <a:rPr lang="en-US" altLang="ko-KR" sz="1400">
+                          <a:latin typeface="페이퍼로지 4 Regular" pitchFamily="2" charset="-127"/>
+                          <a:ea typeface="페이퍼로지 4 Regular" pitchFamily="2" charset="-127"/>
+                        </a:rPr>
                         <a:t>Hash</a:t>
                       </a:r>
-                      <a:endParaRPr lang="ko-KR" altLang="en-US" sz="1100"/>
+                      <a:endParaRPr lang="ko-KR" altLang="en-US" sz="1400">
+                        <a:latin typeface="페이퍼로지 4 Regular" pitchFamily="2" charset="-127"/>
+                        <a:ea typeface="페이퍼로지 4 Regular" pitchFamily="2" charset="-127"/>
+                      </a:endParaRPr>
                     </a:p>
                   </a:txBody>
                   <a:tcPr anchor="ctr">
@@ -15594,10 +16169,16 @@
                     <a:p>
                       <a:pPr latinLnBrk="1"/>
                       <a:r>
-                        <a:rPr lang="en-US" altLang="ko-KR" sz="1100"/>
+                        <a:rPr lang="en-US" altLang="ko-KR" sz="1400">
+                          <a:latin typeface="페이퍼로지 4 Regular" pitchFamily="2" charset="-127"/>
+                          <a:ea typeface="페이퍼로지 4 Regular" pitchFamily="2" charset="-127"/>
+                        </a:rPr>
                         <a:t>Auth Tag (MAC)</a:t>
                       </a:r>
-                      <a:endParaRPr lang="ko-KR" altLang="en-US" sz="1100"/>
+                      <a:endParaRPr lang="ko-KR" altLang="en-US" sz="1400">
+                        <a:latin typeface="페이퍼로지 4 Regular" pitchFamily="2" charset="-127"/>
+                        <a:ea typeface="페이퍼로지 4 Regular" pitchFamily="2" charset="-127"/>
+                      </a:endParaRPr>
                     </a:p>
                   </a:txBody>
                   <a:tcPr anchor="ctr">
@@ -15622,7 +16203,10 @@
                     <a:p>
                       <a:pPr latinLnBrk="1"/>
                       <a:r>
-                        <a:rPr lang="ko-KR" altLang="en-US" sz="1100"/>
+                        <a:rPr lang="ko-KR" altLang="en-US" sz="1400">
+                          <a:latin typeface="페이퍼로지 4 Regular" pitchFamily="2" charset="-127"/>
+                          <a:ea typeface="페이퍼로지 4 Regular" pitchFamily="2" charset="-127"/>
+                        </a:rPr>
                         <a:t>계산 주체</a:t>
                       </a:r>
                     </a:p>
@@ -15636,7 +16220,10 @@
                     <a:p>
                       <a:pPr latinLnBrk="1"/>
                       <a:r>
-                        <a:rPr lang="ko-KR" altLang="en-US" sz="1100"/>
+                        <a:rPr lang="ko-KR" altLang="en-US" sz="1400">
+                          <a:latin typeface="페이퍼로지 4 Regular" pitchFamily="2" charset="-127"/>
+                          <a:ea typeface="페이퍼로지 4 Regular" pitchFamily="2" charset="-127"/>
+                        </a:rPr>
                         <a:t>누구나</a:t>
                       </a:r>
                     </a:p>
@@ -15650,7 +16237,10 @@
                     <a:p>
                       <a:pPr latinLnBrk="1"/>
                       <a:r>
-                        <a:rPr lang="ko-KR" altLang="en-US" sz="1100"/>
+                        <a:rPr lang="ko-KR" altLang="en-US" sz="1400">
+                          <a:latin typeface="페이퍼로지 4 Regular" pitchFamily="2" charset="-127"/>
+                          <a:ea typeface="페이퍼로지 4 Regular" pitchFamily="2" charset="-127"/>
+                        </a:rPr>
                         <a:t>누구나</a:t>
                       </a:r>
                     </a:p>
@@ -15664,14 +16254,23 @@
                     <a:p>
                       <a:pPr latinLnBrk="1"/>
                       <a:r>
-                        <a:rPr lang="ko-KR" altLang="en-US" sz="1100"/>
+                        <a:rPr lang="ko-KR" altLang="en-US" sz="1400">
+                          <a:latin typeface="페이퍼로지 4 Regular" pitchFamily="2" charset="-127"/>
+                          <a:ea typeface="페이퍼로지 4 Regular" pitchFamily="2" charset="-127"/>
+                        </a:rPr>
                         <a:t>비밀키를 가진 사람만</a:t>
                       </a:r>
                       <a:r>
-                        <a:rPr lang="en-US" altLang="ko-KR" sz="1100"/>
+                        <a:rPr lang="en-US" altLang="ko-KR" sz="1400">
+                          <a:latin typeface="페이퍼로지 4 Regular" pitchFamily="2" charset="-127"/>
+                          <a:ea typeface="페이퍼로지 4 Regular" pitchFamily="2" charset="-127"/>
+                        </a:rPr>
                         <a:t>!</a:t>
                       </a:r>
-                      <a:endParaRPr lang="ko-KR" altLang="en-US" sz="1100"/>
+                      <a:endParaRPr lang="ko-KR" altLang="en-US" sz="1400">
+                        <a:latin typeface="페이퍼로지 4 Regular" pitchFamily="2" charset="-127"/>
+                        <a:ea typeface="페이퍼로지 4 Regular" pitchFamily="2" charset="-127"/>
+                      </a:endParaRPr>
                     </a:p>
                   </a:txBody>
                   <a:tcPr anchor="ctr"/>
@@ -15690,14 +16289,23 @@
                     <a:p>
                       <a:pPr latinLnBrk="1"/>
                       <a:r>
-                        <a:rPr lang="ko-KR" altLang="en-US" sz="1100"/>
+                        <a:rPr lang="ko-KR" altLang="en-US" sz="1400">
+                          <a:latin typeface="페이퍼로지 4 Regular" pitchFamily="2" charset="-127"/>
+                          <a:ea typeface="페이퍼로지 4 Regular" pitchFamily="2" charset="-127"/>
+                        </a:rPr>
                         <a:t>변조 방지</a:t>
                       </a:r>
                       <a:r>
-                        <a:rPr lang="en-US" altLang="ko-KR" sz="1100"/>
+                        <a:rPr lang="en-US" altLang="ko-KR" sz="1400">
+                          <a:latin typeface="페이퍼로지 4 Regular" pitchFamily="2" charset="-127"/>
+                          <a:ea typeface="페이퍼로지 4 Regular" pitchFamily="2" charset="-127"/>
+                        </a:rPr>
                         <a:t>?</a:t>
                       </a:r>
-                      <a:endParaRPr lang="ko-KR" altLang="en-US" sz="1100"/>
+                      <a:endParaRPr lang="ko-KR" altLang="en-US" sz="1400">
+                        <a:latin typeface="페이퍼로지 4 Regular" pitchFamily="2" charset="-127"/>
+                        <a:ea typeface="페이퍼로지 4 Regular" pitchFamily="2" charset="-127"/>
+                      </a:endParaRPr>
                     </a:p>
                   </a:txBody>
                   <a:tcPr anchor="ctr"/>
@@ -15709,7 +16317,10 @@
                     <a:p>
                       <a:pPr latinLnBrk="1"/>
                       <a:r>
-                        <a:rPr lang="ko-KR" altLang="en-US" sz="1100"/>
+                        <a:rPr lang="ko-KR" altLang="en-US" sz="1400">
+                          <a:latin typeface="페이퍼로지 4 Regular" pitchFamily="2" charset="-127"/>
+                          <a:ea typeface="페이퍼로지 4 Regular" pitchFamily="2" charset="-127"/>
+                        </a:rPr>
                         <a:t>불가</a:t>
                       </a:r>
                     </a:p>
@@ -15723,7 +16334,10 @@
                     <a:p>
                       <a:pPr latinLnBrk="1"/>
                       <a:r>
-                        <a:rPr lang="ko-KR" altLang="en-US" sz="1100"/>
+                        <a:rPr lang="ko-KR" altLang="en-US" sz="1400">
+                          <a:latin typeface="페이퍼로지 4 Regular" pitchFamily="2" charset="-127"/>
+                          <a:ea typeface="페이퍼로지 4 Regular" pitchFamily="2" charset="-127"/>
+                        </a:rPr>
                         <a:t>가능</a:t>
                       </a:r>
                     </a:p>
@@ -15737,7 +16351,10 @@
                     <a:p>
                       <a:pPr latinLnBrk="1"/>
                       <a:r>
-                        <a:rPr lang="ko-KR" altLang="en-US" sz="1100"/>
+                        <a:rPr lang="ko-KR" altLang="en-US" sz="1400">
+                          <a:latin typeface="페이퍼로지 4 Regular" pitchFamily="2" charset="-127"/>
+                          <a:ea typeface="페이퍼로지 4 Regular" pitchFamily="2" charset="-127"/>
+                        </a:rPr>
                         <a:t>가능</a:t>
                       </a:r>
                     </a:p>
@@ -15758,7 +16375,10 @@
                     <a:p>
                       <a:pPr latinLnBrk="1"/>
                       <a:r>
-                        <a:rPr lang="ko-KR" altLang="en-US" sz="1100"/>
+                        <a:rPr lang="ko-KR" altLang="en-US" sz="1400">
+                          <a:latin typeface="페이퍼로지 4 Regular" pitchFamily="2" charset="-127"/>
+                          <a:ea typeface="페이퍼로지 4 Regular" pitchFamily="2" charset="-127"/>
+                        </a:rPr>
                         <a:t>용도</a:t>
                       </a:r>
                     </a:p>
@@ -15772,7 +16392,10 @@
                     <a:p>
                       <a:pPr latinLnBrk="1"/>
                       <a:r>
-                        <a:rPr lang="ko-KR" altLang="en-US" sz="1100"/>
+                        <a:rPr lang="ko-KR" altLang="en-US" sz="1400">
+                          <a:latin typeface="페이퍼로지 4 Regular" pitchFamily="2" charset="-127"/>
+                          <a:ea typeface="페이퍼로지 4 Regular" pitchFamily="2" charset="-127"/>
+                        </a:rPr>
                         <a:t>단순 전송 오류 확인</a:t>
                       </a:r>
                     </a:p>
@@ -15786,7 +16409,10 @@
                     <a:p>
                       <a:pPr latinLnBrk="1"/>
                       <a:r>
-                        <a:rPr lang="ko-KR" altLang="en-US" sz="1100"/>
+                        <a:rPr lang="ko-KR" altLang="en-US" sz="1400">
+                          <a:latin typeface="페이퍼로지 4 Regular" pitchFamily="2" charset="-127"/>
+                          <a:ea typeface="페이퍼로지 4 Regular" pitchFamily="2" charset="-127"/>
+                        </a:rPr>
                         <a:t>데이터 동일성 증명</a:t>
                       </a:r>
                     </a:p>
@@ -15800,7 +16426,10 @@
                     <a:p>
                       <a:pPr latinLnBrk="1"/>
                       <a:r>
-                        <a:rPr lang="ko-KR" altLang="en-US" sz="1100"/>
+                        <a:rPr lang="ko-KR" altLang="en-US" sz="1400">
+                          <a:latin typeface="페이퍼로지 4 Regular" pitchFamily="2" charset="-127"/>
+                          <a:ea typeface="페이퍼로지 4 Regular" pitchFamily="2" charset="-127"/>
+                        </a:rPr>
                         <a:t>암호문의 무결성 보증 </a:t>
                       </a:r>
                     </a:p>
@@ -16463,12 +17092,1042 @@
           </a:p>
         </p:txBody>
       </p:sp>
+      <mc:AlternateContent xmlns:mc="http://schemas.openxmlformats.org/markup-compatibility/2006">
+        <mc:Choice xmlns:a14="http://schemas.microsoft.com/office/drawing/2010/main" Requires="a14">
+          <p:sp>
+            <p:nvSpPr>
+              <p:cNvPr id="5" name="TextBox 4">
+                <a:extLst>
+                  <a:ext uri="{FF2B5EF4-FFF2-40B4-BE49-F238E27FC236}">
+                    <a16:creationId xmlns:a16="http://schemas.microsoft.com/office/drawing/2014/main" id="{3324C524-C45D-DC48-E1AB-2DA505956BD7}"/>
+                  </a:ext>
+                </a:extLst>
+              </p:cNvPr>
+              <p:cNvSpPr txBox="1"/>
+              <p:nvPr/>
+            </p:nvSpPr>
+            <p:spPr>
+              <a:xfrm>
+                <a:off x="4177454" y="1294477"/>
+                <a:ext cx="4513996" cy="3600986"/>
+              </a:xfrm>
+              <a:prstGeom prst="rect">
+                <a:avLst/>
+              </a:prstGeom>
+              <a:noFill/>
+              <a:ln>
+                <a:noFill/>
+              </a:ln>
+            </p:spPr>
+            <p:txBody>
+              <a:bodyPr wrap="square" rtlCol="0">
+                <a:spAutoFit/>
+              </a:bodyPr>
+              <a:lstStyle/>
+              <a:p>
+                <a:r>
+                  <a:rPr lang="en-US" altLang="ko-KR" sz="1000">
+                    <a:solidFill>
+                      <a:schemeClr val="accent3">
+                        <a:lumMod val="50000"/>
+                      </a:schemeClr>
+                    </a:solidFill>
+                    <a:latin typeface="페이퍼로지 4 Regular" pitchFamily="2" charset="-127"/>
+                    <a:ea typeface="페이퍼로지 4 Regular" pitchFamily="2" charset="-127"/>
+                  </a:rPr>
+                  <a:t>IV : 12 byte </a:t>
+                </a:r>
+                <a:r>
+                  <a:rPr lang="ko-KR" altLang="en-US" sz="1000">
+                    <a:solidFill>
+                      <a:schemeClr val="accent3">
+                        <a:lumMod val="50000"/>
+                      </a:schemeClr>
+                    </a:solidFill>
+                    <a:latin typeface="페이퍼로지 4 Regular" pitchFamily="2" charset="-127"/>
+                    <a:ea typeface="페이퍼로지 4 Regular" pitchFamily="2" charset="-127"/>
+                  </a:rPr>
+                  <a:t>랜덤 값 생성 </a:t>
+                </a:r>
+                <a:r>
+                  <a:rPr lang="en-US" altLang="ko-KR" sz="1000">
+                    <a:solidFill>
+                      <a:schemeClr val="accent3">
+                        <a:lumMod val="50000"/>
+                      </a:schemeClr>
+                    </a:solidFill>
+                    <a:latin typeface="페이퍼로지 4 Regular" pitchFamily="2" charset="-127"/>
+                    <a:ea typeface="페이퍼로지 4 Regular" pitchFamily="2" charset="-127"/>
+                  </a:rPr>
+                  <a:t>(AES-GCM </a:t>
+                </a:r>
+                <a:r>
+                  <a:rPr lang="ko-KR" altLang="en-US" sz="1000">
+                    <a:solidFill>
+                      <a:schemeClr val="accent3">
+                        <a:lumMod val="50000"/>
+                      </a:schemeClr>
+                    </a:solidFill>
+                    <a:latin typeface="페이퍼로지 4 Regular" pitchFamily="2" charset="-127"/>
+                    <a:ea typeface="페이퍼로지 4 Regular" pitchFamily="2" charset="-127"/>
+                  </a:rPr>
+                  <a:t>표준</a:t>
+                </a:r>
+                <a:r>
+                  <a:rPr lang="en-US" altLang="ko-KR" sz="1000">
+                    <a:solidFill>
+                      <a:schemeClr val="accent3">
+                        <a:lumMod val="50000"/>
+                      </a:schemeClr>
+                    </a:solidFill>
+                    <a:latin typeface="페이퍼로지 4 Regular" pitchFamily="2" charset="-127"/>
+                    <a:ea typeface="페이퍼로지 4 Regular" pitchFamily="2" charset="-127"/>
+                  </a:rPr>
+                  <a:t>)</a:t>
+                </a:r>
+                <a:br>
+                  <a:rPr lang="en-US" altLang="ko-KR" sz="1000">
+                    <a:latin typeface="페이퍼로지 4 Regular" pitchFamily="2" charset="-127"/>
+                    <a:ea typeface="페이퍼로지 4 Regular" pitchFamily="2" charset="-127"/>
+                  </a:rPr>
+                </a:br>
+                <a:r>
+                  <a:rPr lang="ko-KR" altLang="en-US" sz="1000">
+                    <a:latin typeface="페이퍼로지 4 Regular" pitchFamily="2" charset="-127"/>
+                    <a:ea typeface="페이퍼로지 4 Regular" pitchFamily="2" charset="-127"/>
+                  </a:rPr>
+                  <a:t>메시지 마다 매번 다른 </a:t>
+                </a:r>
+                <a:r>
+                  <a:rPr lang="en-US" altLang="ko-KR" sz="1000">
+                    <a:latin typeface="페이퍼로지 4 Regular" pitchFamily="2" charset="-127"/>
+                    <a:ea typeface="페이퍼로지 4 Regular" pitchFamily="2" charset="-127"/>
+                  </a:rPr>
+                  <a:t>IV </a:t>
+                </a:r>
+                <a:r>
+                  <a:rPr lang="en-US" altLang="ko-KR" sz="1000">
+                    <a:latin typeface="페이퍼로지 4 Regular" pitchFamily="2" charset="-127"/>
+                    <a:ea typeface="페이퍼로지 4 Regular" pitchFamily="2" charset="-127"/>
+                    <a:sym typeface="Wingdings" panose="05000000000000000000" pitchFamily="2" charset="2"/>
+                  </a:rPr>
+                  <a:t> </a:t>
+                </a:r>
+                <a:r>
+                  <a:rPr lang="ko-KR" altLang="en-US" sz="1000">
+                    <a:latin typeface="페이퍼로지 4 Regular" pitchFamily="2" charset="-127"/>
+                    <a:ea typeface="페이퍼로지 4 Regular" pitchFamily="2" charset="-127"/>
+                    <a:sym typeface="Wingdings" panose="05000000000000000000" pitchFamily="2" charset="2"/>
+                  </a:rPr>
+                  <a:t>같은 데이터도 다른 암호문 생성</a:t>
+                </a:r>
+                <a:endParaRPr lang="en-US" altLang="ko-KR" sz="1000">
+                  <a:latin typeface="페이퍼로지 4 Regular" pitchFamily="2" charset="-127"/>
+                  <a:ea typeface="페이퍼로지 4 Regular" pitchFamily="2" charset="-127"/>
+                  <a:sym typeface="Wingdings" panose="05000000000000000000" pitchFamily="2" charset="2"/>
+                </a:endParaRPr>
+              </a:p>
+              <a:p>
+                <a:r>
+                  <a:rPr lang="ko-KR" altLang="en-US" sz="1000">
+                    <a:latin typeface="페이퍼로지 4 Regular" pitchFamily="2" charset="-127"/>
+                    <a:ea typeface="페이퍼로지 4 Regular" pitchFamily="2" charset="-127"/>
+                    <a:sym typeface="Wingdings" panose="05000000000000000000" pitchFamily="2" charset="2"/>
+                  </a:rPr>
+                  <a:t>같은 메시지</a:t>
+                </a:r>
+                <a:r>
+                  <a:rPr lang="en-US" altLang="ko-KR" sz="1000">
+                    <a:latin typeface="Cascadia Code" panose="020B0609020000020004" pitchFamily="49" charset="0"/>
+                    <a:ea typeface="페이퍼로지 4 Regular" pitchFamily="2" charset="-127"/>
+                    <a:cs typeface="Cascadia Code" panose="020B0609020000020004" pitchFamily="49" charset="0"/>
+                    <a:sym typeface="Wingdings" panose="05000000000000000000" pitchFamily="2" charset="2"/>
+                  </a:rPr>
+                  <a:t>(</a:t>
+                </a:r>
+                <a:r>
+                  <a:rPr lang="en-US" altLang="ko-KR" sz="1000">
+                    <a:latin typeface="Cascadia Code" panose="020B0609020000020004" pitchFamily="49" charset="0"/>
+                    <a:ea typeface="Calibri" panose="020F0502020204030204" pitchFamily="34" charset="0"/>
+                    <a:cs typeface="Cascadia Code" panose="020B0609020000020004" pitchFamily="49" charset="0"/>
+                    <a:sym typeface="Wingdings" panose="05000000000000000000" pitchFamily="2" charset="2"/>
+                  </a:rPr>
+                  <a:t>&lt;=</a:t>
+                </a:r>
+                <a:r>
+                  <a:rPr lang="en-US" altLang="ko-KR" sz="1000">
+                    <a:latin typeface="페이퍼로지 4 Regular" pitchFamily="2" charset="-127"/>
+                    <a:ea typeface="페이퍼로지 4 Regular" pitchFamily="2" charset="-127"/>
+                    <a:cs typeface="Cascadia Code" panose="020B0609020000020004" pitchFamily="49" charset="0"/>
+                    <a:sym typeface="Wingdings" panose="05000000000000000000" pitchFamily="2" charset="2"/>
+                  </a:rPr>
+                  <a:t>64GB</a:t>
+                </a:r>
+                <a:r>
+                  <a:rPr lang="en-US" altLang="ko-KR" sz="1000">
+                    <a:latin typeface="페이퍼로지 4 Regular" pitchFamily="2" charset="-127"/>
+                    <a:ea typeface="페이퍼로지 4 Regular" pitchFamily="2" charset="-127"/>
+                    <a:sym typeface="Wingdings" panose="05000000000000000000" pitchFamily="2" charset="2"/>
+                  </a:rPr>
+                  <a:t>)</a:t>
+                </a:r>
+                <a:r>
+                  <a:rPr lang="ko-KR" altLang="en-US" sz="1000">
+                    <a:latin typeface="페이퍼로지 4 Regular" pitchFamily="2" charset="-127"/>
+                    <a:ea typeface="페이퍼로지 4 Regular" pitchFamily="2" charset="-127"/>
+                    <a:sym typeface="Wingdings" panose="05000000000000000000" pitchFamily="2" charset="2"/>
+                  </a:rPr>
+                  <a:t> 내 각 데이터 블록</a:t>
+                </a:r>
+                <a:r>
+                  <a:rPr lang="en-US" altLang="ko-KR" sz="1000">
+                    <a:latin typeface="페이퍼로지 4 Regular" pitchFamily="2" charset="-127"/>
+                    <a:ea typeface="페이퍼로지 4 Regular" pitchFamily="2" charset="-127"/>
+                    <a:sym typeface="Wingdings" panose="05000000000000000000" pitchFamily="2" charset="2"/>
+                  </a:rPr>
+                  <a:t>(128 bit)</a:t>
+                </a:r>
+                <a:r>
+                  <a:rPr lang="ko-KR" altLang="en-US" sz="1000">
+                    <a:latin typeface="페이퍼로지 4 Regular" pitchFamily="2" charset="-127"/>
+                    <a:ea typeface="페이퍼로지 4 Regular" pitchFamily="2" charset="-127"/>
+                    <a:sym typeface="Wingdings" panose="05000000000000000000" pitchFamily="2" charset="2"/>
+                  </a:rPr>
+                  <a:t>에게 같은 </a:t>
+                </a:r>
+                <a:r>
+                  <a:rPr lang="en-US" altLang="ko-KR" sz="1000">
+                    <a:latin typeface="페이퍼로지 4 Regular" pitchFamily="2" charset="-127"/>
+                    <a:ea typeface="페이퍼로지 4 Regular" pitchFamily="2" charset="-127"/>
+                    <a:sym typeface="Wingdings" panose="05000000000000000000" pitchFamily="2" charset="2"/>
+                  </a:rPr>
+                  <a:t>Nonce, but diff Count</a:t>
+                </a:r>
+                <a:br>
+                  <a:rPr lang="en-US" altLang="ko-KR" sz="1000">
+                    <a:latin typeface="페이퍼로지 4 Regular" pitchFamily="2" charset="-127"/>
+                    <a:ea typeface="페이퍼로지 4 Regular" pitchFamily="2" charset="-127"/>
+                    <a:sym typeface="Wingdings" panose="05000000000000000000" pitchFamily="2" charset="2"/>
+                  </a:rPr>
+                </a:br>
+                <a:br>
+                  <a:rPr lang="en-US" altLang="ko-KR" sz="400">
+                    <a:latin typeface="페이퍼로지 4 Regular" pitchFamily="2" charset="-127"/>
+                    <a:ea typeface="페이퍼로지 4 Regular" pitchFamily="2" charset="-127"/>
+                    <a:sym typeface="Wingdings" panose="05000000000000000000" pitchFamily="2" charset="2"/>
+                  </a:rPr>
+                </a:br>
+                <a:r>
+                  <a:rPr lang="en-US" altLang="ko-KR" sz="1000">
+                    <a:latin typeface="페이퍼로지 4 Regular" pitchFamily="2" charset="-127"/>
+                    <a:ea typeface="페이퍼로지 4 Regular" pitchFamily="2" charset="-127"/>
+                    <a:sym typeface="Wingdings" panose="05000000000000000000" pitchFamily="2" charset="2"/>
+                  </a:rPr>
+                  <a:t>IV = Initial Vector = </a:t>
+                </a:r>
+                <a:r>
+                  <a:rPr lang="ko-KR" altLang="en-US" sz="1000">
+                    <a:latin typeface="페이퍼로지 4 Regular" pitchFamily="2" charset="-127"/>
+                    <a:ea typeface="페이퍼로지 4 Regular" pitchFamily="2" charset="-127"/>
+                    <a:sym typeface="Wingdings" panose="05000000000000000000" pitchFamily="2" charset="2"/>
+                  </a:rPr>
+                  <a:t>초기화 벡터 </a:t>
+                </a:r>
+                <a:r>
+                  <a:rPr lang="en-US" altLang="ko-KR" sz="1000">
+                    <a:latin typeface="페이퍼로지 4 Regular" pitchFamily="2" charset="-127"/>
+                    <a:ea typeface="페이퍼로지 4 Regular" pitchFamily="2" charset="-127"/>
+                    <a:sym typeface="Wingdings" panose="05000000000000000000" pitchFamily="2" charset="2"/>
+                  </a:rPr>
+                  <a:t>= </a:t>
+                </a:r>
+                <a:r>
+                  <a:rPr lang="ko-KR" altLang="en-US" sz="1000">
+                    <a:latin typeface="페이퍼로지 4 Regular" pitchFamily="2" charset="-127"/>
+                    <a:ea typeface="페이퍼로지 4 Regular" pitchFamily="2" charset="-127"/>
+                    <a:sym typeface="Wingdings" panose="05000000000000000000" pitchFamily="2" charset="2"/>
+                  </a:rPr>
+                  <a:t>암호화 </a:t>
+                </a:r>
+                <a:r>
+                  <a:rPr lang="en-US" altLang="ko-KR" sz="1000">
+                    <a:latin typeface="페이퍼로지 4 Regular" pitchFamily="2" charset="-127"/>
+                    <a:ea typeface="페이퍼로지 4 Regular" pitchFamily="2" charset="-127"/>
+                    <a:sym typeface="Wingdings" panose="05000000000000000000" pitchFamily="2" charset="2"/>
+                  </a:rPr>
+                  <a:t>“</a:t>
+                </a:r>
+                <a:r>
+                  <a:rPr lang="ko-KR" altLang="en-US" sz="1000">
+                    <a:latin typeface="페이퍼로지 4 Regular" pitchFamily="2" charset="-127"/>
+                    <a:ea typeface="페이퍼로지 4 Regular" pitchFamily="2" charset="-127"/>
+                    <a:sym typeface="Wingdings" panose="05000000000000000000" pitchFamily="2" charset="2"/>
+                  </a:rPr>
+                  <a:t>시작점</a:t>
+                </a:r>
+                <a:r>
+                  <a:rPr lang="en-US" altLang="ko-KR" sz="1000">
+                    <a:latin typeface="페이퍼로지 4 Regular" pitchFamily="2" charset="-127"/>
+                    <a:ea typeface="페이퍼로지 4 Regular" pitchFamily="2" charset="-127"/>
+                    <a:sym typeface="Wingdings" panose="05000000000000000000" pitchFamily="2" charset="2"/>
+                  </a:rPr>
+                  <a:t>”</a:t>
+                </a:r>
+              </a:p>
+              <a:p>
+                <a:r>
+                  <a:rPr lang="en-US" altLang="ko-KR" sz="1000">
+                    <a:latin typeface="페이퍼로지 4 Regular" pitchFamily="2" charset="-127"/>
+                    <a:ea typeface="페이퍼로지 4 Regular" pitchFamily="2" charset="-127"/>
+                    <a:sym typeface="Wingdings" panose="05000000000000000000" pitchFamily="2" charset="2"/>
+                  </a:rPr>
+                  <a:t>IV</a:t>
+                </a:r>
+                <a:r>
+                  <a:rPr lang="ko-KR" altLang="en-US" sz="1000">
+                    <a:latin typeface="페이퍼로지 4 Regular" pitchFamily="2" charset="-127"/>
+                    <a:ea typeface="페이퍼로지 4 Regular" pitchFamily="2" charset="-127"/>
+                    <a:sym typeface="Wingdings" panose="05000000000000000000" pitchFamily="2" charset="2"/>
+                  </a:rPr>
+                  <a:t> </a:t>
+                </a:r>
+                <a:r>
+                  <a:rPr lang="en-US" altLang="ko-KR" sz="1000">
+                    <a:latin typeface="페이퍼로지 4 Regular" pitchFamily="2" charset="-127"/>
+                    <a:ea typeface="페이퍼로지 4 Regular" pitchFamily="2" charset="-127"/>
+                    <a:sym typeface="Wingdings" panose="05000000000000000000" pitchFamily="2" charset="2"/>
+                  </a:rPr>
+                  <a:t>=</a:t>
+                </a:r>
+                <a:r>
+                  <a:rPr lang="ko-KR" altLang="en-US" sz="1000">
+                    <a:latin typeface="페이퍼로지 4 Regular" pitchFamily="2" charset="-127"/>
+                    <a:ea typeface="페이퍼로지 4 Regular" pitchFamily="2" charset="-127"/>
+                    <a:sym typeface="Wingdings" panose="05000000000000000000" pitchFamily="2" charset="2"/>
+                  </a:rPr>
+                  <a:t> </a:t>
+                </a:r>
+                <a:r>
+                  <a:rPr lang="en-US" altLang="ko-KR" sz="1000">
+                    <a:latin typeface="페이퍼로지 4 Regular" pitchFamily="2" charset="-127"/>
+                    <a:ea typeface="페이퍼로지 4 Regular" pitchFamily="2" charset="-127"/>
+                    <a:sym typeface="Wingdings" panose="05000000000000000000" pitchFamily="2" charset="2"/>
+                  </a:rPr>
+                  <a:t>Nonce(96) + Counter(32) = 128 bit = 16 byte</a:t>
+                </a:r>
+                <a:br>
+                  <a:rPr lang="en-US" altLang="ko-KR" sz="1000">
+                    <a:latin typeface="페이퍼로지 4 Regular" pitchFamily="2" charset="-127"/>
+                    <a:ea typeface="페이퍼로지 4 Regular" pitchFamily="2" charset="-127"/>
+                    <a:sym typeface="Wingdings" panose="05000000000000000000" pitchFamily="2" charset="2"/>
+                  </a:rPr>
+                </a:br>
+                <a:br>
+                  <a:rPr lang="en-US" altLang="ko-KR" sz="1000">
+                    <a:latin typeface="페이퍼로지 4 Regular" pitchFamily="2" charset="-127"/>
+                    <a:ea typeface="페이퍼로지 4 Regular" pitchFamily="2" charset="-127"/>
+                    <a:sym typeface="Wingdings" panose="05000000000000000000" pitchFamily="2" charset="2"/>
+                  </a:rPr>
+                </a:br>
+                <a:r>
+                  <a:rPr lang="en-US" altLang="ko-KR" sz="1000">
+                    <a:solidFill>
+                      <a:schemeClr val="accent3">
+                        <a:lumMod val="50000"/>
+                      </a:schemeClr>
+                    </a:solidFill>
+                    <a:latin typeface="페이퍼로지 4 Regular" pitchFamily="2" charset="-127"/>
+                    <a:ea typeface="페이퍼로지 4 Regular" pitchFamily="2" charset="-127"/>
+                    <a:sym typeface="Wingdings" panose="05000000000000000000" pitchFamily="2" charset="2"/>
+                  </a:rPr>
+                  <a:t>AuthTag </a:t>
+                </a:r>
+                <a:r>
+                  <a:rPr lang="ko-KR" altLang="en-US" sz="1000">
+                    <a:solidFill>
+                      <a:schemeClr val="accent3">
+                        <a:lumMod val="50000"/>
+                      </a:schemeClr>
+                    </a:solidFill>
+                    <a:latin typeface="페이퍼로지 4 Regular" pitchFamily="2" charset="-127"/>
+                    <a:ea typeface="페이퍼로지 4 Regular" pitchFamily="2" charset="-127"/>
+                    <a:sym typeface="Wingdings" panose="05000000000000000000" pitchFamily="2" charset="2"/>
+                  </a:rPr>
+                  <a:t>생성 재료</a:t>
+                </a:r>
+                <a:br>
+                  <a:rPr lang="en-US" altLang="ko-KR" sz="1000">
+                    <a:latin typeface="페이퍼로지 4 Regular" pitchFamily="2" charset="-127"/>
+                    <a:ea typeface="페이퍼로지 4 Regular" pitchFamily="2" charset="-127"/>
+                    <a:sym typeface="Wingdings" panose="05000000000000000000" pitchFamily="2" charset="2"/>
+                  </a:rPr>
+                </a:br>
+                <a:r>
+                  <a:rPr lang="en-US" altLang="ko-KR" sz="1000">
+                    <a:latin typeface="페이퍼로지 4 Regular" pitchFamily="2" charset="-127"/>
+                    <a:ea typeface="페이퍼로지 4 Regular" pitchFamily="2" charset="-127"/>
+                    <a:sym typeface="Wingdings" panose="05000000000000000000" pitchFamily="2" charset="2"/>
+                  </a:rPr>
+                  <a:t>1. </a:t>
+                </a:r>
+                <a:r>
+                  <a:rPr lang="ko-KR" altLang="en-US" sz="1000">
+                    <a:latin typeface="페이퍼로지 4 Regular" pitchFamily="2" charset="-127"/>
+                    <a:ea typeface="페이퍼로지 4 Regular" pitchFamily="2" charset="-127"/>
+                    <a:sym typeface="Wingdings" panose="05000000000000000000" pitchFamily="2" charset="2"/>
+                  </a:rPr>
+                  <a:t>암호문 </a:t>
+                </a:r>
+                <a:r>
+                  <a:rPr lang="en-US" altLang="ko-KR" sz="1000">
+                    <a:latin typeface="페이퍼로지 4 Regular" pitchFamily="2" charset="-127"/>
+                    <a:ea typeface="페이퍼로지 4 Regular" pitchFamily="2" charset="-127"/>
+                    <a:sym typeface="Wingdings" panose="05000000000000000000" pitchFamily="2" charset="2"/>
+                  </a:rPr>
+                  <a:t>(Ciphertext): </a:t>
+                </a:r>
+                <a:r>
+                  <a:rPr lang="ko-KR" altLang="en-US" sz="1000">
+                    <a:latin typeface="페이퍼로지 4 Regular" pitchFamily="2" charset="-127"/>
+                    <a:ea typeface="페이퍼로지 4 Regular" pitchFamily="2" charset="-127"/>
+                    <a:sym typeface="Wingdings" panose="05000000000000000000" pitchFamily="2" charset="2"/>
+                  </a:rPr>
+                  <a:t>평문을 암호화한 값</a:t>
+                </a:r>
+                <a:endParaRPr lang="en-US" altLang="ko-KR" sz="1000">
+                  <a:latin typeface="페이퍼로지 4 Regular" pitchFamily="2" charset="-127"/>
+                  <a:ea typeface="페이퍼로지 4 Regular" pitchFamily="2" charset="-127"/>
+                  <a:sym typeface="Wingdings" panose="05000000000000000000" pitchFamily="2" charset="2"/>
+                </a:endParaRPr>
+              </a:p>
+              <a:p>
+                <a:r>
+                  <a:rPr lang="en-US" altLang="ko-KR" sz="1000">
+                    <a:latin typeface="페이퍼로지 4 Regular" pitchFamily="2" charset="-127"/>
+                    <a:ea typeface="페이퍼로지 4 Regular" pitchFamily="2" charset="-127"/>
+                    <a:sym typeface="Wingdings" panose="05000000000000000000" pitchFamily="2" charset="2"/>
+                  </a:rPr>
+                  <a:t>2. </a:t>
+                </a:r>
+                <a:r>
+                  <a:rPr lang="ko-KR" altLang="en-US" sz="1000">
+                    <a:latin typeface="페이퍼로지 4 Regular" pitchFamily="2" charset="-127"/>
+                    <a:ea typeface="페이퍼로지 4 Regular" pitchFamily="2" charset="-127"/>
+                    <a:sym typeface="Wingdings" panose="05000000000000000000" pitchFamily="2" charset="2"/>
+                  </a:rPr>
+                  <a:t>추가 인증 데이터</a:t>
+                </a:r>
+                <a:r>
+                  <a:rPr lang="en-US" altLang="ko-KR" sz="1000">
+                    <a:latin typeface="페이퍼로지 4 Regular" pitchFamily="2" charset="-127"/>
+                    <a:ea typeface="페이퍼로지 4 Regular" pitchFamily="2" charset="-127"/>
+                    <a:sym typeface="Wingdings" panose="05000000000000000000" pitchFamily="2" charset="2"/>
+                  </a:rPr>
+                  <a:t> (AAD): </a:t>
+                </a:r>
+                <a:r>
+                  <a:rPr lang="ko-KR" altLang="en-US" sz="1000">
+                    <a:latin typeface="페이퍼로지 4 Regular" pitchFamily="2" charset="-127"/>
+                    <a:ea typeface="페이퍼로지 4 Regular" pitchFamily="2" charset="-127"/>
+                    <a:sym typeface="Wingdings" panose="05000000000000000000" pitchFamily="2" charset="2"/>
+                  </a:rPr>
+                  <a:t>암호화는 안되지만</a:t>
+                </a:r>
+                <a:r>
+                  <a:rPr lang="en-US" altLang="ko-KR" sz="1000">
+                    <a:latin typeface="페이퍼로지 4 Regular" pitchFamily="2" charset="-127"/>
+                    <a:ea typeface="페이퍼로지 4 Regular" pitchFamily="2" charset="-127"/>
+                    <a:sym typeface="Wingdings" panose="05000000000000000000" pitchFamily="2" charset="2"/>
+                  </a:rPr>
+                  <a:t>, </a:t>
+                </a:r>
+                <a:r>
+                  <a:rPr lang="ko-KR" altLang="en-US" sz="1000">
+                    <a:latin typeface="페이퍼로지 4 Regular" pitchFamily="2" charset="-127"/>
+                    <a:ea typeface="페이퍼로지 4 Regular" pitchFamily="2" charset="-127"/>
+                    <a:sym typeface="Wingdings" panose="05000000000000000000" pitchFamily="2" charset="2"/>
+                  </a:rPr>
+                  <a:t>변조는 안되는 데이터 </a:t>
+                </a:r>
+                <a:br>
+                  <a:rPr lang="en-US" altLang="ko-KR" sz="1000">
+                    <a:latin typeface="페이퍼로지 4 Regular" pitchFamily="2" charset="-127"/>
+                    <a:ea typeface="페이퍼로지 4 Regular" pitchFamily="2" charset="-127"/>
+                    <a:sym typeface="Wingdings" panose="05000000000000000000" pitchFamily="2" charset="2"/>
+                  </a:rPr>
+                </a:br>
+                <a:r>
+                  <a:rPr lang="en-US" altLang="ko-KR" sz="1000">
+                    <a:latin typeface="페이퍼로지 4 Regular" pitchFamily="2" charset="-127"/>
+                    <a:ea typeface="페이퍼로지 4 Regular" pitchFamily="2" charset="-127"/>
+                    <a:sym typeface="Wingdings" panose="05000000000000000000" pitchFamily="2" charset="2"/>
+                  </a:rPr>
+                  <a:t>	(</a:t>
+                </a:r>
+                <a:r>
+                  <a:rPr lang="ko-KR" altLang="en-US" sz="1000">
+                    <a:latin typeface="페이퍼로지 4 Regular" pitchFamily="2" charset="-127"/>
+                    <a:ea typeface="페이퍼로지 4 Regular" pitchFamily="2" charset="-127"/>
+                    <a:sym typeface="Wingdings" panose="05000000000000000000" pitchFamily="2" charset="2"/>
+                  </a:rPr>
+                  <a:t>예</a:t>
+                </a:r>
+                <a:r>
+                  <a:rPr lang="en-US" altLang="ko-KR" sz="1000">
+                    <a:latin typeface="페이퍼로지 4 Regular" pitchFamily="2" charset="-127"/>
+                    <a:ea typeface="페이퍼로지 4 Regular" pitchFamily="2" charset="-127"/>
+                    <a:sym typeface="Wingdings" panose="05000000000000000000" pitchFamily="2" charset="2"/>
+                  </a:rPr>
+                  <a:t>: </a:t>
+                </a:r>
+                <a:r>
+                  <a:rPr lang="ko-KR" altLang="en-US" sz="1000">
+                    <a:latin typeface="페이퍼로지 4 Regular" pitchFamily="2" charset="-127"/>
+                    <a:ea typeface="페이퍼로지 4 Regular" pitchFamily="2" charset="-127"/>
+                    <a:sym typeface="Wingdings" panose="05000000000000000000" pitchFamily="2" charset="2"/>
+                  </a:rPr>
+                  <a:t>프로토콜 헤더</a:t>
+                </a:r>
+                <a:r>
+                  <a:rPr lang="en-US" altLang="ko-KR" sz="1000">
+                    <a:latin typeface="페이퍼로지 4 Regular" pitchFamily="2" charset="-127"/>
+                    <a:ea typeface="페이퍼로지 4 Regular" pitchFamily="2" charset="-127"/>
+                    <a:sym typeface="Wingdings" panose="05000000000000000000" pitchFamily="2" charset="2"/>
+                  </a:rPr>
+                  <a:t>, </a:t>
+                </a:r>
+                <a:r>
+                  <a:rPr lang="ko-KR" altLang="en-US" sz="1000">
+                    <a:latin typeface="페이퍼로지 4 Regular" pitchFamily="2" charset="-127"/>
+                    <a:ea typeface="페이퍼로지 4 Regular" pitchFamily="2" charset="-127"/>
+                    <a:sym typeface="Wingdings" panose="05000000000000000000" pitchFamily="2" charset="2"/>
+                  </a:rPr>
+                  <a:t>주소 정보 등</a:t>
+                </a:r>
+                <a:r>
+                  <a:rPr lang="en-US" altLang="ko-KR" sz="1000">
+                    <a:latin typeface="페이퍼로지 4 Regular" pitchFamily="2" charset="-127"/>
+                    <a:ea typeface="페이퍼로지 4 Regular" pitchFamily="2" charset="-127"/>
+                    <a:sym typeface="Wingdings" panose="05000000000000000000" pitchFamily="2" charset="2"/>
+                  </a:rPr>
+                  <a:t>..)</a:t>
+                </a:r>
+              </a:p>
+              <a:p>
+                <a:r>
+                  <a:rPr lang="en-US" altLang="ko-KR" sz="1000">
+                    <a:latin typeface="페이퍼로지 4 Regular" pitchFamily="2" charset="-127"/>
+                    <a:ea typeface="페이퍼로지 4 Regular" pitchFamily="2" charset="-127"/>
+                    <a:sym typeface="Wingdings" panose="05000000000000000000" pitchFamily="2" charset="2"/>
+                  </a:rPr>
+                  <a:t>3. </a:t>
+                </a:r>
+                <a:r>
+                  <a:rPr lang="ko-KR" altLang="en-US" sz="1000">
+                    <a:latin typeface="페이퍼로지 4 Regular" pitchFamily="2" charset="-127"/>
+                    <a:ea typeface="페이퍼로지 4 Regular" pitchFamily="2" charset="-127"/>
+                    <a:sym typeface="Wingdings" panose="05000000000000000000" pitchFamily="2" charset="2"/>
+                  </a:rPr>
+                  <a:t>길이 블록</a:t>
+                </a:r>
+                <a:r>
+                  <a:rPr lang="en-US" altLang="ko-KR" sz="1000">
+                    <a:latin typeface="페이퍼로지 4 Regular" pitchFamily="2" charset="-127"/>
+                    <a:ea typeface="페이퍼로지 4 Regular" pitchFamily="2" charset="-127"/>
+                    <a:sym typeface="Wingdings" panose="05000000000000000000" pitchFamily="2" charset="2"/>
+                  </a:rPr>
+                  <a:t>: AAD</a:t>
+                </a:r>
+                <a:r>
+                  <a:rPr lang="ko-KR" altLang="en-US" sz="1000">
+                    <a:latin typeface="페이퍼로지 4 Regular" pitchFamily="2" charset="-127"/>
+                    <a:ea typeface="페이퍼로지 4 Regular" pitchFamily="2" charset="-127"/>
+                    <a:sym typeface="Wingdings" panose="05000000000000000000" pitchFamily="2" charset="2"/>
+                  </a:rPr>
+                  <a:t>와 암호문 길이를 비트 단위로 나타낸 값</a:t>
+                </a:r>
+                <a:endParaRPr lang="en-US" altLang="ko-KR" sz="1000">
+                  <a:latin typeface="페이퍼로지 4 Regular" pitchFamily="2" charset="-127"/>
+                  <a:ea typeface="페이퍼로지 4 Regular" pitchFamily="2" charset="-127"/>
+                  <a:sym typeface="Wingdings" panose="05000000000000000000" pitchFamily="2" charset="2"/>
+                </a:endParaRPr>
+              </a:p>
+              <a:p>
+                <a:r>
+                  <a:rPr lang="en-US" altLang="ko-KR" sz="1000">
+                    <a:latin typeface="페이퍼로지 4 Regular" pitchFamily="2" charset="-127"/>
+                    <a:ea typeface="페이퍼로지 4 Regular" pitchFamily="2" charset="-127"/>
+                    <a:sym typeface="Wingdings" panose="05000000000000000000" pitchFamily="2" charset="2"/>
+                  </a:rPr>
+                  <a:t>4. </a:t>
+                </a:r>
+                <a:r>
+                  <a:rPr lang="ko-KR" altLang="en-US" sz="1000">
+                    <a:latin typeface="페이퍼로지 4 Regular" pitchFamily="2" charset="-127"/>
+                    <a:ea typeface="페이퍼로지 4 Regular" pitchFamily="2" charset="-127"/>
+                    <a:sym typeface="Wingdings" panose="05000000000000000000" pitchFamily="2" charset="2"/>
+                  </a:rPr>
+                  <a:t>해시 키</a:t>
+                </a:r>
+                <a:r>
+                  <a:rPr lang="en-US" altLang="ko-KR" sz="1000">
+                    <a:latin typeface="페이퍼로지 4 Regular" pitchFamily="2" charset="-127"/>
+                    <a:ea typeface="페이퍼로지 4 Regular" pitchFamily="2" charset="-127"/>
+                    <a:sym typeface="Wingdings" panose="05000000000000000000" pitchFamily="2" charset="2"/>
+                  </a:rPr>
+                  <a:t>: AES </a:t>
+                </a:r>
+                <a:r>
+                  <a:rPr lang="ko-KR" altLang="en-US" sz="1000">
+                    <a:latin typeface="페이퍼로지 4 Regular" pitchFamily="2" charset="-127"/>
+                    <a:ea typeface="페이퍼로지 4 Regular" pitchFamily="2" charset="-127"/>
+                    <a:sym typeface="Wingdings" panose="05000000000000000000" pitchFamily="2" charset="2"/>
+                  </a:rPr>
+                  <a:t>키를 이용해 암호화 알고리즘 내부에서 생성된 별도의 키</a:t>
+                </a:r>
+                <a:r>
+                  <a:rPr lang="en-US" altLang="ko-KR" sz="1000">
+                    <a:latin typeface="페이퍼로지 4 Regular" pitchFamily="2" charset="-127"/>
+                    <a:ea typeface="페이퍼로지 4 Regular" pitchFamily="2" charset="-127"/>
+                    <a:sym typeface="Wingdings" panose="05000000000000000000" pitchFamily="2" charset="2"/>
+                  </a:rPr>
+                  <a:t>..?</a:t>
+                </a:r>
+              </a:p>
+              <a:p>
+                <a:endParaRPr lang="en-US" altLang="ko-KR" sz="1000">
+                  <a:latin typeface="페이퍼로지 4 Regular" pitchFamily="2" charset="-127"/>
+                  <a:ea typeface="페이퍼로지 4 Regular" pitchFamily="2" charset="-127"/>
+                  <a:sym typeface="Wingdings" panose="05000000000000000000" pitchFamily="2" charset="2"/>
+                </a:endParaRPr>
+              </a:p>
+              <a:p>
+                <a:r>
+                  <a:rPr lang="en-US" altLang="ko-KR" sz="1000">
+                    <a:solidFill>
+                      <a:schemeClr val="accent3">
+                        <a:lumMod val="50000"/>
+                      </a:schemeClr>
+                    </a:solidFill>
+                    <a:latin typeface="페이퍼로지 4 Regular" pitchFamily="2" charset="-127"/>
+                    <a:ea typeface="페이퍼로지 4 Regular" pitchFamily="2" charset="-127"/>
+                    <a:sym typeface="Wingdings" panose="05000000000000000000" pitchFamily="2" charset="2"/>
+                  </a:rPr>
+                  <a:t>AuthTag </a:t>
+                </a:r>
+                <a:r>
+                  <a:rPr lang="ko-KR" altLang="en-US" sz="1000">
+                    <a:solidFill>
+                      <a:schemeClr val="accent3">
+                        <a:lumMod val="50000"/>
+                      </a:schemeClr>
+                    </a:solidFill>
+                    <a:latin typeface="페이퍼로지 4 Regular" pitchFamily="2" charset="-127"/>
+                    <a:ea typeface="페이퍼로지 4 Regular" pitchFamily="2" charset="-127"/>
+                    <a:sym typeface="Wingdings" panose="05000000000000000000" pitchFamily="2" charset="2"/>
+                  </a:rPr>
+                  <a:t>생성 방식</a:t>
+                </a:r>
+                <a:endParaRPr lang="en-US" altLang="ko-KR" sz="1000">
+                  <a:solidFill>
+                    <a:schemeClr val="accent3">
+                      <a:lumMod val="50000"/>
+                    </a:schemeClr>
+                  </a:solidFill>
+                  <a:latin typeface="페이퍼로지 4 Regular" pitchFamily="2" charset="-127"/>
+                  <a:ea typeface="페이퍼로지 4 Regular" pitchFamily="2" charset="-127"/>
+                  <a:sym typeface="Wingdings" panose="05000000000000000000" pitchFamily="2" charset="2"/>
+                </a:endParaRPr>
+              </a:p>
+              <a:p>
+                <a:r>
+                  <a:rPr lang="ko-KR" altLang="en-US" sz="1000">
+                    <a:latin typeface="페이퍼로지 4 Regular" pitchFamily="2" charset="-127"/>
+                    <a:ea typeface="페이퍼로지 4 Regular" pitchFamily="2" charset="-127"/>
+                    <a:sym typeface="Wingdings" panose="05000000000000000000" pitchFamily="2" charset="2"/>
+                  </a:rPr>
+                  <a:t>키 생성</a:t>
+                </a:r>
+                <a:r>
+                  <a:rPr lang="en-US" altLang="ko-KR" sz="1000">
+                    <a:latin typeface="페이퍼로지 4 Regular" pitchFamily="2" charset="-127"/>
+                    <a:ea typeface="페이퍼로지 4 Regular" pitchFamily="2" charset="-127"/>
+                    <a:sym typeface="Wingdings" panose="05000000000000000000" pitchFamily="2" charset="2"/>
+                  </a:rPr>
+                  <a:t>: </a:t>
+                </a:r>
+                <a:r>
+                  <a:rPr lang="ko-KR" altLang="en-US" sz="1000">
+                    <a:latin typeface="페이퍼로지 4 Regular" pitchFamily="2" charset="-127"/>
+                    <a:ea typeface="페이퍼로지 4 Regular" pitchFamily="2" charset="-127"/>
+                    <a:sym typeface="Wingdings" panose="05000000000000000000" pitchFamily="2" charset="2"/>
+                  </a:rPr>
+                  <a:t>암호화 키</a:t>
+                </a:r>
+                <a:r>
+                  <a:rPr lang="en-US" altLang="ko-KR" sz="1000">
+                    <a:latin typeface="페이퍼로지 4 Regular" pitchFamily="2" charset="-127"/>
+                    <a:ea typeface="페이퍼로지 4 Regular" pitchFamily="2" charset="-127"/>
+                    <a:sym typeface="Wingdings" panose="05000000000000000000" pitchFamily="2" charset="2"/>
+                  </a:rPr>
+                  <a:t>(K)</a:t>
+                </a:r>
+                <a:r>
+                  <a:rPr lang="ko-KR" altLang="en-US" sz="1000">
+                    <a:latin typeface="페이퍼로지 4 Regular" pitchFamily="2" charset="-127"/>
+                    <a:ea typeface="페이퍼로지 4 Regular" pitchFamily="2" charset="-127"/>
+                    <a:sym typeface="Wingdings" panose="05000000000000000000" pitchFamily="2" charset="2"/>
+                  </a:rPr>
+                  <a:t>를 </a:t>
+                </a:r>
+                <a:r>
+                  <a:rPr lang="en-US" altLang="ko-KR" sz="1000">
+                    <a:latin typeface="페이퍼로지 4 Regular" pitchFamily="2" charset="-127"/>
+                    <a:ea typeface="페이퍼로지 4 Regular" pitchFamily="2" charset="-127"/>
+                    <a:sym typeface="Wingdings" panose="05000000000000000000" pitchFamily="2" charset="2"/>
+                  </a:rPr>
+                  <a:t>CSRNG(</a:t>
+                </a:r>
+                <a:r>
+                  <a:rPr lang="ko-KR" altLang="en-US" sz="1000">
+                    <a:latin typeface="페이퍼로지 4 Regular" pitchFamily="2" charset="-127"/>
+                    <a:ea typeface="페이퍼로지 4 Regular" pitchFamily="2" charset="-127"/>
+                    <a:sym typeface="Wingdings" panose="05000000000000000000" pitchFamily="2" charset="2"/>
+                  </a:rPr>
+                  <a:t>암호학적 안전한 난수 생성기</a:t>
+                </a:r>
+                <a:r>
+                  <a:rPr lang="en-US" altLang="ko-KR" sz="1000">
+                    <a:latin typeface="페이퍼로지 4 Regular" pitchFamily="2" charset="-127"/>
+                    <a:ea typeface="페이퍼로지 4 Regular" pitchFamily="2" charset="-127"/>
+                    <a:sym typeface="Wingdings" panose="05000000000000000000" pitchFamily="2" charset="2"/>
+                  </a:rPr>
+                  <a:t>)</a:t>
+                </a:r>
+                <a:r>
+                  <a:rPr lang="ko-KR" altLang="en-US" sz="1000">
+                    <a:latin typeface="페이퍼로지 4 Regular" pitchFamily="2" charset="-127"/>
+                    <a:ea typeface="페이퍼로지 4 Regular" pitchFamily="2" charset="-127"/>
+                    <a:sym typeface="Wingdings" panose="05000000000000000000" pitchFamily="2" charset="2"/>
+                  </a:rPr>
+                  <a:t>로 생성 </a:t>
+                </a:r>
+                <a:endParaRPr lang="en-US" altLang="ko-KR" sz="1000">
+                  <a:latin typeface="페이퍼로지 4 Regular" pitchFamily="2" charset="-127"/>
+                  <a:ea typeface="페이퍼로지 4 Regular" pitchFamily="2" charset="-127"/>
+                  <a:sym typeface="Wingdings" panose="05000000000000000000" pitchFamily="2" charset="2"/>
+                </a:endParaRPr>
+              </a:p>
+              <a:p>
+                <a:br>
+                  <a:rPr lang="en-US" altLang="ko-KR" sz="400">
+                    <a:latin typeface="페이퍼로지 4 Regular" pitchFamily="2" charset="-127"/>
+                    <a:ea typeface="페이퍼로지 4 Regular" pitchFamily="2" charset="-127"/>
+                    <a:sym typeface="Wingdings" panose="05000000000000000000" pitchFamily="2" charset="2"/>
+                  </a:rPr>
+                </a:br>
+                <a:r>
+                  <a:rPr lang="en-US" altLang="ko-KR" sz="1000">
+                    <a:latin typeface="페이퍼로지 4 Regular" pitchFamily="2" charset="-127"/>
+                    <a:ea typeface="페이퍼로지 4 Regular" pitchFamily="2" charset="-127"/>
+                    <a:sym typeface="Wingdings" panose="05000000000000000000" pitchFamily="2" charset="2"/>
+                  </a:rPr>
+                  <a:t>Tag </a:t>
+                </a:r>
+                <a:r>
+                  <a:rPr lang="ko-KR" altLang="en-US" sz="1000">
+                    <a:latin typeface="페이퍼로지 4 Regular" pitchFamily="2" charset="-127"/>
+                    <a:ea typeface="페이퍼로지 4 Regular" pitchFamily="2" charset="-127"/>
+                    <a:sym typeface="Wingdings" panose="05000000000000000000" pitchFamily="2" charset="2"/>
+                  </a:rPr>
+                  <a:t>생성 방식</a:t>
+                </a:r>
+                <a:r>
+                  <a:rPr lang="en-US" altLang="ko-KR" sz="1000">
+                    <a:latin typeface="페이퍼로지 4 Regular" pitchFamily="2" charset="-127"/>
+                    <a:ea typeface="페이퍼로지 4 Regular" pitchFamily="2" charset="-127"/>
+                    <a:sym typeface="Wingdings" panose="05000000000000000000" pitchFamily="2" charset="2"/>
+                  </a:rPr>
+                  <a:t>:</a:t>
+                </a:r>
+              </a:p>
+              <a:p>
+                <a:r>
+                  <a:rPr lang="en-US" altLang="ko-KR" sz="1000">
+                    <a:latin typeface="페이퍼로지 4 Regular" pitchFamily="2" charset="-127"/>
+                    <a:ea typeface="페이퍼로지 4 Regular" pitchFamily="2" charset="-127"/>
+                    <a:sym typeface="Wingdings" panose="05000000000000000000" pitchFamily="2" charset="2"/>
+                  </a:rPr>
+                  <a:t>	1. Ciphertext,</a:t>
+                </a:r>
+                <a:r>
+                  <a:rPr lang="ko-KR" altLang="en-US" sz="1000">
+                    <a:latin typeface="페이퍼로지 4 Regular" pitchFamily="2" charset="-127"/>
+                    <a:ea typeface="페이퍼로지 4 Regular" pitchFamily="2" charset="-127"/>
+                    <a:sym typeface="Wingdings" panose="05000000000000000000" pitchFamily="2" charset="2"/>
+                  </a:rPr>
+                  <a:t> </a:t>
+                </a:r>
+                <a:r>
+                  <a:rPr lang="en-US" altLang="ko-KR" sz="1000">
+                    <a:latin typeface="페이퍼로지 4 Regular" pitchFamily="2" charset="-127"/>
+                    <a:ea typeface="페이퍼로지 4 Regular" pitchFamily="2" charset="-127"/>
+                    <a:sym typeface="Wingdings" panose="05000000000000000000" pitchFamily="2" charset="2"/>
+                  </a:rPr>
+                  <a:t>AAE</a:t>
+                </a:r>
+                <a:r>
+                  <a:rPr lang="ko-KR" altLang="en-US" sz="1000">
+                    <a:latin typeface="페이퍼로지 4 Regular" pitchFamily="2" charset="-127"/>
+                    <a:ea typeface="페이퍼로지 4 Regular" pitchFamily="2" charset="-127"/>
+                    <a:sym typeface="Wingdings" panose="05000000000000000000" pitchFamily="2" charset="2"/>
+                  </a:rPr>
+                  <a:t>를 블록 단위로 나눔</a:t>
+                </a:r>
+                <a:r>
+                  <a:rPr lang="en-US" altLang="ko-KR" sz="1000">
+                    <a:latin typeface="페이퍼로지 4 Regular" pitchFamily="2" charset="-127"/>
+                    <a:ea typeface="페이퍼로지 4 Regular" pitchFamily="2" charset="-127"/>
+                    <a:sym typeface="Wingdings" panose="05000000000000000000" pitchFamily="2" charset="2"/>
+                  </a:rPr>
+                  <a:t>.</a:t>
+                </a:r>
+              </a:p>
+              <a:p>
+                <a:r>
+                  <a:rPr lang="en-US" altLang="ko-KR" sz="1000">
+                    <a:latin typeface="페이퍼로지 4 Regular" pitchFamily="2" charset="-127"/>
+                    <a:ea typeface="페이퍼로지 4 Regular" pitchFamily="2" charset="-127"/>
+                    <a:sym typeface="Wingdings" panose="05000000000000000000" pitchFamily="2" charset="2"/>
+                  </a:rPr>
+                  <a:t>	2. Hash</a:t>
+                </a:r>
+                <a:r>
+                  <a:rPr lang="ko-KR" altLang="en-US" sz="1000">
+                    <a:latin typeface="페이퍼로지 4 Regular" pitchFamily="2" charset="-127"/>
+                    <a:ea typeface="페이퍼로지 4 Regular" pitchFamily="2" charset="-127"/>
+                    <a:sym typeface="Wingdings" panose="05000000000000000000" pitchFamily="2" charset="2"/>
+                  </a:rPr>
+                  <a:t> </a:t>
+                </a:r>
+                <a:r>
+                  <a:rPr lang="en-US" altLang="ko-KR" sz="1000">
+                    <a:latin typeface="페이퍼로지 4 Regular" pitchFamily="2" charset="-127"/>
+                    <a:ea typeface="페이퍼로지 4 Regular" pitchFamily="2" charset="-127"/>
+                    <a:sym typeface="Wingdings" panose="05000000000000000000" pitchFamily="2" charset="2"/>
+                  </a:rPr>
+                  <a:t>Subkey(H)</a:t>
+                </a:r>
+                <a:r>
+                  <a:rPr lang="ko-KR" altLang="en-US" sz="1000">
+                    <a:latin typeface="페이퍼로지 4 Regular" pitchFamily="2" charset="-127"/>
+                    <a:ea typeface="페이퍼로지 4 Regular" pitchFamily="2" charset="-127"/>
+                    <a:sym typeface="Wingdings" panose="05000000000000000000" pitchFamily="2" charset="2"/>
+                  </a:rPr>
+                  <a:t>를 이용해 </a:t>
+                </a:r>
+                <a14:m>
+                  <m:oMath xmlns:m="http://schemas.openxmlformats.org/officeDocument/2006/math">
+                    <m:sSup>
+                      <m:sSupPr>
+                        <m:ctrlPr>
+                          <a:rPr lang="en-US" altLang="ko-KR" sz="1000" i="1" smtClean="0">
+                            <a:latin typeface="Cambria Math" panose="02040503050406030204" pitchFamily="18" charset="0"/>
+                            <a:ea typeface="페이퍼로지 4 Regular" pitchFamily="2" charset="-127"/>
+                            <a:sym typeface="Wingdings" panose="05000000000000000000" pitchFamily="2" charset="2"/>
+                          </a:rPr>
+                        </m:ctrlPr>
+                      </m:sSupPr>
+                      <m:e>
+                        <m:r>
+                          <a:rPr lang="en-US" altLang="ko-KR" sz="1000" b="0" i="1" smtClean="0">
+                            <a:latin typeface="Cambria Math" panose="02040503050406030204" pitchFamily="18" charset="0"/>
+                            <a:ea typeface="페이퍼로지 4 Regular" pitchFamily="2" charset="-127"/>
+                            <a:sym typeface="Wingdings" panose="05000000000000000000" pitchFamily="2" charset="2"/>
+                          </a:rPr>
+                          <m:t>2</m:t>
+                        </m:r>
+                      </m:e>
+                      <m:sup>
+                        <m:r>
+                          <a:rPr lang="en-US" altLang="ko-KR" sz="1000" b="0" i="1" smtClean="0">
+                            <a:latin typeface="Cambria Math" panose="02040503050406030204" pitchFamily="18" charset="0"/>
+                            <a:ea typeface="페이퍼로지 4 Regular" pitchFamily="2" charset="-127"/>
+                            <a:sym typeface="Wingdings" panose="05000000000000000000" pitchFamily="2" charset="2"/>
+                          </a:rPr>
+                          <m:t>128</m:t>
+                        </m:r>
+                      </m:sup>
+                    </m:sSup>
+                  </m:oMath>
+                </a14:m>
+                <a:r>
+                  <a:rPr lang="en-US" altLang="ko-KR" sz="1000">
+                    <a:latin typeface="페이퍼로지 4 Regular" pitchFamily="2" charset="-127"/>
+                    <a:ea typeface="페이퍼로지 4 Regular" pitchFamily="2" charset="-127"/>
+                    <a:sym typeface="Wingdings" panose="05000000000000000000" pitchFamily="2" charset="2"/>
+                  </a:rPr>
+                  <a:t> </a:t>
+                </a:r>
+                <a:r>
+                  <a:rPr lang="ko-KR" altLang="en-US" sz="1000">
+                    <a:latin typeface="페이퍼로지 4 Regular" pitchFamily="2" charset="-127"/>
+                    <a:ea typeface="페이퍼로지 4 Regular" pitchFamily="2" charset="-127"/>
+                    <a:sym typeface="Wingdings" panose="05000000000000000000" pitchFamily="2" charset="2"/>
+                  </a:rPr>
+                  <a:t>위에서 곱셈 연산 </a:t>
+                </a:r>
+                <a:endParaRPr lang="en-US" altLang="ko-KR" sz="1000">
+                  <a:latin typeface="페이퍼로지 4 Regular" pitchFamily="2" charset="-127"/>
+                  <a:ea typeface="페이퍼로지 4 Regular" pitchFamily="2" charset="-127"/>
+                  <a:sym typeface="Wingdings" panose="05000000000000000000" pitchFamily="2" charset="2"/>
+                </a:endParaRPr>
+              </a:p>
+              <a:p>
+                <a:r>
+                  <a:rPr lang="en-US" altLang="ko-KR" sz="1000">
+                    <a:latin typeface="페이퍼로지 4 Regular" pitchFamily="2" charset="-127"/>
+                    <a:ea typeface="페이퍼로지 4 Regular" pitchFamily="2" charset="-127"/>
+                    <a:sym typeface="Wingdings" panose="05000000000000000000" pitchFamily="2" charset="2"/>
+                  </a:rPr>
+                  <a:t>	     </a:t>
+                </a:r>
+                <a:r>
+                  <a:rPr lang="ko-KR" altLang="en-US" sz="1000">
+                    <a:latin typeface="페이퍼로지 4 Regular" pitchFamily="2" charset="-127"/>
+                    <a:ea typeface="페이퍼로지 4 Regular" pitchFamily="2" charset="-127"/>
+                    <a:sym typeface="Wingdings" panose="05000000000000000000" pitchFamily="2" charset="2"/>
+                  </a:rPr>
+                  <a:t>수행</a:t>
+                </a:r>
+                <a:r>
+                  <a:rPr lang="en-US" altLang="ko-KR" sz="1000">
+                    <a:latin typeface="페이퍼로지 4 Regular" pitchFamily="2" charset="-127"/>
+                    <a:ea typeface="페이퍼로지 4 Regular" pitchFamily="2" charset="-127"/>
+                    <a:sym typeface="Wingdings" panose="05000000000000000000" pitchFamily="2" charset="2"/>
+                  </a:rPr>
+                  <a:t>(GHASH </a:t>
+                </a:r>
+                <a:r>
+                  <a:rPr lang="ko-KR" altLang="en-US" sz="1000">
+                    <a:latin typeface="페이퍼로지 4 Regular" pitchFamily="2" charset="-127"/>
+                    <a:ea typeface="페이퍼로지 4 Regular" pitchFamily="2" charset="-127"/>
+                    <a:sym typeface="Wingdings" panose="05000000000000000000" pitchFamily="2" charset="2"/>
+                  </a:rPr>
+                  <a:t>함수</a:t>
+                </a:r>
+                <a:r>
+                  <a:rPr lang="en-US" altLang="ko-KR" sz="1000">
+                    <a:latin typeface="페이퍼로지 4 Regular" pitchFamily="2" charset="-127"/>
+                    <a:ea typeface="페이퍼로지 4 Regular" pitchFamily="2" charset="-127"/>
+                    <a:sym typeface="Wingdings" panose="05000000000000000000" pitchFamily="2" charset="2"/>
+                  </a:rPr>
+                  <a:t>)</a:t>
+                </a:r>
+              </a:p>
+              <a:p>
+                <a:r>
+                  <a:rPr lang="en-US" altLang="ko-KR" sz="1000">
+                    <a:latin typeface="페이퍼로지 4 Regular" pitchFamily="2" charset="-127"/>
+                    <a:ea typeface="페이퍼로지 4 Regular" pitchFamily="2" charset="-127"/>
+                    <a:sym typeface="Wingdings" panose="05000000000000000000" pitchFamily="2" charset="2"/>
+                  </a:rPr>
+                  <a:t>	3. </a:t>
+                </a:r>
+                <a:r>
+                  <a:rPr lang="ko-KR" altLang="en-US" sz="1000">
+                    <a:latin typeface="페이퍼로지 4 Regular" pitchFamily="2" charset="-127"/>
+                    <a:ea typeface="페이퍼로지 4 Regular" pitchFamily="2" charset="-127"/>
+                    <a:sym typeface="Wingdings" panose="05000000000000000000" pitchFamily="2" charset="2"/>
+                  </a:rPr>
+                  <a:t>결과에 초기 카운터 값을 암호화한 값을 </a:t>
+                </a:r>
+                <a:r>
+                  <a:rPr lang="en-US" altLang="ko-KR" sz="1000">
+                    <a:latin typeface="페이퍼로지 4 Regular" pitchFamily="2" charset="-127"/>
+                    <a:ea typeface="페이퍼로지 4 Regular" pitchFamily="2" charset="-127"/>
+                    <a:sym typeface="Wingdings" panose="05000000000000000000" pitchFamily="2" charset="2"/>
+                  </a:rPr>
+                  <a:t>XOR</a:t>
+                </a:r>
+                <a:r>
+                  <a:rPr lang="ko-KR" altLang="en-US" sz="1000">
+                    <a:latin typeface="페이퍼로지 4 Regular" pitchFamily="2" charset="-127"/>
+                    <a:ea typeface="페이퍼로지 4 Regular" pitchFamily="2" charset="-127"/>
+                    <a:sym typeface="Wingdings" panose="05000000000000000000" pitchFamily="2" charset="2"/>
+                  </a:rPr>
+                  <a:t>해서 생성</a:t>
+                </a:r>
+                <a:br>
+                  <a:rPr lang="en-US" altLang="ko-KR" sz="1000">
+                    <a:latin typeface="페이퍼로지 4 Regular" pitchFamily="2" charset="-127"/>
+                    <a:ea typeface="페이퍼로지 4 Regular" pitchFamily="2" charset="-127"/>
+                    <a:sym typeface="Wingdings" panose="05000000000000000000" pitchFamily="2" charset="2"/>
+                  </a:rPr>
+                </a:br>
+                <a:endParaRPr lang="en-US" altLang="ko-KR" sz="1000">
+                  <a:latin typeface="페이퍼로지 4 Regular" pitchFamily="2" charset="-127"/>
+                  <a:ea typeface="페이퍼로지 4 Regular" pitchFamily="2" charset="-127"/>
+                  <a:sym typeface="Wingdings" panose="05000000000000000000" pitchFamily="2" charset="2"/>
+                </a:endParaRPr>
+              </a:p>
+            </p:txBody>
+          </p:sp>
+        </mc:Choice>
+        <mc:Fallback>
+          <p:sp>
+            <p:nvSpPr>
+              <p:cNvPr id="5" name="TextBox 4">
+                <a:extLst>
+                  <a:ext uri="{FF2B5EF4-FFF2-40B4-BE49-F238E27FC236}">
+                    <a16:creationId xmlns:a16="http://schemas.microsoft.com/office/drawing/2014/main" id="{3324C524-C45D-DC48-E1AB-2DA505956BD7}"/>
+                  </a:ext>
+                </a:extLst>
+              </p:cNvPr>
+              <p:cNvSpPr txBox="1">
+                <a:spLocks noRot="1" noChangeAspect="1" noMove="1" noResize="1" noEditPoints="1" noAdjustHandles="1" noChangeArrowheads="1" noChangeShapeType="1" noTextEdit="1"/>
+              </p:cNvSpPr>
+              <p:nvPr/>
+            </p:nvSpPr>
+            <p:spPr>
+              <a:xfrm>
+                <a:off x="4177454" y="1294477"/>
+                <a:ext cx="4513996" cy="3600986"/>
+              </a:xfrm>
+              <a:prstGeom prst="rect">
+                <a:avLst/>
+              </a:prstGeom>
+              <a:blipFill>
+                <a:blip r:embed="rId3"/>
+                <a:stretch>
+                  <a:fillRect/>
+                </a:stretch>
+              </a:blipFill>
+              <a:ln>
+                <a:noFill/>
+              </a:ln>
+            </p:spPr>
+            <p:txBody>
+              <a:bodyPr/>
+              <a:lstStyle/>
+              <a:p>
+                <a:r>
+                  <a:rPr lang="ko-KR" altLang="en-US">
+                    <a:noFill/>
+                  </a:rPr>
+                  <a:t> </a:t>
+                </a:r>
+              </a:p>
+            </p:txBody>
+          </p:sp>
+        </mc:Fallback>
+      </mc:AlternateContent>
       <p:sp>
         <p:nvSpPr>
-          <p:cNvPr id="5" name="TextBox 4">
+          <p:cNvPr id="12" name="TextBox 11">
             <a:extLst>
               <a:ext uri="{FF2B5EF4-FFF2-40B4-BE49-F238E27FC236}">
-                <a16:creationId xmlns:a16="http://schemas.microsoft.com/office/drawing/2014/main" id="{3324C524-C45D-DC48-E1AB-2DA505956BD7}"/>
+                <a16:creationId xmlns:a16="http://schemas.microsoft.com/office/drawing/2014/main" id="{C1E18389-30C5-1797-FCDA-982F884DDEBA}"/>
               </a:ext>
             </a:extLst>
           </p:cNvPr>
@@ -16477,16 +18136,13 @@
         </p:nvSpPr>
         <p:spPr>
           <a:xfrm>
-            <a:off x="4177454" y="1294477"/>
-            <a:ext cx="4282546" cy="2616101"/>
+            <a:off x="749054" y="4733725"/>
+            <a:ext cx="4071026" cy="369332"/>
           </a:xfrm>
           <a:prstGeom prst="rect">
             <a:avLst/>
           </a:prstGeom>
           <a:noFill/>
-          <a:ln>
-            <a:noFill/>
-          </a:ln>
         </p:spPr>
         <p:txBody>
           <a:bodyPr wrap="square" rtlCol="0">
@@ -16495,491 +18151,342 @@
           <a:lstStyle/>
           <a:p>
             <a:r>
-              <a:rPr lang="en-US" altLang="ko-KR" sz="1000">
-                <a:solidFill>
-                  <a:schemeClr val="accent3">
-                    <a:lumMod val="50000"/>
-                  </a:schemeClr>
-                </a:solidFill>
-                <a:latin typeface="페이퍼로지 4 Regular" pitchFamily="2" charset="-127"/>
-                <a:ea typeface="페이퍼로지 4 Regular" pitchFamily="2" charset="-127"/>
-              </a:rPr>
-              <a:t>IV : 12 byte </a:t>
-            </a:r>
-            <a:r>
-              <a:rPr lang="ko-KR" altLang="en-US" sz="1000">
-                <a:solidFill>
-                  <a:schemeClr val="accent3">
-                    <a:lumMod val="50000"/>
-                  </a:schemeClr>
-                </a:solidFill>
-                <a:latin typeface="페이퍼로지 4 Regular" pitchFamily="2" charset="-127"/>
-                <a:ea typeface="페이퍼로지 4 Regular" pitchFamily="2" charset="-127"/>
-              </a:rPr>
-              <a:t>랜덤 값 생성 </a:t>
-            </a:r>
-            <a:r>
-              <a:rPr lang="en-US" altLang="ko-KR" sz="1000">
-                <a:solidFill>
-                  <a:schemeClr val="accent3">
-                    <a:lumMod val="50000"/>
-                  </a:schemeClr>
-                </a:solidFill>
-                <a:latin typeface="페이퍼로지 4 Regular" pitchFamily="2" charset="-127"/>
-                <a:ea typeface="페이퍼로지 4 Regular" pitchFamily="2" charset="-127"/>
-              </a:rPr>
-              <a:t>(AES-GCM </a:t>
-            </a:r>
-            <a:r>
-              <a:rPr lang="ko-KR" altLang="en-US" sz="1000">
-                <a:solidFill>
-                  <a:schemeClr val="accent3">
-                    <a:lumMod val="50000"/>
-                  </a:schemeClr>
-                </a:solidFill>
-                <a:latin typeface="페이퍼로지 4 Regular" pitchFamily="2" charset="-127"/>
-                <a:ea typeface="페이퍼로지 4 Regular" pitchFamily="2" charset="-127"/>
-              </a:rPr>
-              <a:t>표준</a:t>
-            </a:r>
-            <a:r>
-              <a:rPr lang="en-US" altLang="ko-KR" sz="1000">
-                <a:solidFill>
-                  <a:schemeClr val="accent3">
-                    <a:lumMod val="50000"/>
-                  </a:schemeClr>
-                </a:solidFill>
-                <a:latin typeface="페이퍼로지 4 Regular" pitchFamily="2" charset="-127"/>
-                <a:ea typeface="페이퍼로지 4 Regular" pitchFamily="2" charset="-127"/>
-              </a:rPr>
-              <a:t>)</a:t>
+              <a:rPr lang="en-US" altLang="ko-KR" sz="900">
+                <a:latin typeface="페이퍼로지 1 Thin" pitchFamily="2" charset="-127"/>
+                <a:ea typeface="페이퍼로지 1 Thin" pitchFamily="2" charset="-127"/>
+              </a:rPr>
+              <a:t>MSB_t: 16</a:t>
+            </a:r>
+            <a:r>
+              <a:rPr lang="ko-KR" altLang="en-US" sz="900">
+                <a:latin typeface="페이퍼로지 1 Thin" pitchFamily="2" charset="-127"/>
+                <a:ea typeface="페이퍼로지 1 Thin" pitchFamily="2" charset="-127"/>
+              </a:rPr>
+              <a:t>바이트만 살리기</a:t>
             </a:r>
             <a:br>
-              <a:rPr lang="en-US" altLang="ko-KR" sz="1000">
-                <a:latin typeface="페이퍼로지 4 Regular" pitchFamily="2" charset="-127"/>
-                <a:ea typeface="페이퍼로지 4 Regular" pitchFamily="2" charset="-127"/>
+              <a:rPr lang="en-US" altLang="ko-KR" sz="900">
+                <a:latin typeface="페이퍼로지 1 Thin" pitchFamily="2" charset="-127"/>
+                <a:ea typeface="페이퍼로지 1 Thin" pitchFamily="2" charset="-127"/>
               </a:rPr>
             </a:br>
             <a:r>
-              <a:rPr lang="ko-KR" altLang="en-US" sz="1000">
-                <a:latin typeface="페이퍼로지 4 Regular" pitchFamily="2" charset="-127"/>
-                <a:ea typeface="페이퍼로지 4 Regular" pitchFamily="2" charset="-127"/>
-              </a:rPr>
-              <a:t>매번 다른 </a:t>
-            </a:r>
-            <a:r>
-              <a:rPr lang="en-US" altLang="ko-KR" sz="1000">
-                <a:latin typeface="페이퍼로지 4 Regular" pitchFamily="2" charset="-127"/>
-                <a:ea typeface="페이퍼로지 4 Regular" pitchFamily="2" charset="-127"/>
-              </a:rPr>
-              <a:t>IV </a:t>
-            </a:r>
-            <a:r>
-              <a:rPr lang="en-US" altLang="ko-KR" sz="1000">
-                <a:latin typeface="페이퍼로지 4 Regular" pitchFamily="2" charset="-127"/>
-                <a:ea typeface="페이퍼로지 4 Regular" pitchFamily="2" charset="-127"/>
-                <a:sym typeface="Wingdings" panose="05000000000000000000" pitchFamily="2" charset="2"/>
-              </a:rPr>
-              <a:t> </a:t>
-            </a:r>
-            <a:r>
-              <a:rPr lang="ko-KR" altLang="en-US" sz="1000">
-                <a:latin typeface="페이퍼로지 4 Regular" pitchFamily="2" charset="-127"/>
-                <a:ea typeface="페이퍼로지 4 Regular" pitchFamily="2" charset="-127"/>
-                <a:sym typeface="Wingdings" panose="05000000000000000000" pitchFamily="2" charset="2"/>
-              </a:rPr>
-              <a:t>같은 데이터도 다른 암호문 생성 </a:t>
-            </a:r>
-            <a:br>
-              <a:rPr lang="en-US" altLang="ko-KR" sz="1000">
-                <a:latin typeface="페이퍼로지 4 Regular" pitchFamily="2" charset="-127"/>
-                <a:ea typeface="페이퍼로지 4 Regular" pitchFamily="2" charset="-127"/>
-                <a:sym typeface="Wingdings" panose="05000000000000000000" pitchFamily="2" charset="2"/>
-              </a:rPr>
-            </a:br>
-            <a:br>
-              <a:rPr lang="en-US" altLang="ko-KR" sz="1000">
-                <a:latin typeface="페이퍼로지 4 Regular" pitchFamily="2" charset="-127"/>
-                <a:ea typeface="페이퍼로지 4 Regular" pitchFamily="2" charset="-127"/>
-                <a:sym typeface="Wingdings" panose="05000000000000000000" pitchFamily="2" charset="2"/>
-              </a:rPr>
-            </a:br>
-            <a:r>
-              <a:rPr lang="en-US" altLang="ko-KR" sz="1000">
-                <a:latin typeface="페이퍼로지 4 Regular" pitchFamily="2" charset="-127"/>
-                <a:ea typeface="페이퍼로지 4 Regular" pitchFamily="2" charset="-127"/>
-                <a:sym typeface="Wingdings" panose="05000000000000000000" pitchFamily="2" charset="2"/>
-              </a:rPr>
-              <a:t>IV = Initial Vector = </a:t>
-            </a:r>
-            <a:r>
-              <a:rPr lang="ko-KR" altLang="en-US" sz="1000">
-                <a:latin typeface="페이퍼로지 4 Regular" pitchFamily="2" charset="-127"/>
-                <a:ea typeface="페이퍼로지 4 Regular" pitchFamily="2" charset="-127"/>
-                <a:sym typeface="Wingdings" panose="05000000000000000000" pitchFamily="2" charset="2"/>
-              </a:rPr>
-              <a:t>초기화 벡터 </a:t>
-            </a:r>
-            <a:r>
-              <a:rPr lang="en-US" altLang="ko-KR" sz="1000">
-                <a:latin typeface="페이퍼로지 4 Regular" pitchFamily="2" charset="-127"/>
-                <a:ea typeface="페이퍼로지 4 Regular" pitchFamily="2" charset="-127"/>
-                <a:sym typeface="Wingdings" panose="05000000000000000000" pitchFamily="2" charset="2"/>
-              </a:rPr>
-              <a:t>= </a:t>
-            </a:r>
-            <a:r>
-              <a:rPr lang="ko-KR" altLang="en-US" sz="1000">
-                <a:latin typeface="페이퍼로지 4 Regular" pitchFamily="2" charset="-127"/>
-                <a:ea typeface="페이퍼로지 4 Regular" pitchFamily="2" charset="-127"/>
-                <a:sym typeface="Wingdings" panose="05000000000000000000" pitchFamily="2" charset="2"/>
-              </a:rPr>
-              <a:t>암호화 </a:t>
-            </a:r>
-            <a:r>
-              <a:rPr lang="en-US" altLang="ko-KR" sz="1000">
-                <a:latin typeface="페이퍼로지 4 Regular" pitchFamily="2" charset="-127"/>
-                <a:ea typeface="페이퍼로지 4 Regular" pitchFamily="2" charset="-127"/>
-                <a:sym typeface="Wingdings" panose="05000000000000000000" pitchFamily="2" charset="2"/>
-              </a:rPr>
-              <a:t>“</a:t>
-            </a:r>
-            <a:r>
-              <a:rPr lang="ko-KR" altLang="en-US" sz="1000">
-                <a:latin typeface="페이퍼로지 4 Regular" pitchFamily="2" charset="-127"/>
-                <a:ea typeface="페이퍼로지 4 Regular" pitchFamily="2" charset="-127"/>
-                <a:sym typeface="Wingdings" panose="05000000000000000000" pitchFamily="2" charset="2"/>
-              </a:rPr>
-              <a:t>시작점</a:t>
-            </a:r>
-            <a:r>
-              <a:rPr lang="en-US" altLang="ko-KR" sz="1000">
-                <a:latin typeface="페이퍼로지 4 Regular" pitchFamily="2" charset="-127"/>
-                <a:ea typeface="페이퍼로지 4 Regular" pitchFamily="2" charset="-127"/>
-                <a:sym typeface="Wingdings" panose="05000000000000000000" pitchFamily="2" charset="2"/>
-              </a:rPr>
-              <a:t>”</a:t>
-            </a:r>
-            <a:br>
-              <a:rPr lang="en-US" altLang="ko-KR" sz="1000">
-                <a:latin typeface="페이퍼로지 4 Regular" pitchFamily="2" charset="-127"/>
-                <a:ea typeface="페이퍼로지 4 Regular" pitchFamily="2" charset="-127"/>
-                <a:sym typeface="Wingdings" panose="05000000000000000000" pitchFamily="2" charset="2"/>
-              </a:rPr>
-            </a:br>
-            <a:br>
-              <a:rPr lang="en-US" altLang="ko-KR" sz="1000">
-                <a:latin typeface="페이퍼로지 4 Regular" pitchFamily="2" charset="-127"/>
-                <a:ea typeface="페이퍼로지 4 Regular" pitchFamily="2" charset="-127"/>
-                <a:sym typeface="Wingdings" panose="05000000000000000000" pitchFamily="2" charset="2"/>
-              </a:rPr>
-            </a:br>
-            <a:br>
-              <a:rPr lang="en-US" altLang="ko-KR" sz="1000">
-                <a:latin typeface="페이퍼로지 4 Regular" pitchFamily="2" charset="-127"/>
-                <a:ea typeface="페이퍼로지 4 Regular" pitchFamily="2" charset="-127"/>
-                <a:sym typeface="Wingdings" panose="05000000000000000000" pitchFamily="2" charset="2"/>
-              </a:rPr>
-            </a:br>
-            <a:r>
-              <a:rPr lang="en-US" altLang="ko-KR" sz="1000">
-                <a:solidFill>
-                  <a:schemeClr val="accent3">
-                    <a:lumMod val="50000"/>
-                  </a:schemeClr>
-                </a:solidFill>
-                <a:latin typeface="페이퍼로지 4 Regular" pitchFamily="2" charset="-127"/>
-                <a:ea typeface="페이퍼로지 4 Regular" pitchFamily="2" charset="-127"/>
-                <a:sym typeface="Wingdings" panose="05000000000000000000" pitchFamily="2" charset="2"/>
-              </a:rPr>
-              <a:t>AuthTag </a:t>
-            </a:r>
-            <a:r>
-              <a:rPr lang="ko-KR" altLang="en-US" sz="1000">
-                <a:solidFill>
-                  <a:schemeClr val="accent3">
-                    <a:lumMod val="50000"/>
-                  </a:schemeClr>
-                </a:solidFill>
-                <a:latin typeface="페이퍼로지 4 Regular" pitchFamily="2" charset="-127"/>
-                <a:ea typeface="페이퍼로지 4 Regular" pitchFamily="2" charset="-127"/>
-                <a:sym typeface="Wingdings" panose="05000000000000000000" pitchFamily="2" charset="2"/>
-              </a:rPr>
-              <a:t>생성 재료</a:t>
-            </a:r>
-            <a:br>
-              <a:rPr lang="en-US" altLang="ko-KR" sz="1000">
-                <a:latin typeface="페이퍼로지 4 Regular" pitchFamily="2" charset="-127"/>
-                <a:ea typeface="페이퍼로지 4 Regular" pitchFamily="2" charset="-127"/>
-                <a:sym typeface="Wingdings" panose="05000000000000000000" pitchFamily="2" charset="2"/>
-              </a:rPr>
-            </a:br>
-            <a:r>
-              <a:rPr lang="en-US" altLang="ko-KR" sz="1000">
-                <a:latin typeface="페이퍼로지 4 Regular" pitchFamily="2" charset="-127"/>
-                <a:ea typeface="페이퍼로지 4 Regular" pitchFamily="2" charset="-127"/>
-                <a:sym typeface="Wingdings" panose="05000000000000000000" pitchFamily="2" charset="2"/>
-              </a:rPr>
-              <a:t>1. </a:t>
-            </a:r>
-            <a:r>
-              <a:rPr lang="ko-KR" altLang="en-US" sz="1000">
-                <a:latin typeface="페이퍼로지 4 Regular" pitchFamily="2" charset="-127"/>
-                <a:ea typeface="페이퍼로지 4 Regular" pitchFamily="2" charset="-127"/>
-                <a:sym typeface="Wingdings" panose="05000000000000000000" pitchFamily="2" charset="2"/>
-              </a:rPr>
-              <a:t>암호문 </a:t>
-            </a:r>
-            <a:r>
-              <a:rPr lang="en-US" altLang="ko-KR" sz="1000">
-                <a:latin typeface="페이퍼로지 4 Regular" pitchFamily="2" charset="-127"/>
-                <a:ea typeface="페이퍼로지 4 Regular" pitchFamily="2" charset="-127"/>
-                <a:sym typeface="Wingdings" panose="05000000000000000000" pitchFamily="2" charset="2"/>
-              </a:rPr>
-              <a:t>(Ciphertext): </a:t>
-            </a:r>
-            <a:r>
-              <a:rPr lang="ko-KR" altLang="en-US" sz="1000">
-                <a:latin typeface="페이퍼로지 4 Regular" pitchFamily="2" charset="-127"/>
-                <a:ea typeface="페이퍼로지 4 Regular" pitchFamily="2" charset="-127"/>
-                <a:sym typeface="Wingdings" panose="05000000000000000000" pitchFamily="2" charset="2"/>
-              </a:rPr>
-              <a:t>평문을 암호화한 값</a:t>
-            </a:r>
-            <a:endParaRPr lang="en-US" altLang="ko-KR" sz="1000">
-              <a:latin typeface="페이퍼로지 4 Regular" pitchFamily="2" charset="-127"/>
-              <a:ea typeface="페이퍼로지 4 Regular" pitchFamily="2" charset="-127"/>
-              <a:sym typeface="Wingdings" panose="05000000000000000000" pitchFamily="2" charset="2"/>
+              <a:rPr lang="en-US" altLang="ko-KR" sz="900">
+                <a:latin typeface="페이퍼로지 1 Thin" pitchFamily="2" charset="-127"/>
+                <a:ea typeface="페이퍼로지 1 Thin" pitchFamily="2" charset="-127"/>
+              </a:rPr>
+              <a:t>E_k</a:t>
+            </a:r>
+            <a:r>
+              <a:rPr lang="en-US" altLang="ko-KR" sz="900">
+                <a:latin typeface="페이퍼로지 1 Thin" pitchFamily="2" charset="-127"/>
+                <a:ea typeface="페이퍼로지 1 Thin" pitchFamily="2" charset="-127"/>
+                <a:sym typeface="Wingdings" panose="05000000000000000000" pitchFamily="2" charset="2"/>
+              </a:rPr>
+              <a:t>(J_0):</a:t>
+            </a:r>
+            <a:r>
+              <a:rPr lang="en-US" altLang="ko-KR" sz="900">
+                <a:latin typeface="페이퍼로지 1 Thin" pitchFamily="2" charset="-127"/>
+                <a:ea typeface="페이퍼로지 1 Thin" pitchFamily="2" charset="-127"/>
+              </a:rPr>
+              <a:t> Encryption with K.. about J_0( Nonce(96)+Count(32) )</a:t>
+            </a:r>
+            <a:endParaRPr lang="ko-KR" altLang="en-US" sz="900">
+              <a:latin typeface="페이퍼로지 1 Thin" pitchFamily="2" charset="-127"/>
+              <a:ea typeface="페이퍼로지 1 Thin" pitchFamily="2" charset="-127"/>
             </a:endParaRPr>
           </a:p>
+        </p:txBody>
+      </p:sp>
+      <mc:AlternateContent xmlns:mc="http://schemas.openxmlformats.org/markup-compatibility/2006">
+        <mc:Choice xmlns:a14="http://schemas.microsoft.com/office/drawing/2010/main" Requires="a14">
+          <p:sp>
+            <p:nvSpPr>
+              <p:cNvPr id="13" name="TextBox 12">
+                <a:extLst>
+                  <a:ext uri="{FF2B5EF4-FFF2-40B4-BE49-F238E27FC236}">
+                    <a16:creationId xmlns:a16="http://schemas.microsoft.com/office/drawing/2014/main" id="{C8C18041-3F6E-946B-187B-78B979B67B9B}"/>
+                  </a:ext>
+                </a:extLst>
+              </p:cNvPr>
+              <p:cNvSpPr txBox="1"/>
+              <p:nvPr/>
+            </p:nvSpPr>
+            <p:spPr>
+              <a:xfrm>
+                <a:off x="5070759" y="4723813"/>
+                <a:ext cx="2880970" cy="184666"/>
+              </a:xfrm>
+              <a:prstGeom prst="rect">
+                <a:avLst/>
+              </a:prstGeom>
+              <a:noFill/>
+            </p:spPr>
+            <p:txBody>
+              <a:bodyPr wrap="square" lIns="0" tIns="0" rIns="0" bIns="0" rtlCol="0">
+                <a:spAutoFit/>
+              </a:bodyPr>
+              <a:lstStyle/>
+              <a:p>
+                <a14:m>
+                  <m:oMathPara xmlns:m="http://schemas.openxmlformats.org/officeDocument/2006/math">
+                    <m:oMathParaPr>
+                      <m:jc m:val="centerGroup"/>
+                    </m:oMathParaPr>
+                    <m:oMath xmlns:m="http://schemas.openxmlformats.org/officeDocument/2006/math">
+                      <m:r>
+                        <a:rPr lang="en-US" altLang="ko-KR" sz="1200" b="0" i="1" smtClean="0">
+                          <a:latin typeface="Cambria Math" panose="02040503050406030204" pitchFamily="18" charset="0"/>
+                        </a:rPr>
+                        <m:t>𝑇𝑎𝑔</m:t>
+                      </m:r>
+                      <m:r>
+                        <a:rPr lang="en-US" altLang="ko-KR" sz="1200" b="0" i="1" smtClean="0">
+                          <a:latin typeface="Cambria Math" panose="02040503050406030204" pitchFamily="18" charset="0"/>
+                        </a:rPr>
+                        <m:t>=</m:t>
+                      </m:r>
+                      <m:r>
+                        <a:rPr lang="en-US" altLang="ko-KR" sz="1200" b="0" i="1" smtClean="0">
+                          <a:latin typeface="Cambria Math" panose="02040503050406030204" pitchFamily="18" charset="0"/>
+                        </a:rPr>
+                        <m:t>𝑀𝑆</m:t>
+                      </m:r>
+                      <m:sSub>
+                        <m:sSubPr>
+                          <m:ctrlPr>
+                            <a:rPr lang="en-US" altLang="ko-KR" sz="1200" b="0" i="1" smtClean="0">
+                              <a:latin typeface="Cambria Math" panose="02040503050406030204" pitchFamily="18" charset="0"/>
+                            </a:rPr>
+                          </m:ctrlPr>
+                        </m:sSubPr>
+                        <m:e>
+                          <m:r>
+                            <a:rPr lang="en-US" altLang="ko-KR" sz="1200" b="0" i="1" smtClean="0">
+                              <a:latin typeface="Cambria Math" panose="02040503050406030204" pitchFamily="18" charset="0"/>
+                            </a:rPr>
+                            <m:t>𝐵</m:t>
+                          </m:r>
+                        </m:e>
+                        <m:sub>
+                          <m:r>
+                            <a:rPr lang="en-US" altLang="ko-KR" sz="1200" b="0" i="1" smtClean="0">
+                              <a:latin typeface="Cambria Math" panose="02040503050406030204" pitchFamily="18" charset="0"/>
+                            </a:rPr>
+                            <m:t>𝑡</m:t>
+                          </m:r>
+                        </m:sub>
+                      </m:sSub>
+                      <m:r>
+                        <a:rPr lang="en-US" altLang="ko-KR" sz="1200" b="0" i="1" smtClean="0">
+                          <a:latin typeface="Cambria Math" panose="02040503050406030204" pitchFamily="18" charset="0"/>
+                        </a:rPr>
+                        <m:t>(</m:t>
+                      </m:r>
+                      <m:r>
+                        <a:rPr lang="en-US" altLang="ko-KR" sz="1200" b="0" i="1" smtClean="0">
+                          <a:latin typeface="Cambria Math" panose="02040503050406030204" pitchFamily="18" charset="0"/>
+                        </a:rPr>
+                        <m:t>𝐺𝐻𝐴𝑆𝐻</m:t>
+                      </m:r>
+                      <m:d>
+                        <m:dPr>
+                          <m:ctrlPr>
+                            <a:rPr lang="en-US" altLang="ko-KR" sz="1200" b="0" i="1" smtClean="0">
+                              <a:latin typeface="Cambria Math" panose="02040503050406030204" pitchFamily="18" charset="0"/>
+                            </a:rPr>
+                          </m:ctrlPr>
+                        </m:dPr>
+                        <m:e>
+                          <m:r>
+                            <a:rPr lang="en-US" altLang="ko-KR" sz="1200" b="0" i="1" smtClean="0">
+                              <a:latin typeface="Cambria Math" panose="02040503050406030204" pitchFamily="18" charset="0"/>
+                            </a:rPr>
+                            <m:t>𝐴</m:t>
+                          </m:r>
+                          <m:r>
+                            <a:rPr lang="en-US" altLang="ko-KR" sz="1200" b="0" i="1" smtClean="0">
+                              <a:latin typeface="Cambria Math" panose="02040503050406030204" pitchFamily="18" charset="0"/>
+                            </a:rPr>
+                            <m:t>, </m:t>
+                          </m:r>
+                          <m:r>
+                            <a:rPr lang="en-US" altLang="ko-KR" sz="1200" b="0" i="1" smtClean="0">
+                              <a:latin typeface="Cambria Math" panose="02040503050406030204" pitchFamily="18" charset="0"/>
+                            </a:rPr>
+                            <m:t>𝐶</m:t>
+                          </m:r>
+                        </m:e>
+                      </m:d>
+                      <m:r>
+                        <a:rPr lang="en-US" altLang="ko-KR" sz="1200" b="0" i="1" smtClean="0">
+                          <a:latin typeface="Cambria Math" panose="02040503050406030204" pitchFamily="18" charset="0"/>
+                        </a:rPr>
+                        <m:t> </m:t>
+                      </m:r>
+                      <m:r>
+                        <a:rPr lang="en-US" altLang="ko-KR" sz="1200" b="0" i="1" smtClean="0">
+                          <a:latin typeface="Cambria Math" panose="02040503050406030204" pitchFamily="18" charset="0"/>
+                          <a:ea typeface="Cambria Math" panose="02040503050406030204" pitchFamily="18" charset="0"/>
+                        </a:rPr>
+                        <m:t>⨁</m:t>
+                      </m:r>
+                      <m:r>
+                        <a:rPr lang="en-US" altLang="ko-KR" sz="1200" b="0" i="1" smtClean="0">
+                          <a:latin typeface="Cambria Math" panose="02040503050406030204" pitchFamily="18" charset="0"/>
+                        </a:rPr>
+                        <m:t> </m:t>
+                      </m:r>
+                      <m:sSub>
+                        <m:sSubPr>
+                          <m:ctrlPr>
+                            <a:rPr lang="en-US" altLang="ko-KR" sz="1200" b="0" i="1" smtClean="0">
+                              <a:latin typeface="Cambria Math" panose="02040503050406030204" pitchFamily="18" charset="0"/>
+                            </a:rPr>
+                          </m:ctrlPr>
+                        </m:sSubPr>
+                        <m:e>
+                          <m:r>
+                            <a:rPr lang="en-US" altLang="ko-KR" sz="1200" b="0" i="1" smtClean="0">
+                              <a:latin typeface="Cambria Math" panose="02040503050406030204" pitchFamily="18" charset="0"/>
+                            </a:rPr>
+                            <m:t>𝐸</m:t>
+                          </m:r>
+                        </m:e>
+                        <m:sub>
+                          <m:r>
+                            <a:rPr lang="en-US" altLang="ko-KR" sz="1200" b="0" i="1" smtClean="0">
+                              <a:latin typeface="Cambria Math" panose="02040503050406030204" pitchFamily="18" charset="0"/>
+                            </a:rPr>
+                            <m:t>𝑘</m:t>
+                          </m:r>
+                        </m:sub>
+                      </m:sSub>
+                      <m:d>
+                        <m:dPr>
+                          <m:ctrlPr>
+                            <a:rPr lang="en-US" altLang="ko-KR" sz="1200" b="0" i="1" smtClean="0">
+                              <a:latin typeface="Cambria Math" panose="02040503050406030204" pitchFamily="18" charset="0"/>
+                            </a:rPr>
+                          </m:ctrlPr>
+                        </m:dPr>
+                        <m:e>
+                          <m:sSub>
+                            <m:sSubPr>
+                              <m:ctrlPr>
+                                <a:rPr lang="en-US" altLang="ko-KR" sz="1200" b="0" i="1" smtClean="0">
+                                  <a:latin typeface="Cambria Math" panose="02040503050406030204" pitchFamily="18" charset="0"/>
+                                </a:rPr>
+                              </m:ctrlPr>
+                            </m:sSubPr>
+                            <m:e>
+                              <m:r>
+                                <a:rPr lang="en-US" altLang="ko-KR" sz="1200" b="0" i="1" smtClean="0">
+                                  <a:latin typeface="Cambria Math" panose="02040503050406030204" pitchFamily="18" charset="0"/>
+                                </a:rPr>
+                                <m:t>𝐽</m:t>
+                              </m:r>
+                            </m:e>
+                            <m:sub>
+                              <m:r>
+                                <a:rPr lang="en-US" altLang="ko-KR" sz="1200" b="0" i="1" smtClean="0">
+                                  <a:latin typeface="Cambria Math" panose="02040503050406030204" pitchFamily="18" charset="0"/>
+                                </a:rPr>
+                                <m:t>0</m:t>
+                              </m:r>
+                            </m:sub>
+                          </m:sSub>
+                        </m:e>
+                      </m:d>
+                      <m:r>
+                        <a:rPr lang="en-US" altLang="ko-KR" sz="1200" b="0" i="1" smtClean="0">
+                          <a:latin typeface="Cambria Math" panose="02040503050406030204" pitchFamily="18" charset="0"/>
+                        </a:rPr>
+                        <m:t>)</m:t>
+                      </m:r>
+                    </m:oMath>
+                  </m:oMathPara>
+                </a14:m>
+                <a:endParaRPr lang="ko-KR" altLang="en-US" sz="1200"/>
+              </a:p>
+            </p:txBody>
+          </p:sp>
+        </mc:Choice>
+        <mc:Fallback>
+          <p:sp>
+            <p:nvSpPr>
+              <p:cNvPr id="13" name="TextBox 12">
+                <a:extLst>
+                  <a:ext uri="{FF2B5EF4-FFF2-40B4-BE49-F238E27FC236}">
+                    <a16:creationId xmlns:a16="http://schemas.microsoft.com/office/drawing/2014/main" id="{C8C18041-3F6E-946B-187B-78B979B67B9B}"/>
+                  </a:ext>
+                </a:extLst>
+              </p:cNvPr>
+              <p:cNvSpPr txBox="1">
+                <a:spLocks noRot="1" noChangeAspect="1" noMove="1" noResize="1" noEditPoints="1" noAdjustHandles="1" noChangeArrowheads="1" noChangeShapeType="1" noTextEdit="1"/>
+              </p:cNvSpPr>
+              <p:nvPr/>
+            </p:nvSpPr>
+            <p:spPr>
+              <a:xfrm>
+                <a:off x="5070759" y="4723813"/>
+                <a:ext cx="2880970" cy="184666"/>
+              </a:xfrm>
+              <a:prstGeom prst="rect">
+                <a:avLst/>
+              </a:prstGeom>
+              <a:blipFill>
+                <a:blip r:embed="rId4"/>
+                <a:stretch>
+                  <a:fillRect t="-3333" b="-40000"/>
+                </a:stretch>
+              </a:blipFill>
+            </p:spPr>
+            <p:txBody>
+              <a:bodyPr/>
+              <a:lstStyle/>
+              <a:p>
+                <a:r>
+                  <a:rPr lang="ko-KR" altLang="en-US">
+                    <a:noFill/>
+                  </a:rPr>
+                  <a:t> </a:t>
+                </a:r>
+              </a:p>
+            </p:txBody>
+          </p:sp>
+        </mc:Fallback>
+      </mc:AlternateContent>
+      <p:sp>
+        <p:nvSpPr>
+          <p:cNvPr id="14" name="TextBox 13">
+            <a:extLst>
+              <a:ext uri="{FF2B5EF4-FFF2-40B4-BE49-F238E27FC236}">
+                <a16:creationId xmlns:a16="http://schemas.microsoft.com/office/drawing/2014/main" id="{9858BD78-304B-4A97-F116-0FF04092ECDA}"/>
+              </a:ext>
+            </a:extLst>
+          </p:cNvPr>
+          <p:cNvSpPr txBox="1"/>
+          <p:nvPr/>
+        </p:nvSpPr>
+        <p:spPr>
+          <a:xfrm>
+            <a:off x="4114800" y="2114550"/>
+            <a:ext cx="65" cy="215444"/>
+          </a:xfrm>
+          <a:prstGeom prst="rect">
+            <a:avLst/>
+          </a:prstGeom>
+          <a:noFill/>
+        </p:spPr>
+        <p:txBody>
+          <a:bodyPr wrap="none" lIns="0" tIns="0" rIns="0" bIns="0" rtlCol="0">
+            <a:spAutoFit/>
+          </a:bodyPr>
+          <a:lstStyle/>
           <a:p>
-            <a:r>
-              <a:rPr lang="en-US" altLang="ko-KR" sz="1000">
-                <a:latin typeface="페이퍼로지 4 Regular" pitchFamily="2" charset="-127"/>
-                <a:ea typeface="페이퍼로지 4 Regular" pitchFamily="2" charset="-127"/>
-                <a:sym typeface="Wingdings" panose="05000000000000000000" pitchFamily="2" charset="2"/>
-              </a:rPr>
-              <a:t>2. </a:t>
-            </a:r>
-            <a:r>
-              <a:rPr lang="ko-KR" altLang="en-US" sz="1000">
-                <a:latin typeface="페이퍼로지 4 Regular" pitchFamily="2" charset="-127"/>
-                <a:ea typeface="페이퍼로지 4 Regular" pitchFamily="2" charset="-127"/>
-                <a:sym typeface="Wingdings" panose="05000000000000000000" pitchFamily="2" charset="2"/>
-              </a:rPr>
-              <a:t>추가 인증 데이터</a:t>
-            </a:r>
-            <a:r>
-              <a:rPr lang="en-US" altLang="ko-KR" sz="1000">
-                <a:latin typeface="페이퍼로지 4 Regular" pitchFamily="2" charset="-127"/>
-                <a:ea typeface="페이퍼로지 4 Regular" pitchFamily="2" charset="-127"/>
-                <a:sym typeface="Wingdings" panose="05000000000000000000" pitchFamily="2" charset="2"/>
-              </a:rPr>
-              <a:t> (AAD): </a:t>
-            </a:r>
-            <a:r>
-              <a:rPr lang="ko-KR" altLang="en-US" sz="1000">
-                <a:latin typeface="페이퍼로지 4 Regular" pitchFamily="2" charset="-127"/>
-                <a:ea typeface="페이퍼로지 4 Regular" pitchFamily="2" charset="-127"/>
-                <a:sym typeface="Wingdings" panose="05000000000000000000" pitchFamily="2" charset="2"/>
-              </a:rPr>
-              <a:t>암호화는 안되지만</a:t>
-            </a:r>
-            <a:r>
-              <a:rPr lang="en-US" altLang="ko-KR" sz="1000">
-                <a:latin typeface="페이퍼로지 4 Regular" pitchFamily="2" charset="-127"/>
-                <a:ea typeface="페이퍼로지 4 Regular" pitchFamily="2" charset="-127"/>
-                <a:sym typeface="Wingdings" panose="05000000000000000000" pitchFamily="2" charset="2"/>
-              </a:rPr>
-              <a:t>, </a:t>
-            </a:r>
-            <a:r>
-              <a:rPr lang="ko-KR" altLang="en-US" sz="1000">
-                <a:latin typeface="페이퍼로지 4 Regular" pitchFamily="2" charset="-127"/>
-                <a:ea typeface="페이퍼로지 4 Regular" pitchFamily="2" charset="-127"/>
-                <a:sym typeface="Wingdings" panose="05000000000000000000" pitchFamily="2" charset="2"/>
-              </a:rPr>
-              <a:t>변조는 안되는 데이터 </a:t>
-            </a:r>
-            <a:br>
-              <a:rPr lang="en-US" altLang="ko-KR" sz="1000">
-                <a:latin typeface="페이퍼로지 4 Regular" pitchFamily="2" charset="-127"/>
-                <a:ea typeface="페이퍼로지 4 Regular" pitchFamily="2" charset="-127"/>
-                <a:sym typeface="Wingdings" panose="05000000000000000000" pitchFamily="2" charset="2"/>
-              </a:rPr>
-            </a:br>
-            <a:r>
-              <a:rPr lang="en-US" altLang="ko-KR" sz="1000">
-                <a:latin typeface="페이퍼로지 4 Regular" pitchFamily="2" charset="-127"/>
-                <a:ea typeface="페이퍼로지 4 Regular" pitchFamily="2" charset="-127"/>
-                <a:sym typeface="Wingdings" panose="05000000000000000000" pitchFamily="2" charset="2"/>
-              </a:rPr>
-              <a:t>	(</a:t>
-            </a:r>
-            <a:r>
-              <a:rPr lang="ko-KR" altLang="en-US" sz="1000">
-                <a:latin typeface="페이퍼로지 4 Regular" pitchFamily="2" charset="-127"/>
-                <a:ea typeface="페이퍼로지 4 Regular" pitchFamily="2" charset="-127"/>
-                <a:sym typeface="Wingdings" panose="05000000000000000000" pitchFamily="2" charset="2"/>
-              </a:rPr>
-              <a:t>예</a:t>
-            </a:r>
-            <a:r>
-              <a:rPr lang="en-US" altLang="ko-KR" sz="1000">
-                <a:latin typeface="페이퍼로지 4 Regular" pitchFamily="2" charset="-127"/>
-                <a:ea typeface="페이퍼로지 4 Regular" pitchFamily="2" charset="-127"/>
-                <a:sym typeface="Wingdings" panose="05000000000000000000" pitchFamily="2" charset="2"/>
-              </a:rPr>
-              <a:t>: </a:t>
-            </a:r>
-            <a:r>
-              <a:rPr lang="ko-KR" altLang="en-US" sz="1000">
-                <a:latin typeface="페이퍼로지 4 Regular" pitchFamily="2" charset="-127"/>
-                <a:ea typeface="페이퍼로지 4 Regular" pitchFamily="2" charset="-127"/>
-                <a:sym typeface="Wingdings" panose="05000000000000000000" pitchFamily="2" charset="2"/>
-              </a:rPr>
-              <a:t>프로토콜 헤더</a:t>
-            </a:r>
-            <a:r>
-              <a:rPr lang="en-US" altLang="ko-KR" sz="1000">
-                <a:latin typeface="페이퍼로지 4 Regular" pitchFamily="2" charset="-127"/>
-                <a:ea typeface="페이퍼로지 4 Regular" pitchFamily="2" charset="-127"/>
-                <a:sym typeface="Wingdings" panose="05000000000000000000" pitchFamily="2" charset="2"/>
-              </a:rPr>
-              <a:t>, </a:t>
-            </a:r>
-            <a:r>
-              <a:rPr lang="ko-KR" altLang="en-US" sz="1000">
-                <a:latin typeface="페이퍼로지 4 Regular" pitchFamily="2" charset="-127"/>
-                <a:ea typeface="페이퍼로지 4 Regular" pitchFamily="2" charset="-127"/>
-                <a:sym typeface="Wingdings" panose="05000000000000000000" pitchFamily="2" charset="2"/>
-              </a:rPr>
-              <a:t>주소 정보 등</a:t>
-            </a:r>
-            <a:r>
-              <a:rPr lang="en-US" altLang="ko-KR" sz="1000">
-                <a:latin typeface="페이퍼로지 4 Regular" pitchFamily="2" charset="-127"/>
-                <a:ea typeface="페이퍼로지 4 Regular" pitchFamily="2" charset="-127"/>
-                <a:sym typeface="Wingdings" panose="05000000000000000000" pitchFamily="2" charset="2"/>
-              </a:rPr>
-              <a:t>..)</a:t>
-            </a:r>
-          </a:p>
-          <a:p>
-            <a:r>
-              <a:rPr lang="en-US" altLang="ko-KR" sz="1000">
-                <a:latin typeface="페이퍼로지 4 Regular" pitchFamily="2" charset="-127"/>
-                <a:ea typeface="페이퍼로지 4 Regular" pitchFamily="2" charset="-127"/>
-                <a:sym typeface="Wingdings" panose="05000000000000000000" pitchFamily="2" charset="2"/>
-              </a:rPr>
-              <a:t>3. </a:t>
-            </a:r>
-            <a:r>
-              <a:rPr lang="ko-KR" altLang="en-US" sz="1000">
-                <a:latin typeface="페이퍼로지 4 Regular" pitchFamily="2" charset="-127"/>
-                <a:ea typeface="페이퍼로지 4 Regular" pitchFamily="2" charset="-127"/>
-                <a:sym typeface="Wingdings" panose="05000000000000000000" pitchFamily="2" charset="2"/>
-              </a:rPr>
-              <a:t>길이 블록</a:t>
-            </a:r>
-            <a:r>
-              <a:rPr lang="en-US" altLang="ko-KR" sz="1000">
-                <a:latin typeface="페이퍼로지 4 Regular" pitchFamily="2" charset="-127"/>
-                <a:ea typeface="페이퍼로지 4 Regular" pitchFamily="2" charset="-127"/>
-                <a:sym typeface="Wingdings" panose="05000000000000000000" pitchFamily="2" charset="2"/>
-              </a:rPr>
-              <a:t>: AAD</a:t>
-            </a:r>
-            <a:r>
-              <a:rPr lang="ko-KR" altLang="en-US" sz="1000">
-                <a:latin typeface="페이퍼로지 4 Regular" pitchFamily="2" charset="-127"/>
-                <a:ea typeface="페이퍼로지 4 Regular" pitchFamily="2" charset="-127"/>
-                <a:sym typeface="Wingdings" panose="05000000000000000000" pitchFamily="2" charset="2"/>
-              </a:rPr>
-              <a:t>와 암호문 길이를 비트 단위로 나타낸 값</a:t>
-            </a:r>
-            <a:endParaRPr lang="en-US" altLang="ko-KR" sz="1000">
-              <a:latin typeface="페이퍼로지 4 Regular" pitchFamily="2" charset="-127"/>
-              <a:ea typeface="페이퍼로지 4 Regular" pitchFamily="2" charset="-127"/>
-              <a:sym typeface="Wingdings" panose="05000000000000000000" pitchFamily="2" charset="2"/>
-            </a:endParaRPr>
-          </a:p>
-          <a:p>
-            <a:r>
-              <a:rPr lang="en-US" altLang="ko-KR" sz="1000">
-                <a:latin typeface="페이퍼로지 4 Regular" pitchFamily="2" charset="-127"/>
-                <a:ea typeface="페이퍼로지 4 Regular" pitchFamily="2" charset="-127"/>
-                <a:sym typeface="Wingdings" panose="05000000000000000000" pitchFamily="2" charset="2"/>
-              </a:rPr>
-              <a:t>4. </a:t>
-            </a:r>
-            <a:r>
-              <a:rPr lang="ko-KR" altLang="en-US" sz="1000">
-                <a:latin typeface="페이퍼로지 4 Regular" pitchFamily="2" charset="-127"/>
-                <a:ea typeface="페이퍼로지 4 Regular" pitchFamily="2" charset="-127"/>
-                <a:sym typeface="Wingdings" panose="05000000000000000000" pitchFamily="2" charset="2"/>
-              </a:rPr>
-              <a:t>해시 키</a:t>
-            </a:r>
-            <a:r>
-              <a:rPr lang="en-US" altLang="ko-KR" sz="1000">
-                <a:latin typeface="페이퍼로지 4 Regular" pitchFamily="2" charset="-127"/>
-                <a:ea typeface="페이퍼로지 4 Regular" pitchFamily="2" charset="-127"/>
-                <a:sym typeface="Wingdings" panose="05000000000000000000" pitchFamily="2" charset="2"/>
-              </a:rPr>
-              <a:t>: AES </a:t>
-            </a:r>
-            <a:r>
-              <a:rPr lang="ko-KR" altLang="en-US" sz="1000">
-                <a:latin typeface="페이퍼로지 4 Regular" pitchFamily="2" charset="-127"/>
-                <a:ea typeface="페이퍼로지 4 Regular" pitchFamily="2" charset="-127"/>
-                <a:sym typeface="Wingdings" panose="05000000000000000000" pitchFamily="2" charset="2"/>
-              </a:rPr>
-              <a:t>키를 이용해 암호화 알고리즘 내부에서 생성된 별도의 키</a:t>
-            </a:r>
-            <a:r>
-              <a:rPr lang="en-US" altLang="ko-KR" sz="1000">
-                <a:latin typeface="페이퍼로지 4 Regular" pitchFamily="2" charset="-127"/>
-                <a:ea typeface="페이퍼로지 4 Regular" pitchFamily="2" charset="-127"/>
-                <a:sym typeface="Wingdings" panose="05000000000000000000" pitchFamily="2" charset="2"/>
-              </a:rPr>
-              <a:t>..?</a:t>
-            </a:r>
-          </a:p>
-          <a:p>
-            <a:endParaRPr lang="en-US" altLang="ko-KR" sz="1000">
-              <a:latin typeface="페이퍼로지 4 Regular" pitchFamily="2" charset="-127"/>
-              <a:ea typeface="페이퍼로지 4 Regular" pitchFamily="2" charset="-127"/>
-              <a:sym typeface="Wingdings" panose="05000000000000000000" pitchFamily="2" charset="2"/>
-            </a:endParaRPr>
-          </a:p>
-          <a:p>
-            <a:endParaRPr lang="en-US" altLang="ko-KR" sz="1000">
-              <a:latin typeface="페이퍼로지 4 Regular" pitchFamily="2" charset="-127"/>
-              <a:ea typeface="페이퍼로지 4 Regular" pitchFamily="2" charset="-127"/>
-              <a:sym typeface="Wingdings" panose="05000000000000000000" pitchFamily="2" charset="2"/>
-            </a:endParaRPr>
-          </a:p>
-          <a:p>
-            <a:endParaRPr lang="en-US" altLang="ko-KR" sz="800">
-              <a:latin typeface="페이퍼로지 4 Regular" pitchFamily="2" charset="-127"/>
-              <a:ea typeface="페이퍼로지 4 Regular" pitchFamily="2" charset="-127"/>
-              <a:sym typeface="Wingdings" panose="05000000000000000000" pitchFamily="2" charset="2"/>
-            </a:endParaRPr>
-          </a:p>
-          <a:p>
-            <a:endParaRPr lang="en-US" altLang="ko-KR" sz="800">
-              <a:latin typeface="페이퍼로지 4 Regular" pitchFamily="2" charset="-127"/>
-              <a:ea typeface="페이퍼로지 4 Regular" pitchFamily="2" charset="-127"/>
-              <a:sym typeface="Wingdings" panose="05000000000000000000" pitchFamily="2" charset="2"/>
-            </a:endParaRPr>
-          </a:p>
-          <a:p>
-            <a:endParaRPr lang="en-US" altLang="ko-KR" sz="800">
-              <a:latin typeface="페이퍼로지 4 Regular" pitchFamily="2" charset="-127"/>
-              <a:ea typeface="페이퍼로지 4 Regular" pitchFamily="2" charset="-127"/>
-              <a:sym typeface="Wingdings" panose="05000000000000000000" pitchFamily="2" charset="2"/>
-            </a:endParaRPr>
+            <a:endParaRPr lang="ko-KR" altLang="en-US"/>
           </a:p>
         </p:txBody>
       </p:sp>
@@ -18424,6 +19931,3247 @@
         <p:cNvPr id="1" name="Shape 167">
           <a:extLst>
             <a:ext uri="{FF2B5EF4-FFF2-40B4-BE49-F238E27FC236}">
+              <a16:creationId xmlns:a16="http://schemas.microsoft.com/office/drawing/2014/main" id="{D298C169-99EB-26AD-866A-E72F27046788}"/>
+            </a:ext>
+          </a:extLst>
+        </p:cNvPr>
+        <p:cNvGrpSpPr/>
+        <p:nvPr/>
+      </p:nvGrpSpPr>
+      <p:grpSpPr>
+        <a:xfrm>
+          <a:off x="0" y="0"/>
+          <a:ext cx="0" cy="0"/>
+          <a:chOff x="0" y="0"/>
+          <a:chExt cx="0" cy="0"/>
+        </a:xfrm>
+      </p:grpSpPr>
+      <p:sp>
+        <p:nvSpPr>
+          <p:cNvPr id="169" name="Google Shape;169;p19">
+            <a:extLst>
+              <a:ext uri="{FF2B5EF4-FFF2-40B4-BE49-F238E27FC236}">
+                <a16:creationId xmlns:a16="http://schemas.microsoft.com/office/drawing/2014/main" id="{BA55EC2F-8719-0CE0-B21A-237789D9E696}"/>
+              </a:ext>
+            </a:extLst>
+          </p:cNvPr>
+          <p:cNvSpPr txBox="1"/>
+          <p:nvPr/>
+        </p:nvSpPr>
+        <p:spPr>
+          <a:xfrm flipH="1">
+            <a:off x="452550" y="885617"/>
+            <a:ext cx="8238900" cy="4136865"/>
+          </a:xfrm>
+          <a:prstGeom prst="rect">
+            <a:avLst/>
+          </a:prstGeom>
+          <a:noFill/>
+          <a:ln>
+            <a:noFill/>
+          </a:ln>
+        </p:spPr>
+        <p:txBody>
+          <a:bodyPr spcFirstLastPara="1" wrap="square" lIns="91425" tIns="45700" rIns="91425" bIns="45700" anchor="t" anchorCtr="0">
+            <a:noAutofit/>
+          </a:bodyPr>
+          <a:lstStyle/>
+          <a:p>
+            <a:pPr marL="185738" marR="0" lvl="0" indent="-185738" algn="l" rtl="0">
+              <a:lnSpc>
+                <a:spcPct val="100000"/>
+              </a:lnSpc>
+              <a:spcBef>
+                <a:spcPts val="0"/>
+              </a:spcBef>
+              <a:spcAft>
+                <a:spcPts val="0"/>
+              </a:spcAft>
+              <a:buClr>
+                <a:srgbClr val="000000"/>
+              </a:buClr>
+              <a:buSzPts val="1600"/>
+              <a:buFont typeface="Arial" panose="020B0604020202020204" pitchFamily="34" charset="0"/>
+              <a:buChar char="•"/>
+            </a:pPr>
+            <a:r>
+              <a:rPr lang="en-US" altLang="ko-KR" sz="1800">
+                <a:solidFill>
+                  <a:schemeClr val="accent3">
+                    <a:lumMod val="50000"/>
+                  </a:schemeClr>
+                </a:solidFill>
+                <a:latin typeface="페이퍼로지 4 Regular" charset="-127"/>
+                <a:ea typeface="페이퍼로지 4 Regular" charset="-127"/>
+                <a:cs typeface="Montserrat SemiBold"/>
+                <a:sym typeface="Wingdings" panose="05000000000000000000" pitchFamily="2" charset="2"/>
+              </a:rPr>
+              <a:t>ChaCha20-Poly1305 </a:t>
+            </a:r>
+            <a:br>
+              <a:rPr lang="en-US" altLang="ko-KR" sz="1800">
+                <a:solidFill>
+                  <a:schemeClr val="tx1"/>
+                </a:solidFill>
+                <a:latin typeface="페이퍼로지 4 Regular" charset="-127"/>
+                <a:ea typeface="페이퍼로지 4 Regular" charset="-127"/>
+                <a:cs typeface="Montserrat SemiBold"/>
+                <a:sym typeface="Wingdings" panose="05000000000000000000" pitchFamily="2" charset="2"/>
+              </a:rPr>
+            </a:br>
+            <a:br>
+              <a:rPr lang="en-US" altLang="ko-KR" sz="800">
+                <a:solidFill>
+                  <a:schemeClr val="tx1"/>
+                </a:solidFill>
+                <a:latin typeface="페이퍼로지 4 Regular" charset="-127"/>
+                <a:ea typeface="페이퍼로지 4 Regular" charset="-127"/>
+                <a:cs typeface="Montserrat SemiBold"/>
+                <a:sym typeface="Wingdings" panose="05000000000000000000" pitchFamily="2" charset="2"/>
+              </a:rPr>
+            </a:br>
+            <a:r>
+              <a:rPr lang="en-US" altLang="ko-KR" sz="1600">
+                <a:solidFill>
+                  <a:schemeClr val="tx1"/>
+                </a:solidFill>
+                <a:latin typeface="페이퍼로지 4 Regular" charset="-127"/>
+                <a:ea typeface="페이퍼로지 4 Regular" charset="-127"/>
+                <a:cs typeface="Montserrat SemiBold"/>
+                <a:sym typeface="Wingdings" panose="05000000000000000000" pitchFamily="2" charset="2"/>
+              </a:rPr>
+              <a:t>-  </a:t>
+            </a:r>
+            <a:r>
+              <a:rPr lang="en-US" altLang="ko-KR" sz="1600">
+                <a:solidFill>
+                  <a:schemeClr val="accent1">
+                    <a:lumMod val="50000"/>
+                  </a:schemeClr>
+                </a:solidFill>
+                <a:latin typeface="페이퍼로지 4 Regular" charset="-127"/>
+                <a:ea typeface="페이퍼로지 4 Regular" charset="-127"/>
+                <a:cs typeface="Montserrat SemiBold"/>
+                <a:sym typeface="Wingdings" panose="05000000000000000000" pitchFamily="2" charset="2"/>
+              </a:rPr>
+              <a:t>AES-256-GCM</a:t>
+            </a:r>
+            <a:r>
+              <a:rPr lang="en-US" altLang="ko-KR" sz="1600">
+                <a:solidFill>
+                  <a:schemeClr val="tx1"/>
+                </a:solidFill>
+                <a:latin typeface="페이퍼로지 4 Regular" charset="-127"/>
+                <a:ea typeface="페이퍼로지 4 Regular" charset="-127"/>
+                <a:cs typeface="Montserrat SemiBold"/>
+                <a:sym typeface="Wingdings" panose="05000000000000000000" pitchFamily="2" charset="2"/>
+              </a:rPr>
+              <a:t>: 128 byte </a:t>
+            </a:r>
+            <a:r>
+              <a:rPr lang="ko-KR" altLang="en-US" sz="1600">
+                <a:solidFill>
+                  <a:schemeClr val="tx1"/>
+                </a:solidFill>
+                <a:latin typeface="페이퍼로지 4 Regular" charset="-127"/>
+                <a:ea typeface="페이퍼로지 4 Regular" charset="-127"/>
+                <a:cs typeface="Montserrat SemiBold"/>
+                <a:sym typeface="Wingdings" panose="05000000000000000000" pitchFamily="2" charset="2"/>
+              </a:rPr>
+              <a:t>단위로 쪼개 처리 </a:t>
+            </a:r>
+            <a:r>
+              <a:rPr lang="en-US" altLang="ko-KR" sz="1600">
+                <a:solidFill>
+                  <a:schemeClr val="tx1"/>
+                </a:solidFill>
+                <a:latin typeface="페이퍼로지 4 Regular" charset="-127"/>
+                <a:ea typeface="페이퍼로지 4 Regular" charset="-127"/>
+                <a:cs typeface="Montserrat SemiBold"/>
+                <a:sym typeface="Wingdings" panose="05000000000000000000" pitchFamily="2" charset="2"/>
+              </a:rPr>
+              <a:t>(</a:t>
+            </a:r>
+            <a:r>
+              <a:rPr lang="ko-KR" altLang="en-US" sz="1600">
+                <a:solidFill>
+                  <a:schemeClr val="tx1"/>
+                </a:solidFill>
+                <a:latin typeface="페이퍼로지 4 Regular" charset="-127"/>
+                <a:ea typeface="페이퍼로지 4 Regular" charset="-127"/>
+                <a:cs typeface="Montserrat SemiBold"/>
+                <a:sym typeface="Wingdings" panose="05000000000000000000" pitchFamily="2" charset="2"/>
+              </a:rPr>
+              <a:t>블록 암호 기반</a:t>
+            </a:r>
+            <a:r>
+              <a:rPr lang="en-US" altLang="ko-KR" sz="1600">
+                <a:solidFill>
+                  <a:schemeClr val="tx1"/>
+                </a:solidFill>
+                <a:latin typeface="페이퍼로지 4 Regular" charset="-127"/>
+                <a:ea typeface="페이퍼로지 4 Regular" charset="-127"/>
+                <a:cs typeface="Montserrat SemiBold"/>
+                <a:sym typeface="Wingdings" panose="05000000000000000000" pitchFamily="2" charset="2"/>
+              </a:rPr>
+              <a:t>)</a:t>
+            </a:r>
+            <a:br>
+              <a:rPr lang="en-US" altLang="ko-KR" sz="1600">
+                <a:solidFill>
+                  <a:schemeClr val="tx1"/>
+                </a:solidFill>
+                <a:latin typeface="페이퍼로지 4 Regular" charset="-127"/>
+                <a:ea typeface="페이퍼로지 4 Regular" charset="-127"/>
+                <a:cs typeface="Montserrat SemiBold"/>
+                <a:sym typeface="Wingdings" panose="05000000000000000000" pitchFamily="2" charset="2"/>
+              </a:rPr>
+            </a:br>
+            <a:br>
+              <a:rPr lang="en-US" altLang="ko-KR" sz="800">
+                <a:solidFill>
+                  <a:schemeClr val="tx1"/>
+                </a:solidFill>
+                <a:latin typeface="페이퍼로지 4 Regular" charset="-127"/>
+                <a:ea typeface="페이퍼로지 4 Regular" charset="-127"/>
+                <a:cs typeface="Montserrat SemiBold"/>
+                <a:sym typeface="Wingdings" panose="05000000000000000000" pitchFamily="2" charset="2"/>
+              </a:rPr>
+            </a:br>
+            <a:r>
+              <a:rPr lang="en-US" altLang="ko-KR" sz="1600">
+                <a:solidFill>
+                  <a:schemeClr val="tx1"/>
+                </a:solidFill>
+                <a:latin typeface="페이퍼로지 4 Regular" charset="-127"/>
+                <a:ea typeface="페이퍼로지 4 Regular" charset="-127"/>
+                <a:cs typeface="Montserrat SemiBold"/>
+                <a:sym typeface="Wingdings" panose="05000000000000000000" pitchFamily="2" charset="2"/>
+              </a:rPr>
+              <a:t>-  </a:t>
+            </a:r>
+            <a:r>
+              <a:rPr lang="en-US" altLang="ko-KR" sz="1600">
+                <a:solidFill>
+                  <a:schemeClr val="accent2">
+                    <a:lumMod val="50000"/>
+                  </a:schemeClr>
+                </a:solidFill>
+                <a:latin typeface="페이퍼로지 4 Regular" charset="-127"/>
+                <a:ea typeface="페이퍼로지 4 Regular" charset="-127"/>
+                <a:cs typeface="Montserrat SemiBold"/>
+                <a:sym typeface="Wingdings" panose="05000000000000000000" pitchFamily="2" charset="2"/>
+              </a:rPr>
+              <a:t>ChaCha20</a:t>
+            </a:r>
+            <a:r>
+              <a:rPr lang="en-US" altLang="ko-KR" sz="1600">
+                <a:solidFill>
+                  <a:schemeClr val="tx1"/>
+                </a:solidFill>
+                <a:latin typeface="페이퍼로지 4 Regular" charset="-127"/>
+                <a:ea typeface="페이퍼로지 4 Regular" charset="-127"/>
+                <a:cs typeface="Montserrat SemiBold"/>
+                <a:sym typeface="Wingdings" panose="05000000000000000000" pitchFamily="2" charset="2"/>
+              </a:rPr>
+              <a:t> … : </a:t>
+            </a:r>
+            <a:r>
+              <a:rPr lang="ko-KR" altLang="en-US" sz="1600">
+                <a:solidFill>
+                  <a:schemeClr val="tx1"/>
+                </a:solidFill>
+                <a:latin typeface="페이퍼로지 4 Regular" charset="-127"/>
+                <a:ea typeface="페이퍼로지 4 Regular" charset="-127"/>
+                <a:cs typeface="Montserrat SemiBold"/>
+                <a:sym typeface="Wingdings" panose="05000000000000000000" pitchFamily="2" charset="2"/>
+              </a:rPr>
+              <a:t>데이터 흐름대로 암호화 </a:t>
+            </a:r>
+            <a:r>
+              <a:rPr lang="en-US" altLang="ko-KR" sz="1600">
+                <a:solidFill>
+                  <a:schemeClr val="tx1"/>
+                </a:solidFill>
+                <a:latin typeface="페이퍼로지 4 Regular" charset="-127"/>
+                <a:ea typeface="페이퍼로지 4 Regular" charset="-127"/>
+                <a:cs typeface="Montserrat SemiBold"/>
+                <a:sym typeface="Wingdings" panose="05000000000000000000" pitchFamily="2" charset="2"/>
+              </a:rPr>
+              <a:t>“</a:t>
+            </a:r>
+            <a:r>
+              <a:rPr lang="ko-KR" altLang="en-US" sz="1600">
+                <a:solidFill>
+                  <a:schemeClr val="tx1"/>
+                </a:solidFill>
+                <a:latin typeface="페이퍼로지 4 Regular" charset="-127"/>
+                <a:ea typeface="페이퍼로지 4 Regular" charset="-127"/>
+                <a:cs typeface="Montserrat SemiBold"/>
+                <a:sym typeface="Wingdings" panose="05000000000000000000" pitchFamily="2" charset="2"/>
+              </a:rPr>
+              <a:t>스트림 암호</a:t>
+            </a:r>
+            <a:r>
+              <a:rPr lang="en-US" altLang="ko-KR" sz="1600">
+                <a:solidFill>
+                  <a:schemeClr val="tx1"/>
+                </a:solidFill>
+                <a:latin typeface="페이퍼로지 4 Regular" charset="-127"/>
+                <a:ea typeface="페이퍼로지 4 Regular" charset="-127"/>
+                <a:cs typeface="Montserrat SemiBold"/>
+                <a:sym typeface="Wingdings" panose="05000000000000000000" pitchFamily="2" charset="2"/>
+              </a:rPr>
+              <a:t>(Stream Cipher)”</a:t>
+            </a:r>
+            <a:r>
+              <a:rPr lang="ko-KR" altLang="en-US" sz="1600">
+                <a:solidFill>
+                  <a:schemeClr val="tx1"/>
+                </a:solidFill>
+                <a:latin typeface="페이퍼로지 4 Regular" charset="-127"/>
+                <a:ea typeface="페이퍼로지 4 Regular" charset="-127"/>
+                <a:cs typeface="Montserrat SemiBold"/>
+                <a:sym typeface="Wingdings" panose="05000000000000000000" pitchFamily="2" charset="2"/>
+              </a:rPr>
+              <a:t>인 </a:t>
+            </a:r>
+            <a:r>
+              <a:rPr lang="en-US" altLang="ko-KR" sz="1600">
+                <a:solidFill>
+                  <a:schemeClr val="tx1"/>
+                </a:solidFill>
+                <a:latin typeface="페이퍼로지 4 Regular" charset="-127"/>
+                <a:ea typeface="페이퍼로지 4 Regular" charset="-127"/>
+                <a:cs typeface="Montserrat SemiBold"/>
+                <a:sym typeface="Wingdings" panose="05000000000000000000" pitchFamily="2" charset="2"/>
+              </a:rPr>
+              <a:t>		   ChaCha20</a:t>
+            </a:r>
+            <a:r>
+              <a:rPr lang="ko-KR" altLang="en-US" sz="1600">
+                <a:solidFill>
+                  <a:schemeClr val="tx1"/>
+                </a:solidFill>
+                <a:latin typeface="페이퍼로지 4 Regular" charset="-127"/>
+                <a:ea typeface="페이퍼로지 4 Regular" charset="-127"/>
+                <a:cs typeface="Montserrat SemiBold"/>
+                <a:sym typeface="Wingdings" panose="05000000000000000000" pitchFamily="2" charset="2"/>
+              </a:rPr>
+              <a:t>과 </a:t>
+            </a:r>
+            <a:r>
+              <a:rPr lang="en-US" altLang="ko-KR" sz="1600">
+                <a:solidFill>
+                  <a:schemeClr val="tx1"/>
+                </a:solidFill>
+                <a:latin typeface="페이퍼로지 4 Regular" charset="-127"/>
+                <a:ea typeface="페이퍼로지 4 Regular" charset="-127"/>
+                <a:cs typeface="Montserrat SemiBold"/>
+                <a:sym typeface="Wingdings" panose="05000000000000000000" pitchFamily="2" charset="2"/>
+              </a:rPr>
+              <a:t>MAC </a:t>
+            </a:r>
+            <a:r>
+              <a:rPr lang="ko-KR" altLang="en-US" sz="1600">
+                <a:solidFill>
+                  <a:schemeClr val="tx1"/>
+                </a:solidFill>
+                <a:latin typeface="페이퍼로지 4 Regular" charset="-127"/>
+                <a:ea typeface="페이퍼로지 4 Regular" charset="-127"/>
+                <a:cs typeface="Montserrat SemiBold"/>
+                <a:sym typeface="Wingdings" panose="05000000000000000000" pitchFamily="2" charset="2"/>
+              </a:rPr>
+              <a:t>알고리즘인 </a:t>
+            </a:r>
+            <a:r>
+              <a:rPr lang="en-US" altLang="ko-KR" sz="1600">
+                <a:solidFill>
+                  <a:schemeClr val="tx1"/>
+                </a:solidFill>
+                <a:latin typeface="페이퍼로지 4 Regular" charset="-127"/>
+                <a:ea typeface="페이퍼로지 4 Regular" charset="-127"/>
+                <a:cs typeface="Montserrat SemiBold"/>
+                <a:sym typeface="Wingdings" panose="05000000000000000000" pitchFamily="2" charset="2"/>
+              </a:rPr>
+              <a:t>Poly-1305</a:t>
+            </a:r>
+            <a:r>
+              <a:rPr lang="ko-KR" altLang="en-US" sz="1600">
+                <a:solidFill>
+                  <a:schemeClr val="tx1"/>
+                </a:solidFill>
+                <a:latin typeface="페이퍼로지 4 Regular" charset="-127"/>
+                <a:ea typeface="페이퍼로지 4 Regular" charset="-127"/>
+                <a:cs typeface="Montserrat SemiBold"/>
+                <a:sym typeface="Wingdings" panose="05000000000000000000" pitchFamily="2" charset="2"/>
+              </a:rPr>
+              <a:t>의 결합</a:t>
+            </a:r>
+            <a:br>
+              <a:rPr lang="en-US" altLang="ko-KR" sz="1600">
+                <a:solidFill>
+                  <a:schemeClr val="tx1"/>
+                </a:solidFill>
+                <a:latin typeface="페이퍼로지 4 Regular" charset="-127"/>
+                <a:ea typeface="페이퍼로지 4 Regular" charset="-127"/>
+                <a:cs typeface="Montserrat SemiBold"/>
+                <a:sym typeface="Wingdings" panose="05000000000000000000" pitchFamily="2" charset="2"/>
+              </a:rPr>
+            </a:br>
+            <a:r>
+              <a:rPr lang="ko-KR" altLang="en-US" sz="1600">
+                <a:solidFill>
+                  <a:schemeClr val="tx1"/>
+                </a:solidFill>
+                <a:latin typeface="페이퍼로지 4 Regular" charset="-127"/>
+                <a:ea typeface="페이퍼로지 4 Regular" charset="-127"/>
+                <a:cs typeface="Montserrat SemiBold"/>
+                <a:sym typeface="Wingdings" panose="05000000000000000000" pitchFamily="2" charset="2"/>
+              </a:rPr>
+              <a:t> </a:t>
+            </a:r>
+            <a:br>
+              <a:rPr lang="en-US" altLang="ko-KR" sz="1600">
+                <a:solidFill>
+                  <a:schemeClr val="tx1"/>
+                </a:solidFill>
+                <a:latin typeface="페이퍼로지 4 Regular" charset="-127"/>
+                <a:ea typeface="페이퍼로지 4 Regular" charset="-127"/>
+                <a:cs typeface="Montserrat SemiBold"/>
+                <a:sym typeface="Wingdings" panose="05000000000000000000" pitchFamily="2" charset="2"/>
+              </a:rPr>
+            </a:br>
+            <a:br>
+              <a:rPr lang="en-US" altLang="ko-KR" sz="800">
+                <a:solidFill>
+                  <a:schemeClr val="tx1"/>
+                </a:solidFill>
+                <a:latin typeface="페이퍼로지 4 Regular" charset="-127"/>
+                <a:ea typeface="페이퍼로지 4 Regular" charset="-127"/>
+                <a:cs typeface="Montserrat SemiBold"/>
+                <a:sym typeface="Wingdings" panose="05000000000000000000" pitchFamily="2" charset="2"/>
+              </a:rPr>
+            </a:br>
+            <a:r>
+              <a:rPr lang="en-US" altLang="ko-KR" sz="1600">
+                <a:solidFill>
+                  <a:schemeClr val="accent1">
+                    <a:lumMod val="50000"/>
+                  </a:schemeClr>
+                </a:solidFill>
+                <a:latin typeface="페이퍼로지 4 Regular" charset="-127"/>
+                <a:ea typeface="페이퍼로지 4 Regular" charset="-127"/>
+                <a:cs typeface="Montserrat SemiBold"/>
+                <a:sym typeface="Wingdings" panose="05000000000000000000" pitchFamily="2" charset="2"/>
+              </a:rPr>
+              <a:t>AES</a:t>
+            </a:r>
+            <a:r>
+              <a:rPr lang="en-US" altLang="ko-KR" sz="1600">
+                <a:solidFill>
+                  <a:schemeClr val="tx1"/>
+                </a:solidFill>
+                <a:latin typeface="페이퍼로지 4 Regular" charset="-127"/>
+                <a:ea typeface="페이퍼로지 4 Regular" charset="-127"/>
+                <a:cs typeface="Montserrat SemiBold"/>
+                <a:sym typeface="Wingdings" panose="05000000000000000000" pitchFamily="2" charset="2"/>
+              </a:rPr>
+              <a:t>  AES-NI</a:t>
+            </a:r>
+            <a:r>
+              <a:rPr lang="ko-KR" altLang="en-US" sz="1600">
+                <a:solidFill>
+                  <a:schemeClr val="tx1"/>
+                </a:solidFill>
+                <a:latin typeface="페이퍼로지 4 Regular" charset="-127"/>
+                <a:ea typeface="페이퍼로지 4 Regular" charset="-127"/>
+                <a:cs typeface="Montserrat SemiBold"/>
+                <a:sym typeface="Wingdings" panose="05000000000000000000" pitchFamily="2" charset="2"/>
+              </a:rPr>
+              <a:t>라는 하드웨어 가속 필요 </a:t>
+            </a:r>
+            <a:r>
+              <a:rPr lang="en-US" altLang="ko-KR" sz="1600">
+                <a:solidFill>
+                  <a:schemeClr val="tx1"/>
+                </a:solidFill>
+                <a:latin typeface="페이퍼로지 4 Regular" charset="-127"/>
+                <a:ea typeface="페이퍼로지 4 Regular" charset="-127"/>
+                <a:cs typeface="Montserrat SemiBold"/>
+                <a:sym typeface="Wingdings" panose="05000000000000000000" pitchFamily="2" charset="2"/>
+              </a:rPr>
+              <a:t>(</a:t>
+            </a:r>
+            <a:r>
+              <a:rPr lang="ko-KR" altLang="en-US" sz="1600">
+                <a:solidFill>
+                  <a:schemeClr val="tx1"/>
+                </a:solidFill>
+                <a:latin typeface="페이퍼로지 4 Regular" charset="-127"/>
+                <a:ea typeface="페이퍼로지 4 Regular" charset="-127"/>
+                <a:cs typeface="Montserrat SemiBold"/>
+                <a:sym typeface="Wingdings" panose="05000000000000000000" pitchFamily="2" charset="2"/>
+              </a:rPr>
+              <a:t>모바일</a:t>
+            </a:r>
+            <a:r>
+              <a:rPr lang="en-US" altLang="ko-KR" sz="1600">
+                <a:solidFill>
+                  <a:schemeClr val="tx1"/>
+                </a:solidFill>
+                <a:latin typeface="페이퍼로지 4 Regular" charset="-127"/>
+                <a:ea typeface="페이퍼로지 4 Regular" charset="-127"/>
+                <a:cs typeface="Montserrat SemiBold"/>
+                <a:sym typeface="Wingdings" panose="05000000000000000000" pitchFamily="2" charset="2"/>
+              </a:rPr>
+              <a:t>, IOT</a:t>
+            </a:r>
+            <a:r>
+              <a:rPr lang="ko-KR" altLang="en-US" sz="1600">
+                <a:solidFill>
+                  <a:schemeClr val="tx1"/>
+                </a:solidFill>
+                <a:latin typeface="페이퍼로지 4 Regular" charset="-127"/>
+                <a:ea typeface="페이퍼로지 4 Regular" charset="-127"/>
+                <a:cs typeface="Montserrat SemiBold"/>
+                <a:sym typeface="Wingdings" panose="05000000000000000000" pitchFamily="2" charset="2"/>
+              </a:rPr>
+              <a:t>는 성능 급감</a:t>
+            </a:r>
+            <a:r>
+              <a:rPr lang="en-US" altLang="ko-KR" sz="1600">
+                <a:solidFill>
+                  <a:schemeClr val="tx1"/>
+                </a:solidFill>
+                <a:latin typeface="페이퍼로지 4 Regular" charset="-127"/>
+                <a:ea typeface="페이퍼로지 4 Regular" charset="-127"/>
+                <a:cs typeface="Montserrat SemiBold"/>
+                <a:sym typeface="Wingdings" panose="05000000000000000000" pitchFamily="2" charset="2"/>
+              </a:rPr>
+              <a:t>) </a:t>
+            </a:r>
+            <a:br>
+              <a:rPr lang="en-US" altLang="ko-KR" sz="1600">
+                <a:solidFill>
+                  <a:schemeClr val="tx1"/>
+                </a:solidFill>
+                <a:latin typeface="페이퍼로지 4 Regular" charset="-127"/>
+                <a:ea typeface="페이퍼로지 4 Regular" charset="-127"/>
+                <a:cs typeface="Montserrat SemiBold"/>
+                <a:sym typeface="Wingdings" panose="05000000000000000000" pitchFamily="2" charset="2"/>
+              </a:rPr>
+            </a:br>
+            <a:br>
+              <a:rPr lang="en-US" altLang="ko-KR" sz="800">
+                <a:solidFill>
+                  <a:schemeClr val="tx1"/>
+                </a:solidFill>
+                <a:latin typeface="페이퍼로지 4 Regular" charset="-127"/>
+                <a:ea typeface="페이퍼로지 4 Regular" charset="-127"/>
+                <a:cs typeface="Montserrat SemiBold"/>
+                <a:sym typeface="Wingdings" panose="05000000000000000000" pitchFamily="2" charset="2"/>
+              </a:rPr>
+            </a:br>
+            <a:r>
+              <a:rPr lang="en-US" altLang="ko-KR" sz="1600">
+                <a:solidFill>
+                  <a:schemeClr val="accent2">
+                    <a:lumMod val="50000"/>
+                  </a:schemeClr>
+                </a:solidFill>
+                <a:latin typeface="페이퍼로지 4 Regular" charset="-127"/>
+                <a:ea typeface="페이퍼로지 4 Regular" charset="-127"/>
+                <a:cs typeface="Montserrat SemiBold"/>
+                <a:sym typeface="Wingdings" panose="05000000000000000000" pitchFamily="2" charset="2"/>
+              </a:rPr>
+              <a:t>Cha </a:t>
+            </a:r>
+            <a:r>
+              <a:rPr lang="en-US" altLang="ko-KR" sz="1600">
+                <a:solidFill>
+                  <a:schemeClr val="tx1"/>
+                </a:solidFill>
+                <a:latin typeface="페이퍼로지 4 Regular" charset="-127"/>
+                <a:ea typeface="페이퍼로지 4 Regular" charset="-127"/>
+                <a:cs typeface="Montserrat SemiBold"/>
+                <a:sym typeface="Wingdings" panose="05000000000000000000" pitchFamily="2" charset="2"/>
+              </a:rPr>
+              <a:t> SW</a:t>
+            </a:r>
+            <a:r>
+              <a:rPr lang="ko-KR" altLang="en-US" sz="1600">
+                <a:solidFill>
+                  <a:schemeClr val="tx1"/>
+                </a:solidFill>
+                <a:latin typeface="페이퍼로지 4 Regular" charset="-127"/>
+                <a:ea typeface="페이퍼로지 4 Regular" charset="-127"/>
+                <a:cs typeface="Montserrat SemiBold"/>
+                <a:sym typeface="Wingdings" panose="05000000000000000000" pitchFamily="2" charset="2"/>
+              </a:rPr>
+              <a:t>만으로 빠르게 돌아감</a:t>
+            </a:r>
+            <a:r>
+              <a:rPr lang="en-US" altLang="ko-KR" sz="1600">
+                <a:solidFill>
+                  <a:schemeClr val="tx1"/>
+                </a:solidFill>
+                <a:latin typeface="페이퍼로지 4 Regular" charset="-127"/>
+                <a:ea typeface="페이퍼로지 4 Regular" charset="-127"/>
+                <a:cs typeface="Montserrat SemiBold"/>
+                <a:sym typeface="Wingdings" panose="05000000000000000000" pitchFamily="2" charset="2"/>
+              </a:rPr>
+              <a:t>. (</a:t>
+            </a:r>
+            <a:r>
+              <a:rPr lang="ko-KR" altLang="en-US" sz="1600">
+                <a:solidFill>
+                  <a:schemeClr val="tx1"/>
+                </a:solidFill>
+                <a:latin typeface="페이퍼로지 4 Regular" charset="-127"/>
+                <a:ea typeface="페이퍼로지 4 Regular" charset="-127"/>
+                <a:cs typeface="Montserrat SemiBold"/>
+                <a:sym typeface="Wingdings" panose="05000000000000000000" pitchFamily="2" charset="2"/>
+              </a:rPr>
+              <a:t>모바일</a:t>
+            </a:r>
+            <a:r>
+              <a:rPr lang="en-US" altLang="ko-KR" sz="1600">
+                <a:solidFill>
+                  <a:schemeClr val="tx1"/>
+                </a:solidFill>
+                <a:latin typeface="페이퍼로지 4 Regular" charset="-127"/>
+                <a:ea typeface="페이퍼로지 4 Regular" charset="-127"/>
+                <a:cs typeface="Montserrat SemiBold"/>
+                <a:sym typeface="Wingdings" panose="05000000000000000000" pitchFamily="2" charset="2"/>
+              </a:rPr>
+              <a:t>, IOT</a:t>
+            </a:r>
+            <a:r>
+              <a:rPr lang="ko-KR" altLang="en-US" sz="1600">
+                <a:solidFill>
+                  <a:schemeClr val="tx1"/>
+                </a:solidFill>
+                <a:latin typeface="페이퍼로지 4 Regular" charset="-127"/>
+                <a:ea typeface="페이퍼로지 4 Regular" charset="-127"/>
+                <a:cs typeface="Montserrat SemiBold"/>
+                <a:sym typeface="Wingdings" panose="05000000000000000000" pitchFamily="2" charset="2"/>
+              </a:rPr>
+              <a:t>도 높은 효율</a:t>
+            </a:r>
+            <a:r>
+              <a:rPr lang="en-US" altLang="ko-KR" sz="1600">
+                <a:solidFill>
+                  <a:schemeClr val="tx1"/>
+                </a:solidFill>
+                <a:latin typeface="페이퍼로지 4 Regular" charset="-127"/>
+                <a:ea typeface="페이퍼로지 4 Regular" charset="-127"/>
+                <a:cs typeface="Montserrat SemiBold"/>
+                <a:sym typeface="Wingdings" panose="05000000000000000000" pitchFamily="2" charset="2"/>
+              </a:rPr>
+              <a:t>) </a:t>
+            </a:r>
+            <a:br>
+              <a:rPr lang="en-US" altLang="ko-KR" sz="1600">
+                <a:solidFill>
+                  <a:schemeClr val="tx1"/>
+                </a:solidFill>
+                <a:latin typeface="페이퍼로지 4 Regular" charset="-127"/>
+                <a:ea typeface="페이퍼로지 4 Regular" charset="-127"/>
+                <a:cs typeface="Montserrat SemiBold"/>
+                <a:sym typeface="Wingdings" panose="05000000000000000000" pitchFamily="2" charset="2"/>
+              </a:rPr>
+            </a:br>
+            <a:br>
+              <a:rPr lang="en-US" altLang="ko-KR" sz="1600">
+                <a:solidFill>
+                  <a:schemeClr val="tx1"/>
+                </a:solidFill>
+                <a:latin typeface="페이퍼로지 4 Regular" charset="-127"/>
+                <a:ea typeface="페이퍼로지 4 Regular" charset="-127"/>
+                <a:cs typeface="Montserrat SemiBold"/>
+                <a:sym typeface="Wingdings" panose="05000000000000000000" pitchFamily="2" charset="2"/>
+              </a:rPr>
+            </a:br>
+            <a:br>
+              <a:rPr lang="en-US" altLang="ko-KR" sz="800">
+                <a:solidFill>
+                  <a:schemeClr val="tx1"/>
+                </a:solidFill>
+                <a:latin typeface="페이퍼로지 4 Regular" charset="-127"/>
+                <a:ea typeface="페이퍼로지 4 Regular" charset="-127"/>
+                <a:cs typeface="Montserrat SemiBold"/>
+                <a:sym typeface="Wingdings" panose="05000000000000000000" pitchFamily="2" charset="2"/>
+              </a:rPr>
+            </a:br>
+            <a:r>
+              <a:rPr lang="en-US" altLang="ko-KR" sz="1600">
+                <a:solidFill>
+                  <a:schemeClr val="tx1"/>
+                </a:solidFill>
+                <a:latin typeface="페이퍼로지 4 Regular" charset="-127"/>
+                <a:ea typeface="페이퍼로지 4 Regular" charset="-127"/>
+                <a:cs typeface="Montserrat SemiBold"/>
+                <a:sym typeface="Wingdings" panose="05000000000000000000" pitchFamily="2" charset="2"/>
+              </a:rPr>
+              <a:t>--  </a:t>
+            </a:r>
+            <a:r>
+              <a:rPr lang="en-US" altLang="ko-KR" sz="1600">
+                <a:solidFill>
+                  <a:schemeClr val="accent1">
+                    <a:lumMod val="50000"/>
+                  </a:schemeClr>
+                </a:solidFill>
+                <a:latin typeface="페이퍼로지 4 Regular" charset="-127"/>
+                <a:ea typeface="페이퍼로지 4 Regular" charset="-127"/>
+                <a:cs typeface="Montserrat SemiBold"/>
+                <a:sym typeface="Wingdings" panose="05000000000000000000" pitchFamily="2" charset="2"/>
+              </a:rPr>
+              <a:t>AES</a:t>
+            </a:r>
+            <a:r>
+              <a:rPr lang="en-US" altLang="ko-KR" sz="1600">
+                <a:solidFill>
+                  <a:schemeClr val="tx1"/>
+                </a:solidFill>
+                <a:latin typeface="페이퍼로지 4 Regular" charset="-127"/>
+                <a:ea typeface="페이퍼로지 4 Regular" charset="-127"/>
+                <a:cs typeface="Montserrat SemiBold"/>
+                <a:sym typeface="Wingdings" panose="05000000000000000000" pitchFamily="2" charset="2"/>
+              </a:rPr>
+              <a:t> </a:t>
+            </a:r>
+            <a:r>
+              <a:rPr lang="ko-KR" altLang="en-US" sz="1600">
+                <a:solidFill>
+                  <a:schemeClr val="tx1"/>
+                </a:solidFill>
+                <a:latin typeface="페이퍼로지 4 Regular" charset="-127"/>
+                <a:ea typeface="페이퍼로지 4 Regular" charset="-127"/>
+                <a:cs typeface="Montserrat SemiBold"/>
+                <a:sym typeface="Wingdings" panose="05000000000000000000" pitchFamily="2" charset="2"/>
+              </a:rPr>
+              <a:t>약점</a:t>
+            </a:r>
+            <a:r>
+              <a:rPr lang="en-US" altLang="ko-KR" sz="1600">
+                <a:solidFill>
+                  <a:schemeClr val="tx1"/>
+                </a:solidFill>
+                <a:latin typeface="페이퍼로지 4 Regular" charset="-127"/>
+                <a:ea typeface="페이퍼로지 4 Regular" charset="-127"/>
+                <a:cs typeface="Montserrat SemiBold"/>
+                <a:sym typeface="Wingdings" panose="05000000000000000000" pitchFamily="2" charset="2"/>
+              </a:rPr>
+              <a:t>? SW</a:t>
+            </a:r>
+            <a:r>
+              <a:rPr lang="ko-KR" altLang="en-US" sz="1600">
+                <a:solidFill>
+                  <a:schemeClr val="tx1"/>
+                </a:solidFill>
+                <a:latin typeface="페이퍼로지 4 Regular" charset="-127"/>
+                <a:ea typeface="페이퍼로지 4 Regular" charset="-127"/>
+                <a:cs typeface="Montserrat SemiBold"/>
+                <a:sym typeface="Wingdings" panose="05000000000000000000" pitchFamily="2" charset="2"/>
+              </a:rPr>
+              <a:t>로 </a:t>
+            </a:r>
+            <a:r>
+              <a:rPr lang="en-US" altLang="ko-KR" sz="1600">
+                <a:solidFill>
+                  <a:schemeClr val="tx1"/>
+                </a:solidFill>
+                <a:latin typeface="페이퍼로지 4 Regular" charset="-127"/>
+                <a:ea typeface="페이퍼로지 4 Regular" charset="-127"/>
+                <a:cs typeface="Montserrat SemiBold"/>
+                <a:sym typeface="Wingdings" panose="05000000000000000000" pitchFamily="2" charset="2"/>
+              </a:rPr>
+              <a:t>AES </a:t>
+            </a:r>
+            <a:r>
+              <a:rPr lang="ko-KR" altLang="en-US" sz="1600">
+                <a:solidFill>
+                  <a:schemeClr val="tx1"/>
+                </a:solidFill>
+                <a:latin typeface="페이퍼로지 4 Regular" charset="-127"/>
+                <a:ea typeface="페이퍼로지 4 Regular" charset="-127"/>
+                <a:cs typeface="Montserrat SemiBold"/>
+                <a:sym typeface="Wingdings" panose="05000000000000000000" pitchFamily="2" charset="2"/>
+              </a:rPr>
+              <a:t>구현 시 속도를 높이기 위한 </a:t>
+            </a:r>
+            <a:r>
+              <a:rPr lang="en-US" altLang="ko-KR" sz="1600">
+                <a:solidFill>
+                  <a:schemeClr val="tx1"/>
+                </a:solidFill>
+                <a:latin typeface="페이퍼로지 4 Regular" charset="-127"/>
+                <a:ea typeface="페이퍼로지 4 Regular" charset="-127"/>
+                <a:cs typeface="Montserrat SemiBold"/>
+                <a:sym typeface="Wingdings" panose="05000000000000000000" pitchFamily="2" charset="2"/>
+              </a:rPr>
+              <a:t>Lookup Table</a:t>
+            </a:r>
+            <a:r>
+              <a:rPr lang="ko-KR" altLang="en-US" sz="1600">
+                <a:solidFill>
+                  <a:schemeClr val="tx1"/>
+                </a:solidFill>
+                <a:latin typeface="페이퍼로지 4 Regular" charset="-127"/>
+                <a:ea typeface="페이퍼로지 4 Regular" charset="-127"/>
+                <a:cs typeface="Montserrat SemiBold"/>
+                <a:sym typeface="Wingdings" panose="05000000000000000000" pitchFamily="2" charset="2"/>
+              </a:rPr>
+              <a:t>을 사용</a:t>
+            </a:r>
+            <a:br>
+              <a:rPr lang="en-US" altLang="ko-KR" sz="1600">
+                <a:solidFill>
+                  <a:schemeClr val="tx1"/>
+                </a:solidFill>
+                <a:latin typeface="페이퍼로지 4 Regular" charset="-127"/>
+                <a:ea typeface="페이퍼로지 4 Regular" charset="-127"/>
+                <a:cs typeface="Montserrat SemiBold"/>
+                <a:sym typeface="Wingdings" panose="05000000000000000000" pitchFamily="2" charset="2"/>
+              </a:rPr>
+            </a:br>
+            <a:br>
+              <a:rPr lang="en-US" altLang="ko-KR" sz="400">
+                <a:solidFill>
+                  <a:schemeClr val="tx1"/>
+                </a:solidFill>
+                <a:latin typeface="페이퍼로지 4 Regular" charset="-127"/>
+                <a:ea typeface="페이퍼로지 4 Regular" charset="-127"/>
+                <a:cs typeface="Montserrat SemiBold"/>
+                <a:sym typeface="Wingdings" panose="05000000000000000000" pitchFamily="2" charset="2"/>
+              </a:rPr>
+            </a:br>
+            <a:r>
+              <a:rPr lang="en-US" altLang="ko-KR" sz="1600">
+                <a:solidFill>
+                  <a:schemeClr val="tx1"/>
+                </a:solidFill>
+                <a:latin typeface="페이퍼로지 4 Regular" charset="-127"/>
+                <a:ea typeface="페이퍼로지 4 Regular" charset="-127"/>
+                <a:cs typeface="Montserrat SemiBold"/>
+                <a:sym typeface="Wingdings" panose="05000000000000000000" pitchFamily="2" charset="2"/>
+              </a:rPr>
+              <a:t>	      &gt;&gt; </a:t>
+            </a:r>
+            <a:r>
+              <a:rPr lang="ko-KR" altLang="en-US" sz="1600">
+                <a:solidFill>
+                  <a:schemeClr val="tx1"/>
+                </a:solidFill>
+                <a:latin typeface="페이퍼로지 4 Regular" charset="-127"/>
+                <a:ea typeface="페이퍼로지 4 Regular" charset="-127"/>
+                <a:cs typeface="Montserrat SemiBold"/>
+                <a:sym typeface="Wingdings" panose="05000000000000000000" pitchFamily="2" charset="2"/>
+              </a:rPr>
+              <a:t>캐시 타이밍 공격</a:t>
+            </a:r>
+            <a:r>
+              <a:rPr lang="en-US" altLang="ko-KR" sz="1600">
+                <a:solidFill>
+                  <a:schemeClr val="tx1"/>
+                </a:solidFill>
+                <a:latin typeface="페이퍼로지 4 Regular" charset="-127"/>
+                <a:ea typeface="페이퍼로지 4 Regular" charset="-127"/>
+                <a:cs typeface="Montserrat SemiBold"/>
+                <a:sym typeface="Wingdings" panose="05000000000000000000" pitchFamily="2" charset="2"/>
+              </a:rPr>
+              <a:t>? </a:t>
+            </a:r>
+            <a:br>
+              <a:rPr lang="en-US" altLang="ko-KR" sz="1600">
+                <a:solidFill>
+                  <a:schemeClr val="tx1"/>
+                </a:solidFill>
+                <a:latin typeface="페이퍼로지 4 Regular" charset="-127"/>
+                <a:ea typeface="페이퍼로지 4 Regular" charset="-127"/>
+                <a:cs typeface="Montserrat SemiBold"/>
+                <a:sym typeface="Wingdings" panose="05000000000000000000" pitchFamily="2" charset="2"/>
+              </a:rPr>
+            </a:br>
+            <a:br>
+              <a:rPr lang="en-US" altLang="ko-KR" sz="800">
+                <a:solidFill>
+                  <a:schemeClr val="tx1"/>
+                </a:solidFill>
+                <a:latin typeface="페이퍼로지 4 Regular" charset="-127"/>
+                <a:ea typeface="페이퍼로지 4 Regular" charset="-127"/>
+                <a:cs typeface="Montserrat SemiBold"/>
+                <a:sym typeface="Wingdings" panose="05000000000000000000" pitchFamily="2" charset="2"/>
+              </a:rPr>
+            </a:br>
+            <a:r>
+              <a:rPr lang="en-US" altLang="ko-KR" sz="1600">
+                <a:solidFill>
+                  <a:schemeClr val="tx1"/>
+                </a:solidFill>
+                <a:latin typeface="페이퍼로지 4 Regular" charset="-127"/>
+                <a:ea typeface="페이퍼로지 4 Regular" charset="-127"/>
+                <a:cs typeface="Montserrat SemiBold"/>
+                <a:sym typeface="Wingdings" panose="05000000000000000000" pitchFamily="2" charset="2"/>
+              </a:rPr>
+              <a:t>-- </a:t>
+            </a:r>
+            <a:r>
+              <a:rPr lang="en-US" altLang="ko-KR" sz="1600">
+                <a:solidFill>
+                  <a:schemeClr val="accent2">
+                    <a:lumMod val="50000"/>
+                  </a:schemeClr>
+                </a:solidFill>
+                <a:latin typeface="페이퍼로지 4 Regular" charset="-127"/>
+                <a:ea typeface="페이퍼로지 4 Regular" charset="-127"/>
+                <a:cs typeface="Montserrat SemiBold"/>
+                <a:sym typeface="Wingdings" panose="05000000000000000000" pitchFamily="2" charset="2"/>
+              </a:rPr>
+              <a:t>Cha</a:t>
+            </a:r>
+            <a:r>
+              <a:rPr lang="en-US" altLang="ko-KR" sz="1600">
+                <a:solidFill>
+                  <a:schemeClr val="tx1"/>
+                </a:solidFill>
+                <a:latin typeface="페이퍼로지 4 Regular" charset="-127"/>
+                <a:ea typeface="페이퍼로지 4 Regular" charset="-127"/>
+                <a:cs typeface="Montserrat SemiBold"/>
+                <a:sym typeface="Wingdings" panose="05000000000000000000" pitchFamily="2" charset="2"/>
+              </a:rPr>
+              <a:t> </a:t>
+            </a:r>
+            <a:r>
+              <a:rPr lang="ko-KR" altLang="en-US" sz="1600">
+                <a:solidFill>
+                  <a:schemeClr val="tx1"/>
+                </a:solidFill>
+                <a:latin typeface="페이퍼로지 4 Regular" charset="-127"/>
+                <a:ea typeface="페이퍼로지 4 Regular" charset="-127"/>
+                <a:cs typeface="Montserrat SemiBold"/>
+                <a:sym typeface="Wingdings" panose="05000000000000000000" pitchFamily="2" charset="2"/>
+              </a:rPr>
+              <a:t>강점</a:t>
+            </a:r>
+            <a:r>
+              <a:rPr lang="en-US" altLang="ko-KR" sz="1600">
+                <a:solidFill>
+                  <a:schemeClr val="tx1"/>
+                </a:solidFill>
+                <a:latin typeface="페이퍼로지 4 Regular" charset="-127"/>
+                <a:ea typeface="페이퍼로지 4 Regular" charset="-127"/>
+                <a:cs typeface="Montserrat SemiBold"/>
+                <a:sym typeface="Wingdings" panose="05000000000000000000" pitchFamily="2" charset="2"/>
+              </a:rPr>
+              <a:t>? </a:t>
+            </a:r>
+            <a:r>
+              <a:rPr lang="ko-KR" altLang="en-US" sz="1600">
+                <a:solidFill>
+                  <a:schemeClr val="tx1"/>
+                </a:solidFill>
+                <a:latin typeface="페이퍼로지 4 Regular" charset="-127"/>
+                <a:ea typeface="페이퍼로지 4 Regular" charset="-127"/>
+                <a:cs typeface="Montserrat SemiBold"/>
+                <a:sym typeface="Wingdings" panose="05000000000000000000" pitchFamily="2" charset="2"/>
+              </a:rPr>
+              <a:t>오직 </a:t>
+            </a:r>
+            <a:r>
+              <a:rPr lang="en-US" altLang="ko-KR" sz="1600">
+                <a:solidFill>
+                  <a:schemeClr val="tx1"/>
+                </a:solidFill>
+                <a:latin typeface="페이퍼로지 4 Regular" charset="-127"/>
+                <a:ea typeface="페이퍼로지 4 Regular" charset="-127"/>
+                <a:cs typeface="Montserrat SemiBold"/>
+                <a:sym typeface="Wingdings" panose="05000000000000000000" pitchFamily="2" charset="2"/>
+              </a:rPr>
+              <a:t>ARX(Addition-Rotation-XOR)</a:t>
+            </a:r>
+            <a:r>
+              <a:rPr lang="ko-KR" altLang="en-US" sz="1600">
+                <a:solidFill>
+                  <a:schemeClr val="tx1"/>
+                </a:solidFill>
+                <a:latin typeface="페이퍼로지 4 Regular" charset="-127"/>
+                <a:ea typeface="페이퍼로지 4 Regular" charset="-127"/>
+                <a:cs typeface="Montserrat SemiBold"/>
+                <a:sym typeface="Wingdings" panose="05000000000000000000" pitchFamily="2" charset="2"/>
+              </a:rPr>
+              <a:t>연산만 사용 </a:t>
+            </a:r>
+            <a:r>
+              <a:rPr lang="en-US" altLang="ko-KR" sz="1600">
+                <a:solidFill>
+                  <a:schemeClr val="tx1"/>
+                </a:solidFill>
+                <a:latin typeface="페이퍼로지 4 Regular" charset="-127"/>
+                <a:ea typeface="페이퍼로지 4 Regular" charset="-127"/>
+                <a:cs typeface="Montserrat SemiBold"/>
+                <a:sym typeface="Wingdings" panose="05000000000000000000" pitchFamily="2" charset="2"/>
+              </a:rPr>
+              <a:t> </a:t>
+            </a:r>
+            <a:r>
+              <a:rPr lang="ko-KR" altLang="en-US" sz="1600">
+                <a:solidFill>
+                  <a:schemeClr val="tx1"/>
+                </a:solidFill>
+                <a:latin typeface="페이퍼로지 4 Regular" charset="-127"/>
+                <a:ea typeface="페이퍼로지 4 Regular" charset="-127"/>
+                <a:cs typeface="Montserrat SemiBold"/>
+                <a:sym typeface="Wingdings" panose="05000000000000000000" pitchFamily="2" charset="2"/>
+              </a:rPr>
+              <a:t>입력값 </a:t>
+            </a:r>
+            <a:r>
+              <a:rPr lang="en-US" altLang="ko-KR" sz="1600">
+                <a:solidFill>
+                  <a:schemeClr val="tx1"/>
+                </a:solidFill>
+                <a:latin typeface="페이퍼로지 4 Regular" charset="-127"/>
+                <a:ea typeface="페이퍼로지 4 Regular" charset="-127"/>
+                <a:cs typeface="Montserrat SemiBold"/>
+                <a:sym typeface="Wingdings" panose="05000000000000000000" pitchFamily="2" charset="2"/>
+              </a:rPr>
+              <a:t>	             </a:t>
+            </a:r>
+            <a:r>
+              <a:rPr lang="ko-KR" altLang="en-US" sz="1600">
+                <a:solidFill>
+                  <a:schemeClr val="tx1"/>
+                </a:solidFill>
+                <a:latin typeface="페이퍼로지 4 Regular" charset="-127"/>
+                <a:ea typeface="페이퍼로지 4 Regular" charset="-127"/>
+                <a:cs typeface="Montserrat SemiBold"/>
+                <a:sym typeface="Wingdings" panose="05000000000000000000" pitchFamily="2" charset="2"/>
+              </a:rPr>
+              <a:t>상관없이 일정 </a:t>
+            </a:r>
+            <a:endParaRPr lang="en-US" altLang="ko-KR" sz="1600">
+              <a:solidFill>
+                <a:schemeClr val="tx1"/>
+              </a:solidFill>
+              <a:latin typeface="페이퍼로지 4 Regular" charset="-127"/>
+              <a:ea typeface="페이퍼로지 4 Regular" charset="-127"/>
+              <a:cs typeface="Montserrat SemiBold"/>
+              <a:sym typeface="Wingdings" panose="05000000000000000000" pitchFamily="2" charset="2"/>
+            </a:endParaRPr>
+          </a:p>
+        </p:txBody>
+      </p:sp>
+      <p:sp>
+        <p:nvSpPr>
+          <p:cNvPr id="170" name="Google Shape;170;p19">
+            <a:extLst>
+              <a:ext uri="{FF2B5EF4-FFF2-40B4-BE49-F238E27FC236}">
+                <a16:creationId xmlns:a16="http://schemas.microsoft.com/office/drawing/2014/main" id="{8F25AA09-9B2F-361C-D15E-CBDC74879FC7}"/>
+              </a:ext>
+            </a:extLst>
+          </p:cNvPr>
+          <p:cNvSpPr txBox="1">
+            <a:spLocks noGrp="1"/>
+          </p:cNvSpPr>
+          <p:nvPr>
+            <p:ph type="title"/>
+          </p:nvPr>
+        </p:nvSpPr>
+        <p:spPr>
+          <a:xfrm>
+            <a:off x="452550" y="121018"/>
+            <a:ext cx="8238900" cy="561600"/>
+          </a:xfrm>
+          <a:prstGeom prst="rect">
+            <a:avLst/>
+          </a:prstGeom>
+          <a:ln>
+            <a:noFill/>
+          </a:ln>
+        </p:spPr>
+        <p:txBody>
+          <a:bodyPr spcFirstLastPara="1" wrap="square" lIns="91425" tIns="91425" rIns="91425" bIns="91425" anchor="t" anchorCtr="0">
+            <a:noAutofit/>
+          </a:bodyPr>
+          <a:lstStyle/>
+          <a:p>
+            <a:pPr marL="0" lvl="0" indent="0" algn="ctr" rtl="0">
+              <a:spcBef>
+                <a:spcPts val="0"/>
+              </a:spcBef>
+              <a:spcAft>
+                <a:spcPts val="0"/>
+              </a:spcAft>
+              <a:buNone/>
+            </a:pPr>
+            <a:r>
+              <a:rPr lang="en-US">
+                <a:latin typeface="페이퍼로지 6 SemiBold" pitchFamily="2" charset="-127"/>
+                <a:ea typeface="페이퍼로지 6 SemiBold" pitchFamily="2" charset="-127"/>
+              </a:rPr>
+              <a:t>ChaCha20-Poly1305 </a:t>
+            </a:r>
+            <a:endParaRPr dirty="0">
+              <a:latin typeface="페이퍼로지 6 SemiBold" pitchFamily="2" charset="-127"/>
+              <a:ea typeface="페이퍼로지 6 SemiBold" pitchFamily="2" charset="-127"/>
+            </a:endParaRPr>
+          </a:p>
+        </p:txBody>
+      </p:sp>
+      <p:cxnSp>
+        <p:nvCxnSpPr>
+          <p:cNvPr id="3" name="직선 연결선 2">
+            <a:extLst>
+              <a:ext uri="{FF2B5EF4-FFF2-40B4-BE49-F238E27FC236}">
+                <a16:creationId xmlns:a16="http://schemas.microsoft.com/office/drawing/2014/main" id="{9F8ADE53-CAAF-B997-6134-9F040731C6EC}"/>
+              </a:ext>
+            </a:extLst>
+          </p:cNvPr>
+          <p:cNvCxnSpPr/>
+          <p:nvPr/>
+        </p:nvCxnSpPr>
+        <p:spPr>
+          <a:xfrm>
+            <a:off x="387275" y="763285"/>
+            <a:ext cx="8240358" cy="0"/>
+          </a:xfrm>
+          <a:prstGeom prst="line">
+            <a:avLst/>
+          </a:prstGeom>
+          <a:ln w="38100">
+            <a:solidFill>
+              <a:srgbClr val="51EEBC"/>
+            </a:solidFill>
+          </a:ln>
+        </p:spPr>
+        <p:style>
+          <a:lnRef idx="1">
+            <a:schemeClr val="accent1"/>
+          </a:lnRef>
+          <a:fillRef idx="0">
+            <a:schemeClr val="accent1"/>
+          </a:fillRef>
+          <a:effectRef idx="0">
+            <a:schemeClr val="accent1"/>
+          </a:effectRef>
+          <a:fontRef idx="minor">
+            <a:schemeClr val="tx1"/>
+          </a:fontRef>
+        </p:style>
+      </p:cxnSp>
+    </p:spTree>
+    <p:extLst>
+      <p:ext uri="{BB962C8B-B14F-4D97-AF65-F5344CB8AC3E}">
+        <p14:creationId xmlns:p14="http://schemas.microsoft.com/office/powerpoint/2010/main" val="4216018717"/>
+      </p:ext>
+    </p:extLst>
+  </p:cSld>
+  <p:clrMapOvr>
+    <a:masterClrMapping/>
+  </p:clrMapOvr>
+</p:sld>
+</file>
+
+<file path=ppt/slides/slide2.xml><?xml version="1.0" encoding="utf-8"?>
+<p:sld xmlns:a="http://schemas.openxmlformats.org/drawingml/2006/main" xmlns:r="http://schemas.openxmlformats.org/officeDocument/2006/relationships" xmlns:p="http://schemas.openxmlformats.org/presentationml/2006/main">
+  <p:cSld>
+    <p:spTree>
+      <p:nvGrpSpPr>
+        <p:cNvPr id="1" name="Shape 167">
+          <a:extLst>
+            <a:ext uri="{FF2B5EF4-FFF2-40B4-BE49-F238E27FC236}">
+              <a16:creationId xmlns:a16="http://schemas.microsoft.com/office/drawing/2014/main" id="{24ACEF20-67BF-C1EF-810A-AB2F4435178D}"/>
+            </a:ext>
+          </a:extLst>
+        </p:cNvPr>
+        <p:cNvGrpSpPr/>
+        <p:nvPr/>
+      </p:nvGrpSpPr>
+      <p:grpSpPr>
+        <a:xfrm>
+          <a:off x="0" y="0"/>
+          <a:ext cx="0" cy="0"/>
+          <a:chOff x="0" y="0"/>
+          <a:chExt cx="0" cy="0"/>
+        </a:xfrm>
+      </p:grpSpPr>
+      <p:sp>
+        <p:nvSpPr>
+          <p:cNvPr id="169" name="Google Shape;169;p19">
+            <a:extLst>
+              <a:ext uri="{FF2B5EF4-FFF2-40B4-BE49-F238E27FC236}">
+                <a16:creationId xmlns:a16="http://schemas.microsoft.com/office/drawing/2014/main" id="{83B6B331-BFD3-43AA-16E7-0F49E57F059F}"/>
+              </a:ext>
+            </a:extLst>
+          </p:cNvPr>
+          <p:cNvSpPr txBox="1"/>
+          <p:nvPr/>
+        </p:nvSpPr>
+        <p:spPr>
+          <a:xfrm flipH="1">
+            <a:off x="452550" y="885617"/>
+            <a:ext cx="8238900" cy="4136865"/>
+          </a:xfrm>
+          <a:prstGeom prst="rect">
+            <a:avLst/>
+          </a:prstGeom>
+          <a:noFill/>
+          <a:ln>
+            <a:noFill/>
+          </a:ln>
+        </p:spPr>
+        <p:txBody>
+          <a:bodyPr spcFirstLastPara="1" wrap="square" lIns="91425" tIns="45700" rIns="91425" bIns="45700" anchor="t" anchorCtr="0">
+            <a:noAutofit/>
+          </a:bodyPr>
+          <a:lstStyle/>
+          <a:p>
+            <a:pPr marL="285750" marR="0" lvl="0" indent="-285750" algn="l" rtl="0">
+              <a:lnSpc>
+                <a:spcPct val="100000"/>
+              </a:lnSpc>
+              <a:spcBef>
+                <a:spcPts val="0"/>
+              </a:spcBef>
+              <a:spcAft>
+                <a:spcPts val="0"/>
+              </a:spcAft>
+              <a:buClr>
+                <a:srgbClr val="000000"/>
+              </a:buClr>
+              <a:buSzPts val="1600"/>
+              <a:buFont typeface="Arial" panose="020B0604020202020204" pitchFamily="34" charset="0"/>
+              <a:buChar char="•"/>
+            </a:pPr>
+            <a:r>
+              <a:rPr lang="ko-KR" altLang="en-US" sz="1800">
+                <a:solidFill>
+                  <a:schemeClr val="dk1"/>
+                </a:solidFill>
+                <a:latin typeface="페이퍼로지 4 Regular" charset="-127"/>
+                <a:ea typeface="페이퍼로지 4 Regular" charset="-127"/>
+                <a:cs typeface="Montserrat SemiBold"/>
+                <a:sym typeface="Montserrat SemiBold"/>
+              </a:rPr>
+              <a:t>해시가 무엇인지</a:t>
+            </a:r>
+            <a:endParaRPr lang="en-US" altLang="ko-KR" sz="1800">
+              <a:solidFill>
+                <a:schemeClr val="dk1"/>
+              </a:solidFill>
+              <a:latin typeface="페이퍼로지 4 Regular" charset="-127"/>
+              <a:ea typeface="페이퍼로지 4 Regular" charset="-127"/>
+              <a:cs typeface="Montserrat SemiBold"/>
+              <a:sym typeface="Montserrat SemiBold"/>
+            </a:endParaRPr>
+          </a:p>
+          <a:p>
+            <a:pPr marL="285750" marR="0" lvl="0" indent="-285750" algn="l" rtl="0">
+              <a:lnSpc>
+                <a:spcPct val="100000"/>
+              </a:lnSpc>
+              <a:spcBef>
+                <a:spcPts val="0"/>
+              </a:spcBef>
+              <a:spcAft>
+                <a:spcPts val="0"/>
+              </a:spcAft>
+              <a:buClr>
+                <a:srgbClr val="000000"/>
+              </a:buClr>
+              <a:buSzPts val="1600"/>
+              <a:buFont typeface="Arial" panose="020B0604020202020204" pitchFamily="34" charset="0"/>
+              <a:buChar char="•"/>
+            </a:pPr>
+            <a:endParaRPr lang="en-US" altLang="ko-KR" sz="1800">
+              <a:solidFill>
+                <a:schemeClr val="dk1"/>
+              </a:solidFill>
+              <a:latin typeface="페이퍼로지 4 Regular" charset="-127"/>
+              <a:ea typeface="페이퍼로지 4 Regular" charset="-127"/>
+              <a:cs typeface="Montserrat SemiBold"/>
+              <a:sym typeface="Montserrat SemiBold"/>
+            </a:endParaRPr>
+          </a:p>
+          <a:p>
+            <a:pPr marL="285750" marR="0" lvl="0" indent="-285750" algn="l" rtl="0">
+              <a:lnSpc>
+                <a:spcPct val="100000"/>
+              </a:lnSpc>
+              <a:spcBef>
+                <a:spcPts val="0"/>
+              </a:spcBef>
+              <a:spcAft>
+                <a:spcPts val="0"/>
+              </a:spcAft>
+              <a:buClr>
+                <a:srgbClr val="000000"/>
+              </a:buClr>
+              <a:buSzPts val="1600"/>
+              <a:buFont typeface="Arial" panose="020B0604020202020204" pitchFamily="34" charset="0"/>
+              <a:buChar char="•"/>
+            </a:pPr>
+            <a:r>
+              <a:rPr lang="ko-KR" altLang="en-US" sz="1800">
+                <a:solidFill>
+                  <a:schemeClr val="dk1"/>
+                </a:solidFill>
+                <a:latin typeface="페이퍼로지 4 Regular" charset="-127"/>
+                <a:ea typeface="페이퍼로지 4 Regular" charset="-127"/>
+                <a:cs typeface="Montserrat SemiBold"/>
+                <a:sym typeface="Montserrat SemiBold"/>
+              </a:rPr>
+              <a:t>무엇이 있는지 </a:t>
+            </a:r>
+            <a:r>
+              <a:rPr lang="en-US" altLang="ko-KR" sz="1800">
+                <a:solidFill>
+                  <a:schemeClr val="dk1"/>
+                </a:solidFill>
+                <a:latin typeface="페이퍼로지 4 Regular" charset="-127"/>
+                <a:ea typeface="페이퍼로지 4 Regular" charset="-127"/>
+                <a:cs typeface="Montserrat SemiBold"/>
+                <a:sym typeface="Montserrat SemiBold"/>
+              </a:rPr>
+              <a:t>(</a:t>
+            </a:r>
+            <a:r>
+              <a:rPr lang="ko-KR" altLang="en-US" sz="1800">
+                <a:solidFill>
+                  <a:schemeClr val="dk1"/>
+                </a:solidFill>
+                <a:latin typeface="페이퍼로지 4 Regular" charset="-127"/>
+                <a:ea typeface="페이퍼로지 4 Regular" charset="-127"/>
+                <a:cs typeface="Montserrat SemiBold"/>
+                <a:sym typeface="Montserrat SemiBold"/>
+              </a:rPr>
+              <a:t>차이는 무엇인지</a:t>
+            </a:r>
+            <a:r>
+              <a:rPr lang="en-US" altLang="ko-KR" sz="1800">
+                <a:solidFill>
+                  <a:schemeClr val="dk1"/>
+                </a:solidFill>
+                <a:latin typeface="페이퍼로지 4 Regular" charset="-127"/>
+                <a:ea typeface="페이퍼로지 4 Regular" charset="-127"/>
+                <a:cs typeface="Montserrat SemiBold"/>
+                <a:sym typeface="Montserrat SemiBold"/>
+              </a:rPr>
+              <a:t>)</a:t>
+            </a:r>
+          </a:p>
+          <a:p>
+            <a:pPr marL="285750" marR="0" lvl="0" indent="-285750" algn="l" rtl="0">
+              <a:lnSpc>
+                <a:spcPct val="100000"/>
+              </a:lnSpc>
+              <a:spcBef>
+                <a:spcPts val="0"/>
+              </a:spcBef>
+              <a:spcAft>
+                <a:spcPts val="0"/>
+              </a:spcAft>
+              <a:buClr>
+                <a:srgbClr val="000000"/>
+              </a:buClr>
+              <a:buSzPts val="1600"/>
+              <a:buFont typeface="Arial" panose="020B0604020202020204" pitchFamily="34" charset="0"/>
+              <a:buChar char="•"/>
+            </a:pPr>
+            <a:endParaRPr lang="en-US" altLang="ko-KR" sz="1800">
+              <a:solidFill>
+                <a:schemeClr val="dk1"/>
+              </a:solidFill>
+              <a:latin typeface="페이퍼로지 4 Regular" charset="-127"/>
+              <a:ea typeface="페이퍼로지 4 Regular" charset="-127"/>
+              <a:cs typeface="Montserrat SemiBold"/>
+              <a:sym typeface="Montserrat SemiBold"/>
+            </a:endParaRPr>
+          </a:p>
+          <a:p>
+            <a:pPr marL="285750" marR="0" lvl="0" indent="-285750" algn="l" rtl="0">
+              <a:lnSpc>
+                <a:spcPct val="100000"/>
+              </a:lnSpc>
+              <a:spcBef>
+                <a:spcPts val="0"/>
+              </a:spcBef>
+              <a:spcAft>
+                <a:spcPts val="0"/>
+              </a:spcAft>
+              <a:buClr>
+                <a:srgbClr val="000000"/>
+              </a:buClr>
+              <a:buSzPts val="1600"/>
+              <a:buFont typeface="Arial" panose="020B0604020202020204" pitchFamily="34" charset="0"/>
+              <a:buChar char="•"/>
+            </a:pPr>
+            <a:r>
+              <a:rPr lang="ko-KR" altLang="en-US" sz="1800">
+                <a:solidFill>
+                  <a:schemeClr val="dk1"/>
+                </a:solidFill>
+                <a:latin typeface="페이퍼로지 4 Regular" charset="-127"/>
+                <a:ea typeface="페이퍼로지 4 Regular" charset="-127"/>
+                <a:cs typeface="Montserrat SemiBold"/>
+                <a:sym typeface="Montserrat SemiBold"/>
+              </a:rPr>
+              <a:t>어디에 사용되는지</a:t>
+            </a:r>
+            <a:endParaRPr lang="en-US" altLang="ko-KR" sz="1800">
+              <a:solidFill>
+                <a:schemeClr val="dk1"/>
+              </a:solidFill>
+              <a:latin typeface="페이퍼로지 4 Regular" charset="-127"/>
+              <a:ea typeface="페이퍼로지 4 Regular" charset="-127"/>
+              <a:cs typeface="Montserrat SemiBold"/>
+              <a:sym typeface="Montserrat SemiBold"/>
+            </a:endParaRPr>
+          </a:p>
+          <a:p>
+            <a:pPr marL="285750" marR="0" lvl="0" indent="-285750" algn="l" rtl="0">
+              <a:lnSpc>
+                <a:spcPct val="100000"/>
+              </a:lnSpc>
+              <a:spcBef>
+                <a:spcPts val="0"/>
+              </a:spcBef>
+              <a:spcAft>
+                <a:spcPts val="0"/>
+              </a:spcAft>
+              <a:buClr>
+                <a:srgbClr val="000000"/>
+              </a:buClr>
+              <a:buSzPts val="1600"/>
+              <a:buFont typeface="Arial" panose="020B0604020202020204" pitchFamily="34" charset="0"/>
+              <a:buChar char="•"/>
+            </a:pPr>
+            <a:endParaRPr lang="en-US" altLang="ko-KR" sz="1800">
+              <a:solidFill>
+                <a:schemeClr val="dk1"/>
+              </a:solidFill>
+              <a:latin typeface="페이퍼로지 4 Regular" charset="-127"/>
+              <a:ea typeface="페이퍼로지 4 Regular" charset="-127"/>
+              <a:cs typeface="Montserrat SemiBold"/>
+              <a:sym typeface="Montserrat SemiBold"/>
+            </a:endParaRPr>
+          </a:p>
+          <a:p>
+            <a:pPr marL="285750" marR="0" lvl="0" indent="-285750" algn="l" rtl="0">
+              <a:lnSpc>
+                <a:spcPct val="100000"/>
+              </a:lnSpc>
+              <a:spcBef>
+                <a:spcPts val="0"/>
+              </a:spcBef>
+              <a:spcAft>
+                <a:spcPts val="0"/>
+              </a:spcAft>
+              <a:buClr>
+                <a:srgbClr val="000000"/>
+              </a:buClr>
+              <a:buSzPts val="1600"/>
+              <a:buFont typeface="Arial" panose="020B0604020202020204" pitchFamily="34" charset="0"/>
+              <a:buChar char="•"/>
+            </a:pPr>
+            <a:r>
+              <a:rPr lang="ko-KR" altLang="en-US" sz="1800">
+                <a:solidFill>
+                  <a:schemeClr val="dk1"/>
+                </a:solidFill>
+                <a:latin typeface="페이퍼로지 4 Regular" charset="-127"/>
+                <a:ea typeface="페이퍼로지 4 Regular" charset="-127"/>
+                <a:cs typeface="Montserrat SemiBold"/>
+                <a:sym typeface="Montserrat SemiBold"/>
+              </a:rPr>
+              <a:t>내용을 찾아보면서 생긴 의문에 대한 탐색</a:t>
+            </a:r>
+            <a:r>
+              <a:rPr lang="en-US" altLang="ko-KR" sz="1800">
+                <a:solidFill>
+                  <a:schemeClr val="dk1"/>
+                </a:solidFill>
+                <a:latin typeface="페이퍼로지 4 Regular" charset="-127"/>
+                <a:ea typeface="페이퍼로지 4 Regular" charset="-127"/>
+                <a:cs typeface="Montserrat SemiBold"/>
+                <a:sym typeface="Montserrat SemiBold"/>
+              </a:rPr>
+              <a:t>..</a:t>
+            </a:r>
+          </a:p>
+          <a:p>
+            <a:pPr marL="285750" marR="0" lvl="0" indent="-285750" algn="l" rtl="0">
+              <a:lnSpc>
+                <a:spcPct val="100000"/>
+              </a:lnSpc>
+              <a:spcBef>
+                <a:spcPts val="0"/>
+              </a:spcBef>
+              <a:spcAft>
+                <a:spcPts val="0"/>
+              </a:spcAft>
+              <a:buClr>
+                <a:srgbClr val="000000"/>
+              </a:buClr>
+              <a:buSzPts val="1600"/>
+              <a:buFont typeface="Arial" panose="020B0604020202020204" pitchFamily="34" charset="0"/>
+              <a:buChar char="•"/>
+            </a:pPr>
+            <a:endParaRPr lang="en-US" altLang="ko-KR" sz="800">
+              <a:solidFill>
+                <a:schemeClr val="dk1"/>
+              </a:solidFill>
+              <a:latin typeface="페이퍼로지 4 Regular" charset="-127"/>
+              <a:ea typeface="페이퍼로지 4 Regular" charset="-127"/>
+              <a:cs typeface="Montserrat SemiBold"/>
+              <a:sym typeface="Montserrat SemiBold"/>
+            </a:endParaRPr>
+          </a:p>
+          <a:p>
+            <a:pPr marL="285750" lvl="2" indent="346075">
+              <a:buSzPts val="1600"/>
+              <a:buFont typeface="Arial" panose="020B0604020202020204" pitchFamily="34" charset="0"/>
+              <a:buChar char="•"/>
+            </a:pPr>
+            <a:r>
+              <a:rPr lang="en-US" altLang="ko-KR" sz="1600">
+                <a:solidFill>
+                  <a:schemeClr val="tx1">
+                    <a:lumMod val="65000"/>
+                    <a:lumOff val="35000"/>
+                  </a:schemeClr>
+                </a:solidFill>
+                <a:latin typeface="페이퍼로지 4 Regular" charset="-127"/>
+                <a:ea typeface="페이퍼로지 4 Regular" charset="-127"/>
+                <a:cs typeface="Montserrat SemiBold"/>
+                <a:sym typeface="Montserrat SemiBold"/>
+              </a:rPr>
+              <a:t>CheckSum?</a:t>
+            </a:r>
+          </a:p>
+          <a:p>
+            <a:pPr marL="285750" lvl="2" indent="346075">
+              <a:buSzPts val="1600"/>
+              <a:buFont typeface="Arial" panose="020B0604020202020204" pitchFamily="34" charset="0"/>
+              <a:buChar char="•"/>
+            </a:pPr>
+            <a:r>
+              <a:rPr lang="en-US" altLang="ko-KR" sz="1600">
+                <a:solidFill>
+                  <a:schemeClr val="tx1">
+                    <a:lumMod val="65000"/>
+                    <a:lumOff val="35000"/>
+                  </a:schemeClr>
+                </a:solidFill>
+                <a:latin typeface="페이퍼로지 4 Regular" charset="-127"/>
+                <a:ea typeface="페이퍼로지 4 Regular" charset="-127"/>
+                <a:cs typeface="Montserrat SemiBold"/>
+                <a:sym typeface="Montserrat SemiBold"/>
+              </a:rPr>
+              <a:t>AES-256-GCM </a:t>
+            </a:r>
+          </a:p>
+          <a:p>
+            <a:pPr marL="285750" lvl="2" indent="346075">
+              <a:buSzPts val="1600"/>
+              <a:buFont typeface="Arial" panose="020B0604020202020204" pitchFamily="34" charset="0"/>
+              <a:buChar char="•"/>
+            </a:pPr>
+            <a:r>
+              <a:rPr lang="en-US" altLang="ko-KR" sz="1600">
+                <a:solidFill>
+                  <a:schemeClr val="tx1">
+                    <a:lumMod val="65000"/>
+                    <a:lumOff val="35000"/>
+                  </a:schemeClr>
+                </a:solidFill>
+                <a:latin typeface="페이퍼로지 4 Regular" charset="-127"/>
+                <a:ea typeface="페이퍼로지 4 Regular" charset="-127"/>
+                <a:cs typeface="Montserrat SemiBold"/>
+                <a:sym typeface="Montserrat SemiBold"/>
+              </a:rPr>
+              <a:t>Google Chrome password_value Encryption</a:t>
+            </a:r>
+          </a:p>
+          <a:p>
+            <a:pPr marL="285750" lvl="2">
+              <a:buSzPts val="1600"/>
+            </a:pPr>
+            <a:endParaRPr lang="en-US" altLang="ko-KR" sz="1600">
+              <a:solidFill>
+                <a:schemeClr val="tx1">
+                  <a:lumMod val="65000"/>
+                  <a:lumOff val="35000"/>
+                </a:schemeClr>
+              </a:solidFill>
+              <a:latin typeface="페이퍼로지 4 Regular" charset="-127"/>
+              <a:ea typeface="페이퍼로지 4 Regular" charset="-127"/>
+              <a:cs typeface="Montserrat SemiBold"/>
+              <a:sym typeface="Montserrat SemiBold"/>
+            </a:endParaRPr>
+          </a:p>
+          <a:p>
+            <a:pPr marL="285750" lvl="2" indent="157163">
+              <a:buSzPts val="1600"/>
+              <a:buFont typeface="Arial" panose="020B0604020202020204" pitchFamily="34" charset="0"/>
+              <a:buChar char="•"/>
+            </a:pPr>
+            <a:endParaRPr lang="en-US" altLang="ko-KR" sz="1800" dirty="0">
+              <a:solidFill>
+                <a:schemeClr val="dk1"/>
+              </a:solidFill>
+              <a:latin typeface="페이퍼로지 4 Regular" charset="-127"/>
+              <a:ea typeface="페이퍼로지 4 Regular" charset="-127"/>
+              <a:cs typeface="Montserrat SemiBold"/>
+              <a:sym typeface="Montserrat SemiBold"/>
+            </a:endParaRPr>
+          </a:p>
+        </p:txBody>
+      </p:sp>
+      <p:sp>
+        <p:nvSpPr>
+          <p:cNvPr id="170" name="Google Shape;170;p19">
+            <a:extLst>
+              <a:ext uri="{FF2B5EF4-FFF2-40B4-BE49-F238E27FC236}">
+                <a16:creationId xmlns:a16="http://schemas.microsoft.com/office/drawing/2014/main" id="{1AFE6C03-798D-CD87-1C91-C47CCD364607}"/>
+              </a:ext>
+            </a:extLst>
+          </p:cNvPr>
+          <p:cNvSpPr txBox="1">
+            <a:spLocks noGrp="1"/>
+          </p:cNvSpPr>
+          <p:nvPr>
+            <p:ph type="title"/>
+          </p:nvPr>
+        </p:nvSpPr>
+        <p:spPr>
+          <a:xfrm>
+            <a:off x="452550" y="121018"/>
+            <a:ext cx="8238900" cy="561600"/>
+          </a:xfrm>
+          <a:prstGeom prst="rect">
+            <a:avLst/>
+          </a:prstGeom>
+          <a:ln>
+            <a:noFill/>
+          </a:ln>
+        </p:spPr>
+        <p:txBody>
+          <a:bodyPr spcFirstLastPara="1" wrap="square" lIns="91425" tIns="91425" rIns="91425" bIns="91425" anchor="t" anchorCtr="0">
+            <a:noAutofit/>
+          </a:bodyPr>
+          <a:lstStyle/>
+          <a:p>
+            <a:pPr lvl="0"/>
+            <a:r>
+              <a:rPr lang="en" altLang="ko-KR">
+                <a:latin typeface="페이퍼로지 6 SemiBold" pitchFamily="2" charset="-127"/>
+                <a:ea typeface="페이퍼로지 6 SemiBold" pitchFamily="2" charset="-127"/>
+              </a:rPr>
+              <a:t>Overview</a:t>
+            </a:r>
+            <a:endParaRPr dirty="0"/>
+          </a:p>
+        </p:txBody>
+      </p:sp>
+      <p:cxnSp>
+        <p:nvCxnSpPr>
+          <p:cNvPr id="3" name="직선 연결선 2">
+            <a:extLst>
+              <a:ext uri="{FF2B5EF4-FFF2-40B4-BE49-F238E27FC236}">
+                <a16:creationId xmlns:a16="http://schemas.microsoft.com/office/drawing/2014/main" id="{2F9182BB-CE65-7A7F-D6FF-F08D370ACE56}"/>
+              </a:ext>
+            </a:extLst>
+          </p:cNvPr>
+          <p:cNvCxnSpPr/>
+          <p:nvPr/>
+        </p:nvCxnSpPr>
+        <p:spPr>
+          <a:xfrm>
+            <a:off x="387275" y="763285"/>
+            <a:ext cx="8240358" cy="0"/>
+          </a:xfrm>
+          <a:prstGeom prst="line">
+            <a:avLst/>
+          </a:prstGeom>
+          <a:ln w="38100">
+            <a:solidFill>
+              <a:srgbClr val="51EEBC"/>
+            </a:solidFill>
+          </a:ln>
+        </p:spPr>
+        <p:style>
+          <a:lnRef idx="1">
+            <a:schemeClr val="accent1"/>
+          </a:lnRef>
+          <a:fillRef idx="0">
+            <a:schemeClr val="accent1"/>
+          </a:fillRef>
+          <a:effectRef idx="0">
+            <a:schemeClr val="accent1"/>
+          </a:effectRef>
+          <a:fontRef idx="minor">
+            <a:schemeClr val="tx1"/>
+          </a:fontRef>
+        </p:style>
+      </p:cxnSp>
+    </p:spTree>
+    <p:extLst>
+      <p:ext uri="{BB962C8B-B14F-4D97-AF65-F5344CB8AC3E}">
+        <p14:creationId xmlns:p14="http://schemas.microsoft.com/office/powerpoint/2010/main" val="2338792561"/>
+      </p:ext>
+    </p:extLst>
+  </p:cSld>
+  <p:clrMapOvr>
+    <a:masterClrMapping/>
+  </p:clrMapOvr>
+</p:sld>
+</file>
+
+<file path=ppt/slides/slide20.xml><?xml version="1.0" encoding="utf-8"?>
+<p:sld xmlns:a="http://schemas.openxmlformats.org/drawingml/2006/main" xmlns:r="http://schemas.openxmlformats.org/officeDocument/2006/relationships" xmlns:p="http://schemas.openxmlformats.org/presentationml/2006/main">
+  <p:cSld>
+    <p:spTree>
+      <p:nvGrpSpPr>
+        <p:cNvPr id="1" name="Shape 167">
+          <a:extLst>
+            <a:ext uri="{FF2B5EF4-FFF2-40B4-BE49-F238E27FC236}">
+              <a16:creationId xmlns:a16="http://schemas.microsoft.com/office/drawing/2014/main" id="{DA1E38D4-A56F-21A5-FCF5-BD918760316D}"/>
+            </a:ext>
+          </a:extLst>
+        </p:cNvPr>
+        <p:cNvGrpSpPr/>
+        <p:nvPr/>
+      </p:nvGrpSpPr>
+      <p:grpSpPr>
+        <a:xfrm>
+          <a:off x="0" y="0"/>
+          <a:ext cx="0" cy="0"/>
+          <a:chOff x="0" y="0"/>
+          <a:chExt cx="0" cy="0"/>
+        </a:xfrm>
+      </p:grpSpPr>
+      <mc:AlternateContent xmlns:mc="http://schemas.openxmlformats.org/markup-compatibility/2006">
+        <mc:Choice xmlns:a14="http://schemas.microsoft.com/office/drawing/2010/main" Requires="a14">
+          <p:sp>
+            <p:nvSpPr>
+              <p:cNvPr id="169" name="Google Shape;169;p19">
+                <a:extLst>
+                  <a:ext uri="{FF2B5EF4-FFF2-40B4-BE49-F238E27FC236}">
+                    <a16:creationId xmlns:a16="http://schemas.microsoft.com/office/drawing/2014/main" id="{21EB4E01-4041-9345-8ADB-91C9897A8554}"/>
+                  </a:ext>
+                </a:extLst>
+              </p:cNvPr>
+              <p:cNvSpPr txBox="1"/>
+              <p:nvPr/>
+            </p:nvSpPr>
+            <p:spPr>
+              <a:xfrm flipH="1">
+                <a:off x="452550" y="885617"/>
+                <a:ext cx="8238900" cy="4136865"/>
+              </a:xfrm>
+              <a:prstGeom prst="rect">
+                <a:avLst/>
+              </a:prstGeom>
+              <a:noFill/>
+              <a:ln>
+                <a:noFill/>
+              </a:ln>
+            </p:spPr>
+            <p:txBody>
+              <a:bodyPr spcFirstLastPara="1" wrap="square" lIns="91425" tIns="45700" rIns="91425" bIns="45700" anchor="t" anchorCtr="0">
+                <a:noAutofit/>
+              </a:bodyPr>
+              <a:lstStyle/>
+              <a:p>
+                <a:pPr marL="185738" marR="0" lvl="0" indent="-185738" algn="l" rtl="0">
+                  <a:lnSpc>
+                    <a:spcPct val="100000"/>
+                  </a:lnSpc>
+                  <a:spcBef>
+                    <a:spcPts val="0"/>
+                  </a:spcBef>
+                  <a:spcAft>
+                    <a:spcPts val="0"/>
+                  </a:spcAft>
+                  <a:buClr>
+                    <a:srgbClr val="000000"/>
+                  </a:buClr>
+                  <a:buSzPts val="1600"/>
+                  <a:buFont typeface="Arial" panose="020B0604020202020204" pitchFamily="34" charset="0"/>
+                  <a:buChar char="•"/>
+                </a:pPr>
+                <a:r>
+                  <a:rPr lang="en-US" altLang="ko-KR" sz="1800">
+                    <a:solidFill>
+                      <a:schemeClr val="accent3">
+                        <a:lumMod val="50000"/>
+                      </a:schemeClr>
+                    </a:solidFill>
+                    <a:latin typeface="페이퍼로지 4 Regular" charset="-127"/>
+                    <a:ea typeface="페이퍼로지 4 Regular" charset="-127"/>
+                    <a:cs typeface="Montserrat SemiBold"/>
+                    <a:sym typeface="Wingdings" panose="05000000000000000000" pitchFamily="2" charset="2"/>
+                  </a:rPr>
+                  <a:t>diff</a:t>
+                </a:r>
+                <a:r>
+                  <a:rPr lang="ko-KR" altLang="en-US" sz="1800">
+                    <a:solidFill>
+                      <a:schemeClr val="accent3">
+                        <a:lumMod val="50000"/>
+                      </a:schemeClr>
+                    </a:solidFill>
+                    <a:latin typeface="페이퍼로지 4 Regular" charset="-127"/>
+                    <a:ea typeface="페이퍼로지 4 Regular" charset="-127"/>
+                    <a:cs typeface="Montserrat SemiBold"/>
+                    <a:sym typeface="Wingdings" panose="05000000000000000000" pitchFamily="2" charset="2"/>
+                  </a:rPr>
+                  <a:t> </a:t>
+                </a:r>
+                <a:r>
+                  <a:rPr lang="en-US" altLang="ko-KR" sz="1800">
+                    <a:solidFill>
+                      <a:schemeClr val="accent3">
+                        <a:lumMod val="50000"/>
+                      </a:schemeClr>
+                    </a:solidFill>
+                    <a:latin typeface="페이퍼로지 4 Regular" charset="-127"/>
+                    <a:ea typeface="페이퍼로지 4 Regular" charset="-127"/>
+                    <a:cs typeface="Montserrat SemiBold"/>
+                    <a:sym typeface="Wingdings" panose="05000000000000000000" pitchFamily="2" charset="2"/>
+                  </a:rPr>
+                  <a:t> </a:t>
+                </a:r>
+                <a:br>
+                  <a:rPr lang="en-US" altLang="ko-KR" sz="1800">
+                    <a:solidFill>
+                      <a:schemeClr val="tx1"/>
+                    </a:solidFill>
+                    <a:latin typeface="페이퍼로지 4 Regular" charset="-127"/>
+                    <a:ea typeface="페이퍼로지 4 Regular" charset="-127"/>
+                    <a:cs typeface="Montserrat SemiBold"/>
+                    <a:sym typeface="Wingdings" panose="05000000000000000000" pitchFamily="2" charset="2"/>
+                  </a:rPr>
+                </a:br>
+                <a:endParaRPr lang="en-US" altLang="ko-KR" sz="800">
+                  <a:solidFill>
+                    <a:schemeClr val="tx1"/>
+                  </a:solidFill>
+                  <a:latin typeface="페이퍼로지 4 Regular" charset="-127"/>
+                  <a:ea typeface="페이퍼로지 4 Regular" charset="-127"/>
+                  <a:cs typeface="Montserrat SemiBold"/>
+                  <a:sym typeface="Wingdings" panose="05000000000000000000" pitchFamily="2" charset="2"/>
+                </a:endParaRPr>
+              </a:p>
+              <a:p>
+                <a:pPr marR="0" lvl="0" algn="l" rtl="0">
+                  <a:lnSpc>
+                    <a:spcPct val="100000"/>
+                  </a:lnSpc>
+                  <a:spcBef>
+                    <a:spcPts val="0"/>
+                  </a:spcBef>
+                  <a:spcAft>
+                    <a:spcPts val="0"/>
+                  </a:spcAft>
+                  <a:buClr>
+                    <a:srgbClr val="000000"/>
+                  </a:buClr>
+                  <a:buSzPts val="1600"/>
+                </a:pPr>
+                <a:endParaRPr lang="en-US" altLang="ko-KR" sz="1800">
+                  <a:solidFill>
+                    <a:schemeClr val="tx1"/>
+                  </a:solidFill>
+                  <a:latin typeface="페이퍼로지 4 Regular" charset="-127"/>
+                  <a:ea typeface="페이퍼로지 4 Regular" charset="-127"/>
+                  <a:cs typeface="Montserrat SemiBold"/>
+                  <a:sym typeface="Wingdings" panose="05000000000000000000" pitchFamily="2" charset="2"/>
+                </a:endParaRPr>
+              </a:p>
+              <a:p>
+                <a:pPr marR="0" lvl="0" algn="l" rtl="0">
+                  <a:lnSpc>
+                    <a:spcPct val="100000"/>
+                  </a:lnSpc>
+                  <a:spcBef>
+                    <a:spcPts val="0"/>
+                  </a:spcBef>
+                  <a:spcAft>
+                    <a:spcPts val="0"/>
+                  </a:spcAft>
+                  <a:buClr>
+                    <a:srgbClr val="000000"/>
+                  </a:buClr>
+                  <a:buSzPts val="1600"/>
+                </a:pPr>
+                <a:endParaRPr lang="en-US" altLang="ko-KR" sz="1800">
+                  <a:solidFill>
+                    <a:schemeClr val="tx1"/>
+                  </a:solidFill>
+                  <a:latin typeface="페이퍼로지 4 Regular" charset="-127"/>
+                  <a:ea typeface="페이퍼로지 4 Regular" charset="-127"/>
+                  <a:cs typeface="Montserrat SemiBold"/>
+                  <a:sym typeface="Wingdings" panose="05000000000000000000" pitchFamily="2" charset="2"/>
+                </a:endParaRPr>
+              </a:p>
+              <a:p>
+                <a:pPr marR="0" lvl="0" algn="l" rtl="0">
+                  <a:lnSpc>
+                    <a:spcPct val="100000"/>
+                  </a:lnSpc>
+                  <a:spcBef>
+                    <a:spcPts val="0"/>
+                  </a:spcBef>
+                  <a:spcAft>
+                    <a:spcPts val="0"/>
+                  </a:spcAft>
+                  <a:buClr>
+                    <a:srgbClr val="000000"/>
+                  </a:buClr>
+                  <a:buSzPts val="1600"/>
+                </a:pPr>
+                <a:endParaRPr lang="en-US" altLang="ko-KR" sz="1800">
+                  <a:solidFill>
+                    <a:schemeClr val="tx1"/>
+                  </a:solidFill>
+                  <a:latin typeface="페이퍼로지 4 Regular" charset="-127"/>
+                  <a:ea typeface="페이퍼로지 4 Regular" charset="-127"/>
+                  <a:cs typeface="Montserrat SemiBold"/>
+                  <a:sym typeface="Wingdings" panose="05000000000000000000" pitchFamily="2" charset="2"/>
+                </a:endParaRPr>
+              </a:p>
+              <a:p>
+                <a:pPr marR="0" lvl="0" algn="l" rtl="0">
+                  <a:lnSpc>
+                    <a:spcPct val="100000"/>
+                  </a:lnSpc>
+                  <a:spcBef>
+                    <a:spcPts val="0"/>
+                  </a:spcBef>
+                  <a:spcAft>
+                    <a:spcPts val="0"/>
+                  </a:spcAft>
+                  <a:buClr>
+                    <a:srgbClr val="000000"/>
+                  </a:buClr>
+                  <a:buSzPts val="1600"/>
+                </a:pPr>
+                <a:endParaRPr lang="en-US" altLang="ko-KR" sz="1800">
+                  <a:solidFill>
+                    <a:schemeClr val="tx1"/>
+                  </a:solidFill>
+                  <a:latin typeface="페이퍼로지 4 Regular" charset="-127"/>
+                  <a:ea typeface="페이퍼로지 4 Regular" charset="-127"/>
+                  <a:cs typeface="Montserrat SemiBold"/>
+                  <a:sym typeface="Wingdings" panose="05000000000000000000" pitchFamily="2" charset="2"/>
+                </a:endParaRPr>
+              </a:p>
+              <a:p>
+                <a:pPr marR="0" lvl="0" algn="l" rtl="0">
+                  <a:lnSpc>
+                    <a:spcPct val="100000"/>
+                  </a:lnSpc>
+                  <a:spcBef>
+                    <a:spcPts val="0"/>
+                  </a:spcBef>
+                  <a:spcAft>
+                    <a:spcPts val="0"/>
+                  </a:spcAft>
+                  <a:buClr>
+                    <a:srgbClr val="000000"/>
+                  </a:buClr>
+                  <a:buSzPts val="1600"/>
+                </a:pPr>
+                <a:endParaRPr lang="en-US" altLang="ko-KR" sz="1800">
+                  <a:solidFill>
+                    <a:schemeClr val="tx1"/>
+                  </a:solidFill>
+                  <a:latin typeface="페이퍼로지 4 Regular" charset="-127"/>
+                  <a:ea typeface="페이퍼로지 4 Regular" charset="-127"/>
+                  <a:cs typeface="Montserrat SemiBold"/>
+                  <a:sym typeface="Wingdings" panose="05000000000000000000" pitchFamily="2" charset="2"/>
+                </a:endParaRPr>
+              </a:p>
+              <a:p>
+                <a:pPr marR="0" lvl="0" algn="l" rtl="0">
+                  <a:lnSpc>
+                    <a:spcPct val="100000"/>
+                  </a:lnSpc>
+                  <a:spcBef>
+                    <a:spcPts val="0"/>
+                  </a:spcBef>
+                  <a:spcAft>
+                    <a:spcPts val="0"/>
+                  </a:spcAft>
+                  <a:buClr>
+                    <a:srgbClr val="000000"/>
+                  </a:buClr>
+                  <a:buSzPts val="1600"/>
+                </a:pPr>
+                <a:endParaRPr lang="en-US" altLang="ko-KR" sz="1800">
+                  <a:solidFill>
+                    <a:schemeClr val="tx1"/>
+                  </a:solidFill>
+                  <a:latin typeface="페이퍼로지 4 Regular" charset="-127"/>
+                  <a:ea typeface="페이퍼로지 4 Regular" charset="-127"/>
+                  <a:cs typeface="Montserrat SemiBold"/>
+                  <a:sym typeface="Wingdings" panose="05000000000000000000" pitchFamily="2" charset="2"/>
+                </a:endParaRPr>
+              </a:p>
+              <a:p>
+                <a:pPr marR="0" lvl="0" algn="l" rtl="0">
+                  <a:lnSpc>
+                    <a:spcPct val="100000"/>
+                  </a:lnSpc>
+                  <a:spcBef>
+                    <a:spcPts val="0"/>
+                  </a:spcBef>
+                  <a:spcAft>
+                    <a:spcPts val="0"/>
+                  </a:spcAft>
+                  <a:buClr>
+                    <a:srgbClr val="000000"/>
+                  </a:buClr>
+                  <a:buSzPts val="1600"/>
+                </a:pPr>
+                <a:r>
+                  <a:rPr lang="en-US" altLang="ko-KR">
+                    <a:solidFill>
+                      <a:schemeClr val="accent3">
+                        <a:lumMod val="50000"/>
+                      </a:schemeClr>
+                    </a:solidFill>
+                    <a:latin typeface="페이퍼로지 4 Regular" charset="-127"/>
+                    <a:ea typeface="페이퍼로지 4 Regular" charset="-127"/>
+                    <a:cs typeface="Montserrat SemiBold"/>
+                    <a:sym typeface="Wingdings" panose="05000000000000000000" pitchFamily="2" charset="2"/>
+                  </a:rPr>
+                  <a:t>AuthTag </a:t>
+                </a:r>
+                <a:r>
+                  <a:rPr lang="ko-KR" altLang="en-US">
+                    <a:solidFill>
+                      <a:schemeClr val="accent3">
+                        <a:lumMod val="50000"/>
+                      </a:schemeClr>
+                    </a:solidFill>
+                    <a:latin typeface="페이퍼로지 4 Regular" charset="-127"/>
+                    <a:ea typeface="페이퍼로지 4 Regular" charset="-127"/>
+                    <a:cs typeface="Montserrat SemiBold"/>
+                    <a:sym typeface="Wingdings" panose="05000000000000000000" pitchFamily="2" charset="2"/>
+                  </a:rPr>
+                  <a:t>생성 방식 차이</a:t>
+                </a:r>
+                <a:br>
+                  <a:rPr lang="en-US" altLang="ko-KR">
+                    <a:solidFill>
+                      <a:schemeClr val="tx1"/>
+                    </a:solidFill>
+                    <a:latin typeface="페이퍼로지 4 Regular" charset="-127"/>
+                    <a:ea typeface="페이퍼로지 4 Regular" charset="-127"/>
+                    <a:cs typeface="Montserrat SemiBold"/>
+                    <a:sym typeface="Wingdings" panose="05000000000000000000" pitchFamily="2" charset="2"/>
+                  </a:rPr>
+                </a:br>
+                <a:r>
+                  <a:rPr lang="en-US" altLang="ko-KR">
+                    <a:solidFill>
+                      <a:schemeClr val="tx1"/>
+                    </a:solidFill>
+                    <a:latin typeface="페이퍼로지 4 Regular" charset="-127"/>
+                    <a:ea typeface="페이퍼로지 4 Regular" charset="-127"/>
+                    <a:cs typeface="Montserrat SemiBold"/>
+                    <a:sym typeface="Wingdings" panose="05000000000000000000" pitchFamily="2" charset="2"/>
+                  </a:rPr>
+                  <a:t>- </a:t>
+                </a:r>
+                <a:r>
+                  <a:rPr lang="ko-KR" altLang="en-US">
+                    <a:solidFill>
+                      <a:schemeClr val="tx1"/>
+                    </a:solidFill>
+                    <a:latin typeface="페이퍼로지 4 Regular" charset="-127"/>
+                    <a:ea typeface="페이퍼로지 4 Regular" charset="-127"/>
+                    <a:cs typeface="Montserrat SemiBold"/>
+                    <a:sym typeface="Wingdings" panose="05000000000000000000" pitchFamily="2" charset="2"/>
+                  </a:rPr>
+                  <a:t>키 생성</a:t>
+                </a:r>
+                <a:r>
+                  <a:rPr lang="en-US" altLang="ko-KR">
+                    <a:solidFill>
+                      <a:schemeClr val="tx1"/>
+                    </a:solidFill>
+                    <a:latin typeface="페이퍼로지 4 Regular" charset="-127"/>
+                    <a:ea typeface="페이퍼로지 4 Regular" charset="-127"/>
+                    <a:cs typeface="Montserrat SemiBold"/>
+                    <a:sym typeface="Wingdings" panose="05000000000000000000" pitchFamily="2" charset="2"/>
+                  </a:rPr>
+                  <a:t>: K_enc(</a:t>
+                </a:r>
+                <a:r>
+                  <a:rPr lang="ko-KR" altLang="en-US">
+                    <a:solidFill>
+                      <a:schemeClr val="tx1"/>
+                    </a:solidFill>
+                    <a:latin typeface="페이퍼로지 4 Regular" charset="-127"/>
+                    <a:ea typeface="페이퍼로지 4 Regular" charset="-127"/>
+                    <a:cs typeface="Montserrat SemiBold"/>
+                    <a:sym typeface="Wingdings" panose="05000000000000000000" pitchFamily="2" charset="2"/>
+                  </a:rPr>
+                  <a:t>암호화용</a:t>
+                </a:r>
+                <a:r>
+                  <a:rPr lang="en-US" altLang="ko-KR">
+                    <a:solidFill>
+                      <a:schemeClr val="tx1"/>
+                    </a:solidFill>
+                    <a:latin typeface="페이퍼로지 4 Regular" charset="-127"/>
+                    <a:ea typeface="페이퍼로지 4 Regular" charset="-127"/>
+                    <a:cs typeface="Montserrat SemiBold"/>
+                    <a:sym typeface="Wingdings" panose="05000000000000000000" pitchFamily="2" charset="2"/>
+                  </a:rPr>
+                  <a:t>), K_mac(</a:t>
+                </a:r>
+                <a:r>
+                  <a:rPr lang="ko-KR" altLang="en-US">
+                    <a:solidFill>
+                      <a:schemeClr val="tx1"/>
+                    </a:solidFill>
+                    <a:latin typeface="페이퍼로지 4 Regular" charset="-127"/>
+                    <a:ea typeface="페이퍼로지 4 Regular" charset="-127"/>
+                    <a:cs typeface="Montserrat SemiBold"/>
+                    <a:sym typeface="Wingdings" panose="05000000000000000000" pitchFamily="2" charset="2"/>
+                  </a:rPr>
+                  <a:t>인증용</a:t>
+                </a:r>
+                <a:r>
+                  <a:rPr lang="en-US" altLang="ko-KR">
+                    <a:solidFill>
+                      <a:schemeClr val="tx1"/>
+                    </a:solidFill>
+                    <a:latin typeface="페이퍼로지 4 Regular" charset="-127"/>
+                    <a:ea typeface="페이퍼로지 4 Regular" charset="-127"/>
+                    <a:cs typeface="Montserrat SemiBold"/>
+                    <a:sym typeface="Wingdings" panose="05000000000000000000" pitchFamily="2" charset="2"/>
+                  </a:rPr>
+                  <a:t>) 2</a:t>
+                </a:r>
+                <a:r>
+                  <a:rPr lang="ko-KR" altLang="en-US">
+                    <a:solidFill>
+                      <a:schemeClr val="tx1"/>
+                    </a:solidFill>
+                    <a:latin typeface="페이퍼로지 4 Regular" charset="-127"/>
+                    <a:ea typeface="페이퍼로지 4 Regular" charset="-127"/>
+                    <a:cs typeface="Montserrat SemiBold"/>
+                    <a:sym typeface="Wingdings" panose="05000000000000000000" pitchFamily="2" charset="2"/>
+                  </a:rPr>
+                  <a:t>개 필요</a:t>
+                </a:r>
+                <a:r>
+                  <a:rPr lang="en-US" altLang="ko-KR">
+                    <a:solidFill>
+                      <a:schemeClr val="tx1"/>
+                    </a:solidFill>
+                    <a:latin typeface="페이퍼로지 4 Regular" charset="-127"/>
+                    <a:ea typeface="페이퍼로지 4 Regular" charset="-127"/>
+                    <a:cs typeface="Montserrat SemiBold"/>
+                    <a:sym typeface="Wingdings" panose="05000000000000000000" pitchFamily="2" charset="2"/>
+                  </a:rPr>
+                  <a:t>. </a:t>
+                </a:r>
+              </a:p>
+              <a:p>
+                <a:pPr marR="0" lvl="0" algn="l" rtl="0">
+                  <a:lnSpc>
+                    <a:spcPct val="100000"/>
+                  </a:lnSpc>
+                  <a:spcBef>
+                    <a:spcPts val="0"/>
+                  </a:spcBef>
+                  <a:spcAft>
+                    <a:spcPts val="0"/>
+                  </a:spcAft>
+                  <a:buClr>
+                    <a:srgbClr val="000000"/>
+                  </a:buClr>
+                  <a:buSzPts val="1600"/>
+                </a:pPr>
+                <a:endParaRPr lang="en-US" altLang="ko-KR" sz="800">
+                  <a:solidFill>
+                    <a:schemeClr val="tx1"/>
+                  </a:solidFill>
+                  <a:latin typeface="페이퍼로지 4 Regular" charset="-127"/>
+                  <a:ea typeface="페이퍼로지 4 Regular" charset="-127"/>
+                  <a:cs typeface="Montserrat SemiBold"/>
+                  <a:sym typeface="Wingdings" panose="05000000000000000000" pitchFamily="2" charset="2"/>
+                </a:endParaRPr>
+              </a:p>
+              <a:p>
+                <a:pPr marR="0" lvl="0" algn="l" rtl="0">
+                  <a:lnSpc>
+                    <a:spcPct val="100000"/>
+                  </a:lnSpc>
+                  <a:spcBef>
+                    <a:spcPts val="0"/>
+                  </a:spcBef>
+                  <a:spcAft>
+                    <a:spcPts val="0"/>
+                  </a:spcAft>
+                  <a:buClr>
+                    <a:srgbClr val="000000"/>
+                  </a:buClr>
+                  <a:buSzPts val="1600"/>
+                </a:pPr>
+                <a:r>
+                  <a:rPr lang="en-US" altLang="ko-KR">
+                    <a:solidFill>
+                      <a:schemeClr val="tx1"/>
+                    </a:solidFill>
+                    <a:latin typeface="페이퍼로지 4 Regular" charset="-127"/>
+                    <a:ea typeface="페이퍼로지 4 Regular" charset="-127"/>
+                    <a:cs typeface="Montserrat SemiBold"/>
+                    <a:sym typeface="Wingdings" panose="05000000000000000000" pitchFamily="2" charset="2"/>
+                  </a:rPr>
+                  <a:t>- Tag</a:t>
+                </a:r>
+                <a:r>
+                  <a:rPr lang="ko-KR" altLang="en-US">
+                    <a:solidFill>
+                      <a:schemeClr val="tx1"/>
+                    </a:solidFill>
+                    <a:latin typeface="페이퍼로지 4 Regular" charset="-127"/>
+                    <a:ea typeface="페이퍼로지 4 Regular" charset="-127"/>
+                    <a:cs typeface="Montserrat SemiBold"/>
+                    <a:sym typeface="Wingdings" panose="05000000000000000000" pitchFamily="2" charset="2"/>
+                  </a:rPr>
+                  <a:t> 생성 방식</a:t>
+                </a:r>
+                <a:r>
+                  <a:rPr lang="en-US" altLang="ko-KR">
+                    <a:solidFill>
+                      <a:schemeClr val="tx1"/>
+                    </a:solidFill>
+                    <a:latin typeface="페이퍼로지 4 Regular" charset="-127"/>
+                    <a:ea typeface="페이퍼로지 4 Regular" charset="-127"/>
+                    <a:cs typeface="Montserrat SemiBold"/>
+                    <a:sym typeface="Wingdings" panose="05000000000000000000" pitchFamily="2" charset="2"/>
+                  </a:rPr>
+                  <a:t>: </a:t>
+                </a:r>
+                <a:br>
+                  <a:rPr lang="en-US" altLang="ko-KR">
+                    <a:solidFill>
+                      <a:schemeClr val="tx1"/>
+                    </a:solidFill>
+                    <a:latin typeface="페이퍼로지 4 Regular" charset="-127"/>
+                    <a:ea typeface="페이퍼로지 4 Regular" charset="-127"/>
+                    <a:cs typeface="Montserrat SemiBold"/>
+                    <a:sym typeface="Wingdings" panose="05000000000000000000" pitchFamily="2" charset="2"/>
+                  </a:rPr>
+                </a:br>
+                <a:br>
+                  <a:rPr lang="en-US" altLang="ko-KR" sz="600">
+                    <a:solidFill>
+                      <a:schemeClr val="tx1"/>
+                    </a:solidFill>
+                    <a:latin typeface="페이퍼로지 4 Regular" charset="-127"/>
+                    <a:ea typeface="페이퍼로지 4 Regular" charset="-127"/>
+                    <a:cs typeface="Montserrat SemiBold"/>
+                    <a:sym typeface="Wingdings" panose="05000000000000000000" pitchFamily="2" charset="2"/>
+                  </a:rPr>
+                </a:br>
+                <a:r>
+                  <a:rPr lang="en-US" altLang="ko-KR">
+                    <a:solidFill>
+                      <a:schemeClr val="tx1"/>
+                    </a:solidFill>
+                    <a:latin typeface="페이퍼로지 4 Regular" charset="-127"/>
+                    <a:ea typeface="페이퍼로지 4 Regular" charset="-127"/>
+                    <a:cs typeface="Montserrat SemiBold"/>
+                    <a:sym typeface="Wingdings" panose="05000000000000000000" pitchFamily="2" charset="2"/>
+                  </a:rPr>
+                  <a:t>	1. </a:t>
+                </a:r>
+                <a:r>
+                  <a:rPr lang="ko-KR" altLang="en-US">
+                    <a:solidFill>
+                      <a:schemeClr val="tx1"/>
+                    </a:solidFill>
+                    <a:latin typeface="페이퍼로지 4 Regular" charset="-127"/>
+                    <a:ea typeface="페이퍼로지 4 Regular" charset="-127"/>
+                    <a:cs typeface="Montserrat SemiBold"/>
+                    <a:sym typeface="Wingdings" panose="05000000000000000000" pitchFamily="2" charset="2"/>
+                  </a:rPr>
+                  <a:t>암호문 전체를 해시 함수</a:t>
+                </a:r>
+                <a:r>
+                  <a:rPr lang="en-US" altLang="ko-KR">
+                    <a:solidFill>
+                      <a:schemeClr val="tx1"/>
+                    </a:solidFill>
+                    <a:latin typeface="페이퍼로지 4 Regular" charset="-127"/>
+                    <a:ea typeface="페이퍼로지 4 Regular" charset="-127"/>
+                    <a:cs typeface="Montserrat SemiBold"/>
+                    <a:sym typeface="Wingdings" panose="05000000000000000000" pitchFamily="2" charset="2"/>
+                  </a:rPr>
+                  <a:t>(SHA-256 </a:t>
+                </a:r>
+                <a:r>
+                  <a:rPr lang="ko-KR" altLang="en-US">
+                    <a:solidFill>
+                      <a:schemeClr val="tx1"/>
+                    </a:solidFill>
+                    <a:latin typeface="페이퍼로지 4 Regular" charset="-127"/>
+                    <a:ea typeface="페이퍼로지 4 Regular" charset="-127"/>
+                    <a:cs typeface="Montserrat SemiBold"/>
+                    <a:sym typeface="Wingdings" panose="05000000000000000000" pitchFamily="2" charset="2"/>
+                  </a:rPr>
+                  <a:t>등</a:t>
+                </a:r>
+                <a:r>
+                  <a:rPr lang="en-US" altLang="ko-KR">
+                    <a:solidFill>
+                      <a:schemeClr val="tx1"/>
+                    </a:solidFill>
+                    <a:latin typeface="페이퍼로지 4 Regular" charset="-127"/>
+                    <a:ea typeface="페이퍼로지 4 Regular" charset="-127"/>
+                    <a:cs typeface="Montserrat SemiBold"/>
+                    <a:sym typeface="Wingdings" panose="05000000000000000000" pitchFamily="2" charset="2"/>
+                  </a:rPr>
+                  <a:t>)</a:t>
+                </a:r>
+                <a:r>
+                  <a:rPr lang="ko-KR" altLang="en-US">
+                    <a:solidFill>
+                      <a:schemeClr val="tx1"/>
+                    </a:solidFill>
+                    <a:latin typeface="페이퍼로지 4 Regular" charset="-127"/>
+                    <a:ea typeface="페이퍼로지 4 Regular" charset="-127"/>
+                    <a:cs typeface="Montserrat SemiBold"/>
+                    <a:sym typeface="Wingdings" panose="05000000000000000000" pitchFamily="2" charset="2"/>
+                  </a:rPr>
+                  <a:t>에 넣고</a:t>
+                </a:r>
+                <a:br>
+                  <a:rPr lang="en-US" altLang="ko-KR">
+                    <a:solidFill>
+                      <a:schemeClr val="tx1"/>
+                    </a:solidFill>
+                    <a:latin typeface="페이퍼로지 4 Regular" charset="-127"/>
+                    <a:ea typeface="페이퍼로지 4 Regular" charset="-127"/>
+                    <a:cs typeface="Montserrat SemiBold"/>
+                    <a:sym typeface="Wingdings" panose="05000000000000000000" pitchFamily="2" charset="2"/>
+                  </a:rPr>
+                </a:br>
+                <a:r>
+                  <a:rPr lang="en-US" altLang="ko-KR">
+                    <a:solidFill>
+                      <a:schemeClr val="tx1"/>
+                    </a:solidFill>
+                    <a:latin typeface="페이퍼로지 4 Regular" charset="-127"/>
+                    <a:ea typeface="페이퍼로지 4 Regular" charset="-127"/>
+                    <a:cs typeface="Montserrat SemiBold"/>
+                    <a:sym typeface="Wingdings" panose="05000000000000000000" pitchFamily="2" charset="2"/>
+                  </a:rPr>
+                  <a:t>	2. K_mac</a:t>
+                </a:r>
+                <a:r>
+                  <a:rPr lang="ko-KR" altLang="en-US">
+                    <a:solidFill>
+                      <a:schemeClr val="tx1"/>
+                    </a:solidFill>
+                    <a:latin typeface="페이퍼로지 4 Regular" charset="-127"/>
+                    <a:ea typeface="페이퍼로지 4 Regular" charset="-127"/>
+                    <a:cs typeface="Montserrat SemiBold"/>
+                    <a:sym typeface="Wingdings" panose="05000000000000000000" pitchFamily="2" charset="2"/>
+                  </a:rPr>
+                  <a:t>을 섞어서 해시 값 추출 </a:t>
+                </a:r>
+                <a:br>
+                  <a:rPr lang="en-US" altLang="ko-KR">
+                    <a:solidFill>
+                      <a:schemeClr val="tx1"/>
+                    </a:solidFill>
+                    <a:latin typeface="페이퍼로지 4 Regular" charset="-127"/>
+                    <a:ea typeface="페이퍼로지 4 Regular" charset="-127"/>
+                    <a:cs typeface="Montserrat SemiBold"/>
+                    <a:sym typeface="Wingdings" panose="05000000000000000000" pitchFamily="2" charset="2"/>
+                  </a:rPr>
+                </a:br>
+                <a:r>
+                  <a:rPr lang="en-US" altLang="ko-KR">
+                    <a:solidFill>
+                      <a:schemeClr val="tx1"/>
+                    </a:solidFill>
+                    <a:latin typeface="페이퍼로지 4 Regular" charset="-127"/>
+                    <a:ea typeface="페이퍼로지 4 Regular" charset="-127"/>
+                    <a:cs typeface="Montserrat SemiBold"/>
+                    <a:sym typeface="Wingdings" panose="05000000000000000000" pitchFamily="2" charset="2"/>
+                  </a:rPr>
+                  <a:t>	</a:t>
+                </a:r>
+              </a:p>
+              <a:p>
+                <a:pPr lvl="1">
+                  <a:buSzPts val="1600"/>
+                </a:pPr>
+                <a:r>
+                  <a:rPr lang="en-US" altLang="ko-KR">
+                    <a:solidFill>
+                      <a:schemeClr val="tx1"/>
+                    </a:solidFill>
+                    <a:latin typeface="페이퍼로지 4 Regular" charset="-127"/>
+                    <a:ea typeface="페이퍼로지 4 Regular" charset="-127"/>
+                    <a:cs typeface="Montserrat SemiBold"/>
+                    <a:sym typeface="Wingdings" panose="05000000000000000000" pitchFamily="2" charset="2"/>
+                  </a:rPr>
+                  <a:t>	</a:t>
+                </a:r>
+                <a14:m>
+                  <m:oMath xmlns:m="http://schemas.openxmlformats.org/officeDocument/2006/math">
+                    <m:r>
+                      <a:rPr lang="en-US" altLang="ko-KR" b="0" i="1" smtClean="0">
+                        <a:solidFill>
+                          <a:schemeClr val="tx1"/>
+                        </a:solidFill>
+                        <a:latin typeface="Cambria Math" panose="02040503050406030204" pitchFamily="18" charset="0"/>
+                        <a:ea typeface="페이퍼로지 4 Regular" charset="-127"/>
+                        <a:cs typeface="Montserrat SemiBold"/>
+                        <a:sym typeface="Wingdings" panose="05000000000000000000" pitchFamily="2" charset="2"/>
+                      </a:rPr>
+                      <m:t>𝑇𝑎𝑔</m:t>
+                    </m:r>
+                    <m:r>
+                      <a:rPr lang="en-US" altLang="ko-KR" b="0" i="1" smtClean="0">
+                        <a:solidFill>
+                          <a:schemeClr val="tx1"/>
+                        </a:solidFill>
+                        <a:latin typeface="Cambria Math" panose="02040503050406030204" pitchFamily="18" charset="0"/>
+                        <a:ea typeface="페이퍼로지 4 Regular" charset="-127"/>
+                        <a:cs typeface="Montserrat SemiBold"/>
+                        <a:sym typeface="Wingdings" panose="05000000000000000000" pitchFamily="2" charset="2"/>
+                      </a:rPr>
+                      <m:t>=</m:t>
+                    </m:r>
+                    <m:r>
+                      <a:rPr lang="en-US" altLang="ko-KR" b="0" i="1" smtClean="0">
+                        <a:solidFill>
+                          <a:schemeClr val="tx1"/>
+                        </a:solidFill>
+                        <a:latin typeface="Cambria Math" panose="02040503050406030204" pitchFamily="18" charset="0"/>
+                        <a:ea typeface="페이퍼로지 4 Regular" charset="-127"/>
+                        <a:cs typeface="Montserrat SemiBold"/>
+                        <a:sym typeface="Wingdings" panose="05000000000000000000" pitchFamily="2" charset="2"/>
+                      </a:rPr>
+                      <m:t>𝐻𝑀𝐴𝐶</m:t>
+                    </m:r>
+                    <m:d>
+                      <m:dPr>
+                        <m:ctrlPr>
+                          <a:rPr lang="en-US" altLang="ko-KR" b="0" i="1" smtClean="0">
+                            <a:solidFill>
+                              <a:schemeClr val="tx1"/>
+                            </a:solidFill>
+                            <a:latin typeface="Cambria Math" panose="02040503050406030204" pitchFamily="18" charset="0"/>
+                            <a:ea typeface="페이퍼로지 4 Regular" charset="-127"/>
+                            <a:cs typeface="Montserrat SemiBold"/>
+                            <a:sym typeface="Wingdings" panose="05000000000000000000" pitchFamily="2" charset="2"/>
+                          </a:rPr>
+                        </m:ctrlPr>
+                      </m:dPr>
+                      <m:e>
+                        <m:sSub>
+                          <m:sSubPr>
+                            <m:ctrlPr>
+                              <a:rPr lang="en-US" altLang="ko-KR" b="0" i="1" smtClean="0">
+                                <a:solidFill>
+                                  <a:schemeClr val="tx1"/>
+                                </a:solidFill>
+                                <a:latin typeface="Cambria Math" panose="02040503050406030204" pitchFamily="18" charset="0"/>
+                                <a:ea typeface="페이퍼로지 4 Regular" charset="-127"/>
+                                <a:cs typeface="Montserrat SemiBold"/>
+                                <a:sym typeface="Wingdings" panose="05000000000000000000" pitchFamily="2" charset="2"/>
+                              </a:rPr>
+                            </m:ctrlPr>
+                          </m:sSubPr>
+                          <m:e>
+                            <m:r>
+                              <a:rPr lang="en-US" altLang="ko-KR" b="0" i="1" smtClean="0">
+                                <a:solidFill>
+                                  <a:schemeClr val="tx1"/>
+                                </a:solidFill>
+                                <a:latin typeface="Cambria Math" panose="02040503050406030204" pitchFamily="18" charset="0"/>
+                                <a:ea typeface="페이퍼로지 4 Regular" charset="-127"/>
+                                <a:cs typeface="Montserrat SemiBold"/>
+                                <a:sym typeface="Wingdings" panose="05000000000000000000" pitchFamily="2" charset="2"/>
+                              </a:rPr>
+                              <m:t>𝐾</m:t>
+                            </m:r>
+                          </m:e>
+                          <m:sub>
+                            <m:r>
+                              <a:rPr lang="en-US" altLang="ko-KR" b="0" i="1" smtClean="0">
+                                <a:solidFill>
+                                  <a:schemeClr val="tx1"/>
+                                </a:solidFill>
+                                <a:latin typeface="Cambria Math" panose="02040503050406030204" pitchFamily="18" charset="0"/>
+                                <a:ea typeface="페이퍼로지 4 Regular" charset="-127"/>
+                                <a:cs typeface="Montserrat SemiBold"/>
+                                <a:sym typeface="Wingdings" panose="05000000000000000000" pitchFamily="2" charset="2"/>
+                              </a:rPr>
+                              <m:t>𝑚𝑎𝑐</m:t>
+                            </m:r>
+                          </m:sub>
+                        </m:sSub>
+                        <m:r>
+                          <a:rPr lang="en-US" altLang="ko-KR" b="0" i="1" smtClean="0">
+                            <a:solidFill>
+                              <a:schemeClr val="tx1"/>
+                            </a:solidFill>
+                            <a:latin typeface="Cambria Math" panose="02040503050406030204" pitchFamily="18" charset="0"/>
+                            <a:ea typeface="페이퍼로지 4 Regular" charset="-127"/>
+                            <a:cs typeface="Montserrat SemiBold"/>
+                            <a:sym typeface="Wingdings" panose="05000000000000000000" pitchFamily="2" charset="2"/>
+                          </a:rPr>
+                          <m:t>, </m:t>
+                        </m:r>
+                        <m:r>
+                          <a:rPr lang="en-US" altLang="ko-KR" b="0" i="1" smtClean="0">
+                            <a:solidFill>
+                              <a:schemeClr val="tx1"/>
+                            </a:solidFill>
+                            <a:latin typeface="Cambria Math" panose="02040503050406030204" pitchFamily="18" charset="0"/>
+                            <a:ea typeface="페이퍼로지 4 Regular" charset="-127"/>
+                            <a:cs typeface="Montserrat SemiBold"/>
+                            <a:sym typeface="Wingdings" panose="05000000000000000000" pitchFamily="2" charset="2"/>
+                          </a:rPr>
+                          <m:t>𝐶𝑖𝑝h𝑒𝑟𝑡𝑒𝑥𝑡</m:t>
+                        </m:r>
+                      </m:e>
+                    </m:d>
+                    <m:r>
+                      <a:rPr lang="en-US" altLang="ko-KR" b="0" i="1" smtClean="0">
+                        <a:solidFill>
+                          <a:schemeClr val="tx1"/>
+                        </a:solidFill>
+                        <a:latin typeface="Cambria Math" panose="02040503050406030204" pitchFamily="18" charset="0"/>
+                        <a:ea typeface="페이퍼로지 4 Regular" charset="-127"/>
+                        <a:cs typeface="Montserrat SemiBold"/>
+                        <a:sym typeface="Wingdings" panose="05000000000000000000" pitchFamily="2" charset="2"/>
+                      </a:rPr>
+                      <m:t> </m:t>
+                    </m:r>
+                  </m:oMath>
+                </a14:m>
+                <a:endParaRPr lang="en-US" altLang="ko-KR">
+                  <a:solidFill>
+                    <a:schemeClr val="tx1"/>
+                  </a:solidFill>
+                  <a:latin typeface="페이퍼로지 4 Regular" charset="-127"/>
+                  <a:ea typeface="페이퍼로지 4 Regular" charset="-127"/>
+                  <a:cs typeface="Montserrat SemiBold"/>
+                  <a:sym typeface="Wingdings" panose="05000000000000000000" pitchFamily="2" charset="2"/>
+                </a:endParaRPr>
+              </a:p>
+            </p:txBody>
+          </p:sp>
+        </mc:Choice>
+        <mc:Fallback>
+          <p:sp>
+            <p:nvSpPr>
+              <p:cNvPr id="169" name="Google Shape;169;p19">
+                <a:extLst>
+                  <a:ext uri="{FF2B5EF4-FFF2-40B4-BE49-F238E27FC236}">
+                    <a16:creationId xmlns:a16="http://schemas.microsoft.com/office/drawing/2014/main" id="{21EB4E01-4041-9345-8ADB-91C9897A8554}"/>
+                  </a:ext>
+                </a:extLst>
+              </p:cNvPr>
+              <p:cNvSpPr txBox="1">
+                <a:spLocks noRot="1" noChangeAspect="1" noMove="1" noResize="1" noEditPoints="1" noAdjustHandles="1" noChangeArrowheads="1" noChangeShapeType="1" noTextEdit="1"/>
+              </p:cNvSpPr>
+              <p:nvPr/>
+            </p:nvSpPr>
+            <p:spPr>
+              <a:xfrm flipH="1">
+                <a:off x="452550" y="885617"/>
+                <a:ext cx="8238900" cy="4136865"/>
+              </a:xfrm>
+              <a:prstGeom prst="rect">
+                <a:avLst/>
+              </a:prstGeom>
+              <a:blipFill>
+                <a:blip r:embed="rId3"/>
+                <a:stretch>
+                  <a:fillRect l="-296" t="-736"/>
+                </a:stretch>
+              </a:blipFill>
+              <a:ln>
+                <a:noFill/>
+              </a:ln>
+            </p:spPr>
+            <p:txBody>
+              <a:bodyPr/>
+              <a:lstStyle/>
+              <a:p>
+                <a:r>
+                  <a:rPr lang="ko-KR" altLang="en-US">
+                    <a:noFill/>
+                  </a:rPr>
+                  <a:t> </a:t>
+                </a:r>
+              </a:p>
+            </p:txBody>
+          </p:sp>
+        </mc:Fallback>
+      </mc:AlternateContent>
+      <p:sp>
+        <p:nvSpPr>
+          <p:cNvPr id="170" name="Google Shape;170;p19">
+            <a:extLst>
+              <a:ext uri="{FF2B5EF4-FFF2-40B4-BE49-F238E27FC236}">
+                <a16:creationId xmlns:a16="http://schemas.microsoft.com/office/drawing/2014/main" id="{A5E56ED5-11BF-BCE8-CEF8-3C6A2EE31ACF}"/>
+              </a:ext>
+            </a:extLst>
+          </p:cNvPr>
+          <p:cNvSpPr txBox="1">
+            <a:spLocks noGrp="1"/>
+          </p:cNvSpPr>
+          <p:nvPr>
+            <p:ph type="title"/>
+          </p:nvPr>
+        </p:nvSpPr>
+        <p:spPr>
+          <a:xfrm>
+            <a:off x="452550" y="121018"/>
+            <a:ext cx="8238900" cy="561600"/>
+          </a:xfrm>
+          <a:prstGeom prst="rect">
+            <a:avLst/>
+          </a:prstGeom>
+          <a:ln>
+            <a:noFill/>
+          </a:ln>
+        </p:spPr>
+        <p:txBody>
+          <a:bodyPr spcFirstLastPara="1" wrap="square" lIns="91425" tIns="91425" rIns="91425" bIns="91425" anchor="t" anchorCtr="0">
+            <a:noAutofit/>
+          </a:bodyPr>
+          <a:lstStyle/>
+          <a:p>
+            <a:pPr marL="0" lvl="0" indent="0" algn="ctr" rtl="0">
+              <a:spcBef>
+                <a:spcPts val="0"/>
+              </a:spcBef>
+              <a:spcAft>
+                <a:spcPts val="0"/>
+              </a:spcAft>
+              <a:buNone/>
+            </a:pPr>
+            <a:r>
+              <a:rPr lang="en-US">
+                <a:latin typeface="페이퍼로지 6 SemiBold" pitchFamily="2" charset="-127"/>
+                <a:ea typeface="페이퍼로지 6 SemiBold" pitchFamily="2" charset="-127"/>
+              </a:rPr>
+              <a:t>ChaCha20-Poly1305 </a:t>
+            </a:r>
+            <a:endParaRPr dirty="0">
+              <a:latin typeface="페이퍼로지 6 SemiBold" pitchFamily="2" charset="-127"/>
+              <a:ea typeface="페이퍼로지 6 SemiBold" pitchFamily="2" charset="-127"/>
+            </a:endParaRPr>
+          </a:p>
+        </p:txBody>
+      </p:sp>
+      <p:cxnSp>
+        <p:nvCxnSpPr>
+          <p:cNvPr id="3" name="직선 연결선 2">
+            <a:extLst>
+              <a:ext uri="{FF2B5EF4-FFF2-40B4-BE49-F238E27FC236}">
+                <a16:creationId xmlns:a16="http://schemas.microsoft.com/office/drawing/2014/main" id="{ECD893C2-0C56-1231-C4D1-D1065EFC8E3D}"/>
+              </a:ext>
+            </a:extLst>
+          </p:cNvPr>
+          <p:cNvCxnSpPr/>
+          <p:nvPr/>
+        </p:nvCxnSpPr>
+        <p:spPr>
+          <a:xfrm>
+            <a:off x="387275" y="763285"/>
+            <a:ext cx="8240358" cy="0"/>
+          </a:xfrm>
+          <a:prstGeom prst="line">
+            <a:avLst/>
+          </a:prstGeom>
+          <a:ln w="38100">
+            <a:solidFill>
+              <a:srgbClr val="51EEBC"/>
+            </a:solidFill>
+          </a:ln>
+        </p:spPr>
+        <p:style>
+          <a:lnRef idx="1">
+            <a:schemeClr val="accent1"/>
+          </a:lnRef>
+          <a:fillRef idx="0">
+            <a:schemeClr val="accent1"/>
+          </a:fillRef>
+          <a:effectRef idx="0">
+            <a:schemeClr val="accent1"/>
+          </a:effectRef>
+          <a:fontRef idx="minor">
+            <a:schemeClr val="tx1"/>
+          </a:fontRef>
+        </p:style>
+      </p:cxnSp>
+      <p:graphicFrame>
+        <p:nvGraphicFramePr>
+          <p:cNvPr id="2" name="표 1">
+            <a:extLst>
+              <a:ext uri="{FF2B5EF4-FFF2-40B4-BE49-F238E27FC236}">
+                <a16:creationId xmlns:a16="http://schemas.microsoft.com/office/drawing/2014/main" id="{0DBEE06D-A9A7-36DA-7703-D07C381D1618}"/>
+              </a:ext>
+            </a:extLst>
+          </p:cNvPr>
+          <p:cNvGraphicFramePr>
+            <a:graphicFrameLocks noGrp="1"/>
+          </p:cNvGraphicFramePr>
+          <p:nvPr>
+            <p:extLst>
+              <p:ext uri="{D42A27DB-BD31-4B8C-83A1-F6EECF244321}">
+                <p14:modId xmlns:p14="http://schemas.microsoft.com/office/powerpoint/2010/main" val="2504427113"/>
+              </p:ext>
+            </p:extLst>
+          </p:nvPr>
+        </p:nvGraphicFramePr>
+        <p:xfrm>
+          <a:off x="1379838" y="966285"/>
+          <a:ext cx="6384324" cy="1854200"/>
+        </p:xfrm>
+        <a:graphic>
+          <a:graphicData uri="http://schemas.openxmlformats.org/drawingml/2006/table">
+            <a:tbl>
+              <a:tblPr firstRow="1" bandRow="1">
+                <a:tableStyleId>{08D96753-9D45-4FE6-9178-F3E63956B4D6}</a:tableStyleId>
+              </a:tblPr>
+              <a:tblGrid>
+                <a:gridCol w="1833337">
+                  <a:extLst>
+                    <a:ext uri="{9D8B030D-6E8A-4147-A177-3AD203B41FA5}">
+                      <a16:colId xmlns:a16="http://schemas.microsoft.com/office/drawing/2014/main" val="240487310"/>
+                    </a:ext>
+                  </a:extLst>
+                </a:gridCol>
+                <a:gridCol w="2339128">
+                  <a:extLst>
+                    <a:ext uri="{9D8B030D-6E8A-4147-A177-3AD203B41FA5}">
+                      <a16:colId xmlns:a16="http://schemas.microsoft.com/office/drawing/2014/main" val="2952472352"/>
+                    </a:ext>
+                  </a:extLst>
+                </a:gridCol>
+                <a:gridCol w="2211859">
+                  <a:extLst>
+                    <a:ext uri="{9D8B030D-6E8A-4147-A177-3AD203B41FA5}">
+                      <a16:colId xmlns:a16="http://schemas.microsoft.com/office/drawing/2014/main" val="2425224115"/>
+                    </a:ext>
+                  </a:extLst>
+                </a:gridCol>
+              </a:tblGrid>
+              <a:tr h="370840">
+                <a:tc>
+                  <a:txBody>
+                    <a:bodyPr/>
+                    <a:lstStyle/>
+                    <a:p>
+                      <a:pPr algn="ctr" latinLnBrk="1"/>
+                      <a:r>
+                        <a:rPr lang="ko-KR" altLang="en-US">
+                          <a:latin typeface="페이퍼로지 4 Regular" pitchFamily="2" charset="-127"/>
+                          <a:ea typeface="페이퍼로지 4 Regular" pitchFamily="2" charset="-127"/>
+                        </a:rPr>
+                        <a:t>구분</a:t>
+                      </a:r>
+                    </a:p>
+                  </a:txBody>
+                  <a:tcPr anchor="ctr">
+                    <a:solidFill>
+                      <a:schemeClr val="bg1">
+                        <a:lumMod val="85000"/>
+                      </a:schemeClr>
+                    </a:solidFill>
+                  </a:tcPr>
+                </a:tc>
+                <a:tc>
+                  <a:txBody>
+                    <a:bodyPr/>
+                    <a:lstStyle/>
+                    <a:p>
+                      <a:pPr algn="ctr" latinLnBrk="1"/>
+                      <a:r>
+                        <a:rPr lang="en-US" altLang="ko-KR">
+                          <a:latin typeface="페이퍼로지 4 Regular" pitchFamily="2" charset="-127"/>
+                          <a:ea typeface="페이퍼로지 4 Regular" pitchFamily="2" charset="-127"/>
+                        </a:rPr>
+                        <a:t>AES-256-GCM</a:t>
+                      </a:r>
+                      <a:endParaRPr lang="ko-KR" altLang="en-US">
+                        <a:latin typeface="페이퍼로지 4 Regular" pitchFamily="2" charset="-127"/>
+                        <a:ea typeface="페이퍼로지 4 Regular" pitchFamily="2" charset="-127"/>
+                      </a:endParaRPr>
+                    </a:p>
+                  </a:txBody>
+                  <a:tcPr anchor="ctr">
+                    <a:solidFill>
+                      <a:schemeClr val="bg1">
+                        <a:lumMod val="85000"/>
+                      </a:schemeClr>
+                    </a:solidFill>
+                  </a:tcPr>
+                </a:tc>
+                <a:tc>
+                  <a:txBody>
+                    <a:bodyPr/>
+                    <a:lstStyle/>
+                    <a:p>
+                      <a:pPr algn="ctr" latinLnBrk="1"/>
+                      <a:r>
+                        <a:rPr lang="en-US" altLang="ko-KR">
+                          <a:latin typeface="페이퍼로지 4 Regular" pitchFamily="2" charset="-127"/>
+                          <a:ea typeface="페이퍼로지 4 Regular" pitchFamily="2" charset="-127"/>
+                        </a:rPr>
+                        <a:t>ChaCha20-Poly1305</a:t>
+                      </a:r>
+                      <a:endParaRPr lang="ko-KR" altLang="en-US">
+                        <a:latin typeface="페이퍼로지 4 Regular" pitchFamily="2" charset="-127"/>
+                        <a:ea typeface="페이퍼로지 4 Regular" pitchFamily="2" charset="-127"/>
+                      </a:endParaRPr>
+                    </a:p>
+                  </a:txBody>
+                  <a:tcPr anchor="ctr">
+                    <a:solidFill>
+                      <a:schemeClr val="bg1">
+                        <a:lumMod val="85000"/>
+                      </a:schemeClr>
+                    </a:solidFill>
+                  </a:tcPr>
+                </a:tc>
+                <a:extLst>
+                  <a:ext uri="{0D108BD9-81ED-4DB2-BD59-A6C34878D82A}">
+                    <a16:rowId xmlns:a16="http://schemas.microsoft.com/office/drawing/2014/main" val="4248717854"/>
+                  </a:ext>
+                </a:extLst>
+              </a:tr>
+              <a:tr h="370840">
+                <a:tc>
+                  <a:txBody>
+                    <a:bodyPr/>
+                    <a:lstStyle/>
+                    <a:p>
+                      <a:pPr algn="ctr" latinLnBrk="1"/>
+                      <a:r>
+                        <a:rPr lang="ko-KR" altLang="en-US">
+                          <a:latin typeface="페이퍼로지 4 Regular" pitchFamily="2" charset="-127"/>
+                          <a:ea typeface="페이퍼로지 4 Regular" pitchFamily="2" charset="-127"/>
+                        </a:rPr>
+                        <a:t>기반 구조</a:t>
+                      </a:r>
+                    </a:p>
+                  </a:txBody>
+                  <a:tcPr anchor="ctr"/>
+                </a:tc>
+                <a:tc>
+                  <a:txBody>
+                    <a:bodyPr/>
+                    <a:lstStyle/>
+                    <a:p>
+                      <a:pPr algn="ctr" latinLnBrk="1"/>
+                      <a:r>
+                        <a:rPr lang="en-US" altLang="ko-KR">
+                          <a:latin typeface="페이퍼로지 4 Regular" pitchFamily="2" charset="-127"/>
+                          <a:ea typeface="페이퍼로지 4 Regular" pitchFamily="2" charset="-127"/>
+                        </a:rPr>
+                        <a:t>Block Cipher </a:t>
+                      </a:r>
+                      <a:endParaRPr lang="ko-KR" altLang="en-US">
+                        <a:latin typeface="페이퍼로지 4 Regular" pitchFamily="2" charset="-127"/>
+                        <a:ea typeface="페이퍼로지 4 Regular" pitchFamily="2" charset="-127"/>
+                      </a:endParaRPr>
+                    </a:p>
+                  </a:txBody>
+                  <a:tcPr anchor="ctr"/>
+                </a:tc>
+                <a:tc>
+                  <a:txBody>
+                    <a:bodyPr/>
+                    <a:lstStyle/>
+                    <a:p>
+                      <a:pPr algn="ctr" latinLnBrk="1"/>
+                      <a:r>
+                        <a:rPr lang="en-US" altLang="ko-KR">
+                          <a:latin typeface="페이퍼로지 4 Regular" pitchFamily="2" charset="-127"/>
+                          <a:ea typeface="페이퍼로지 4 Regular" pitchFamily="2" charset="-127"/>
+                        </a:rPr>
+                        <a:t>Stream Cipher </a:t>
+                      </a:r>
+                      <a:endParaRPr lang="ko-KR" altLang="en-US">
+                        <a:latin typeface="페이퍼로지 4 Regular" pitchFamily="2" charset="-127"/>
+                        <a:ea typeface="페이퍼로지 4 Regular" pitchFamily="2" charset="-127"/>
+                      </a:endParaRPr>
+                    </a:p>
+                  </a:txBody>
+                  <a:tcPr anchor="ctr"/>
+                </a:tc>
+                <a:extLst>
+                  <a:ext uri="{0D108BD9-81ED-4DB2-BD59-A6C34878D82A}">
+                    <a16:rowId xmlns:a16="http://schemas.microsoft.com/office/drawing/2014/main" val="3935169380"/>
+                  </a:ext>
+                </a:extLst>
+              </a:tr>
+              <a:tr h="370840">
+                <a:tc>
+                  <a:txBody>
+                    <a:bodyPr/>
+                    <a:lstStyle/>
+                    <a:p>
+                      <a:pPr algn="ctr" latinLnBrk="1"/>
+                      <a:r>
+                        <a:rPr lang="ko-KR" altLang="en-US">
+                          <a:latin typeface="페이퍼로지 4 Regular" pitchFamily="2" charset="-127"/>
+                          <a:ea typeface="페이퍼로지 4 Regular" pitchFamily="2" charset="-127"/>
+                        </a:rPr>
+                        <a:t>하드웨어 가속 필요</a:t>
+                      </a:r>
+                    </a:p>
+                  </a:txBody>
+                  <a:tcPr anchor="ctr"/>
+                </a:tc>
+                <a:tc>
+                  <a:txBody>
+                    <a:bodyPr/>
+                    <a:lstStyle/>
+                    <a:p>
+                      <a:pPr algn="ctr" latinLnBrk="1"/>
+                      <a:r>
+                        <a:rPr lang="en-US" altLang="ko-KR">
+                          <a:latin typeface="페이퍼로지 4 Regular" pitchFamily="2" charset="-127"/>
+                          <a:ea typeface="페이퍼로지 4 Regular" pitchFamily="2" charset="-127"/>
+                        </a:rPr>
+                        <a:t>AES-NI </a:t>
+                      </a:r>
+                      <a:r>
+                        <a:rPr lang="ko-KR" altLang="en-US">
+                          <a:latin typeface="페이퍼로지 4 Regular" pitchFamily="2" charset="-127"/>
+                          <a:ea typeface="페이퍼로지 4 Regular" pitchFamily="2" charset="-127"/>
+                        </a:rPr>
+                        <a:t>필수 </a:t>
+                      </a:r>
+                      <a:r>
+                        <a:rPr lang="en-US" altLang="ko-KR">
+                          <a:latin typeface="페이퍼로지 4 Regular" pitchFamily="2" charset="-127"/>
+                          <a:ea typeface="페이퍼로지 4 Regular" pitchFamily="2" charset="-127"/>
+                        </a:rPr>
+                        <a:t>(</a:t>
+                      </a:r>
+                      <a:r>
+                        <a:rPr lang="ko-KR" altLang="en-US">
+                          <a:latin typeface="페이퍼로지 4 Regular" pitchFamily="2" charset="-127"/>
+                          <a:ea typeface="페이퍼로지 4 Regular" pitchFamily="2" charset="-127"/>
+                        </a:rPr>
+                        <a:t>없으면 느림</a:t>
+                      </a:r>
+                      <a:r>
+                        <a:rPr lang="en-US" altLang="ko-KR">
+                          <a:latin typeface="페이퍼로지 4 Regular" pitchFamily="2" charset="-127"/>
+                          <a:ea typeface="페이퍼로지 4 Regular" pitchFamily="2" charset="-127"/>
+                        </a:rPr>
+                        <a:t>)</a:t>
+                      </a:r>
+                      <a:endParaRPr lang="ko-KR" altLang="en-US">
+                        <a:latin typeface="페이퍼로지 4 Regular" pitchFamily="2" charset="-127"/>
+                        <a:ea typeface="페이퍼로지 4 Regular" pitchFamily="2" charset="-127"/>
+                      </a:endParaRPr>
+                    </a:p>
+                  </a:txBody>
+                  <a:tcPr anchor="ctr"/>
+                </a:tc>
+                <a:tc>
+                  <a:txBody>
+                    <a:bodyPr/>
+                    <a:lstStyle/>
+                    <a:p>
+                      <a:pPr algn="ctr" latinLnBrk="1"/>
+                      <a:r>
+                        <a:rPr lang="ko-KR" altLang="en-US">
+                          <a:latin typeface="페이퍼로지 4 Regular" pitchFamily="2" charset="-127"/>
+                          <a:ea typeface="페이퍼로지 4 Regular" pitchFamily="2" charset="-127"/>
+                        </a:rPr>
+                        <a:t>가속 없어도 </a:t>
+                      </a:r>
+                      <a:r>
+                        <a:rPr lang="en-US" altLang="ko-KR">
+                          <a:latin typeface="페이퍼로지 4 Regular" pitchFamily="2" charset="-127"/>
+                          <a:ea typeface="페이퍼로지 4 Regular" pitchFamily="2" charset="-127"/>
+                        </a:rPr>
+                        <a:t>SW </a:t>
+                      </a:r>
+                      <a:r>
+                        <a:rPr lang="ko-KR" altLang="en-US">
+                          <a:latin typeface="페이퍼로지 4 Regular" pitchFamily="2" charset="-127"/>
+                          <a:ea typeface="페이퍼로지 4 Regular" pitchFamily="2" charset="-127"/>
+                        </a:rPr>
+                        <a:t>최적화</a:t>
+                      </a:r>
+                    </a:p>
+                  </a:txBody>
+                  <a:tcPr anchor="ctr"/>
+                </a:tc>
+                <a:extLst>
+                  <a:ext uri="{0D108BD9-81ED-4DB2-BD59-A6C34878D82A}">
+                    <a16:rowId xmlns:a16="http://schemas.microsoft.com/office/drawing/2014/main" val="3816094665"/>
+                  </a:ext>
+                </a:extLst>
+              </a:tr>
+              <a:tr h="370840">
+                <a:tc>
+                  <a:txBody>
+                    <a:bodyPr/>
+                    <a:lstStyle/>
+                    <a:p>
+                      <a:pPr algn="ctr" latinLnBrk="1"/>
+                      <a:r>
+                        <a:rPr lang="ko-KR" altLang="en-US">
+                          <a:latin typeface="페이퍼로지 4 Regular" pitchFamily="2" charset="-127"/>
+                          <a:ea typeface="페이퍼로지 4 Regular" pitchFamily="2" charset="-127"/>
+                        </a:rPr>
+                        <a:t>주요 타겟</a:t>
+                      </a:r>
+                    </a:p>
+                  </a:txBody>
+                  <a:tcPr anchor="ctr"/>
+                </a:tc>
+                <a:tc>
+                  <a:txBody>
+                    <a:bodyPr/>
+                    <a:lstStyle/>
+                    <a:p>
+                      <a:pPr algn="ctr" latinLnBrk="1"/>
+                      <a:r>
+                        <a:rPr lang="ko-KR" altLang="en-US">
+                          <a:latin typeface="페이퍼로지 4 Regular" pitchFamily="2" charset="-127"/>
+                          <a:ea typeface="페이퍼로지 4 Regular" pitchFamily="2" charset="-127"/>
+                        </a:rPr>
+                        <a:t>서버</a:t>
+                      </a:r>
+                      <a:r>
+                        <a:rPr lang="en-US" altLang="ko-KR">
+                          <a:latin typeface="페이퍼로지 4 Regular" pitchFamily="2" charset="-127"/>
+                          <a:ea typeface="페이퍼로지 4 Regular" pitchFamily="2" charset="-127"/>
+                        </a:rPr>
+                        <a:t>, PC, </a:t>
+                      </a:r>
+                      <a:r>
+                        <a:rPr lang="ko-KR" altLang="en-US">
+                          <a:latin typeface="페이퍼로지 4 Regular" pitchFamily="2" charset="-127"/>
+                          <a:ea typeface="페이퍼로지 4 Regular" pitchFamily="2" charset="-127"/>
+                        </a:rPr>
+                        <a:t>최신 모바일</a:t>
+                      </a:r>
+                    </a:p>
+                  </a:txBody>
+                  <a:tcPr anchor="ctr"/>
+                </a:tc>
+                <a:tc>
+                  <a:txBody>
+                    <a:bodyPr/>
+                    <a:lstStyle/>
+                    <a:p>
+                      <a:pPr algn="ctr" latinLnBrk="1"/>
+                      <a:r>
+                        <a:rPr lang="ko-KR" altLang="en-US">
+                          <a:latin typeface="페이퍼로지 4 Regular" pitchFamily="2" charset="-127"/>
+                          <a:ea typeface="페이퍼로지 4 Regular" pitchFamily="2" charset="-127"/>
+                        </a:rPr>
+                        <a:t>구형 모바일</a:t>
+                      </a:r>
+                      <a:r>
+                        <a:rPr lang="en-US" altLang="ko-KR">
+                          <a:latin typeface="페이퍼로지 4 Regular" pitchFamily="2" charset="-127"/>
+                          <a:ea typeface="페이퍼로지 4 Regular" pitchFamily="2" charset="-127"/>
+                        </a:rPr>
+                        <a:t>, IoT, VPN </a:t>
+                      </a:r>
+                      <a:endParaRPr lang="ko-KR" altLang="en-US">
+                        <a:latin typeface="페이퍼로지 4 Regular" pitchFamily="2" charset="-127"/>
+                        <a:ea typeface="페이퍼로지 4 Regular" pitchFamily="2" charset="-127"/>
+                      </a:endParaRPr>
+                    </a:p>
+                  </a:txBody>
+                  <a:tcPr anchor="ctr"/>
+                </a:tc>
+                <a:extLst>
+                  <a:ext uri="{0D108BD9-81ED-4DB2-BD59-A6C34878D82A}">
+                    <a16:rowId xmlns:a16="http://schemas.microsoft.com/office/drawing/2014/main" val="2673113980"/>
+                  </a:ext>
+                </a:extLst>
+              </a:tr>
+              <a:tr h="370840">
+                <a:tc>
+                  <a:txBody>
+                    <a:bodyPr/>
+                    <a:lstStyle/>
+                    <a:p>
+                      <a:pPr algn="ctr" latinLnBrk="1"/>
+                      <a:r>
+                        <a:rPr lang="ko-KR" altLang="en-US">
+                          <a:latin typeface="페이퍼로지 4 Regular" pitchFamily="2" charset="-127"/>
+                          <a:ea typeface="페이퍼로지 4 Regular" pitchFamily="2" charset="-127"/>
+                        </a:rPr>
+                        <a:t>강점</a:t>
+                      </a:r>
+                    </a:p>
+                  </a:txBody>
+                  <a:tcPr anchor="ctr"/>
+                </a:tc>
+                <a:tc>
+                  <a:txBody>
+                    <a:bodyPr/>
+                    <a:lstStyle/>
+                    <a:p>
+                      <a:pPr algn="ctr" latinLnBrk="1"/>
+                      <a:r>
+                        <a:rPr lang="ko-KR" altLang="en-US">
+                          <a:latin typeface="페이퍼로지 4 Regular" pitchFamily="2" charset="-127"/>
+                          <a:ea typeface="페이퍼로지 4 Regular" pitchFamily="2" charset="-127"/>
+                        </a:rPr>
+                        <a:t>검증된 표준</a:t>
+                      </a:r>
+                    </a:p>
+                  </a:txBody>
+                  <a:tcPr anchor="ctr"/>
+                </a:tc>
+                <a:tc>
+                  <a:txBody>
+                    <a:bodyPr/>
+                    <a:lstStyle/>
+                    <a:p>
+                      <a:pPr algn="ctr" latinLnBrk="1"/>
+                      <a:r>
+                        <a:rPr lang="ko-KR" altLang="en-US">
+                          <a:latin typeface="페이퍼로지 4 Regular" pitchFamily="2" charset="-127"/>
+                          <a:ea typeface="페이퍼로지 4 Regular" pitchFamily="2" charset="-127"/>
+                        </a:rPr>
+                        <a:t>타이밍 공격 저항성 </a:t>
+                      </a:r>
+                    </a:p>
+                  </a:txBody>
+                  <a:tcPr anchor="ctr"/>
+                </a:tc>
+                <a:extLst>
+                  <a:ext uri="{0D108BD9-81ED-4DB2-BD59-A6C34878D82A}">
+                    <a16:rowId xmlns:a16="http://schemas.microsoft.com/office/drawing/2014/main" val="21860073"/>
+                  </a:ext>
+                </a:extLst>
+              </a:tr>
+            </a:tbl>
+          </a:graphicData>
+        </a:graphic>
+      </p:graphicFrame>
+      <p:sp>
+        <p:nvSpPr>
+          <p:cNvPr id="4" name="TextBox 3">
+            <a:extLst>
+              <a:ext uri="{FF2B5EF4-FFF2-40B4-BE49-F238E27FC236}">
+                <a16:creationId xmlns:a16="http://schemas.microsoft.com/office/drawing/2014/main" id="{79FD4CAC-F100-7825-F390-134BE435E325}"/>
+              </a:ext>
+            </a:extLst>
+          </p:cNvPr>
+          <p:cNvSpPr txBox="1"/>
+          <p:nvPr/>
+        </p:nvSpPr>
+        <p:spPr>
+          <a:xfrm>
+            <a:off x="729574" y="4791650"/>
+            <a:ext cx="6074349" cy="230832"/>
+          </a:xfrm>
+          <a:prstGeom prst="rect">
+            <a:avLst/>
+          </a:prstGeom>
+          <a:noFill/>
+        </p:spPr>
+        <p:txBody>
+          <a:bodyPr wrap="square" rtlCol="0">
+            <a:spAutoFit/>
+          </a:bodyPr>
+          <a:lstStyle/>
+          <a:p>
+            <a:r>
+              <a:rPr lang="en-US" altLang="ko-KR" sz="900">
+                <a:latin typeface="페이퍼로지 1 Thin" pitchFamily="2" charset="-127"/>
+                <a:ea typeface="페이퍼로지 1 Thin" pitchFamily="2" charset="-127"/>
+              </a:rPr>
+              <a:t>HMAC: Hash-based Message Authentication Code (</a:t>
+            </a:r>
+            <a:r>
+              <a:rPr lang="ko-KR" altLang="en-US" sz="900">
+                <a:latin typeface="페이퍼로지 1 Thin" pitchFamily="2" charset="-127"/>
+                <a:ea typeface="페이퍼로지 1 Thin" pitchFamily="2" charset="-127"/>
+              </a:rPr>
+              <a:t>해시 값을 기반으로 </a:t>
+            </a:r>
+            <a:r>
+              <a:rPr lang="en-US" altLang="ko-KR" sz="900">
+                <a:latin typeface="페이퍼로지 1 Thin" pitchFamily="2" charset="-127"/>
+                <a:ea typeface="페이퍼로지 1 Thin" pitchFamily="2" charset="-127"/>
+              </a:rPr>
+              <a:t>Tag </a:t>
+            </a:r>
+            <a:r>
+              <a:rPr lang="ko-KR" altLang="en-US" sz="900">
+                <a:latin typeface="페이퍼로지 1 Thin" pitchFamily="2" charset="-127"/>
+                <a:ea typeface="페이퍼로지 1 Thin" pitchFamily="2" charset="-127"/>
+              </a:rPr>
+              <a:t>생성</a:t>
+            </a:r>
+            <a:r>
+              <a:rPr lang="en-US" altLang="ko-KR" sz="900">
+                <a:latin typeface="페이퍼로지 1 Thin" pitchFamily="2" charset="-127"/>
+                <a:ea typeface="페이퍼로지 1 Thin" pitchFamily="2" charset="-127"/>
+              </a:rPr>
+              <a:t>)</a:t>
+            </a:r>
+            <a:endParaRPr lang="ko-KR" altLang="en-US" sz="900">
+              <a:latin typeface="페이퍼로지 1 Thin" pitchFamily="2" charset="-127"/>
+              <a:ea typeface="페이퍼로지 1 Thin" pitchFamily="2" charset="-127"/>
+            </a:endParaRPr>
+          </a:p>
+        </p:txBody>
+      </p:sp>
+    </p:spTree>
+    <p:extLst>
+      <p:ext uri="{BB962C8B-B14F-4D97-AF65-F5344CB8AC3E}">
+        <p14:creationId xmlns:p14="http://schemas.microsoft.com/office/powerpoint/2010/main" val="2384004095"/>
+      </p:ext>
+    </p:extLst>
+  </p:cSld>
+  <p:clrMapOvr>
+    <a:masterClrMapping/>
+  </p:clrMapOvr>
+</p:sld>
+</file>
+
+<file path=ppt/slides/slide21.xml><?xml version="1.0" encoding="utf-8"?>
+<p:sld xmlns:a="http://schemas.openxmlformats.org/drawingml/2006/main" xmlns:r="http://schemas.openxmlformats.org/officeDocument/2006/relationships" xmlns:p="http://schemas.openxmlformats.org/presentationml/2006/main">
+  <p:cSld>
+    <p:spTree>
+      <p:nvGrpSpPr>
+        <p:cNvPr id="1" name="Shape 167">
+          <a:extLst>
+            <a:ext uri="{FF2B5EF4-FFF2-40B4-BE49-F238E27FC236}">
               <a16:creationId xmlns:a16="http://schemas.microsoft.com/office/drawing/2014/main" id="{3907D96C-595A-A69A-9A59-3CC064FE5688}"/>
             </a:ext>
           </a:extLst>
@@ -18856,563 +23604,7 @@
 </p:sld>
 </file>
 
-<file path=ppt/slides/slide2.xml><?xml version="1.0" encoding="utf-8"?>
-<p:sld xmlns:a="http://schemas.openxmlformats.org/drawingml/2006/main" xmlns:r="http://schemas.openxmlformats.org/officeDocument/2006/relationships" xmlns:p="http://schemas.openxmlformats.org/presentationml/2006/main">
-  <p:cSld>
-    <p:spTree>
-      <p:nvGrpSpPr>
-        <p:cNvPr id="1" name="Shape 167">
-          <a:extLst>
-            <a:ext uri="{FF2B5EF4-FFF2-40B4-BE49-F238E27FC236}">
-              <a16:creationId xmlns:a16="http://schemas.microsoft.com/office/drawing/2014/main" id="{24ACEF20-67BF-C1EF-810A-AB2F4435178D}"/>
-            </a:ext>
-          </a:extLst>
-        </p:cNvPr>
-        <p:cNvGrpSpPr/>
-        <p:nvPr/>
-      </p:nvGrpSpPr>
-      <p:grpSpPr>
-        <a:xfrm>
-          <a:off x="0" y="0"/>
-          <a:ext cx="0" cy="0"/>
-          <a:chOff x="0" y="0"/>
-          <a:chExt cx="0" cy="0"/>
-        </a:xfrm>
-      </p:grpSpPr>
-      <p:sp>
-        <p:nvSpPr>
-          <p:cNvPr id="169" name="Google Shape;169;p19">
-            <a:extLst>
-              <a:ext uri="{FF2B5EF4-FFF2-40B4-BE49-F238E27FC236}">
-                <a16:creationId xmlns:a16="http://schemas.microsoft.com/office/drawing/2014/main" id="{83B6B331-BFD3-43AA-16E7-0F49E57F059F}"/>
-              </a:ext>
-            </a:extLst>
-          </p:cNvPr>
-          <p:cNvSpPr txBox="1"/>
-          <p:nvPr/>
-        </p:nvSpPr>
-        <p:spPr>
-          <a:xfrm flipH="1">
-            <a:off x="452550" y="885617"/>
-            <a:ext cx="8238900" cy="4136865"/>
-          </a:xfrm>
-          <a:prstGeom prst="rect">
-            <a:avLst/>
-          </a:prstGeom>
-          <a:noFill/>
-          <a:ln>
-            <a:noFill/>
-          </a:ln>
-        </p:spPr>
-        <p:txBody>
-          <a:bodyPr spcFirstLastPara="1" wrap="square" lIns="91425" tIns="45700" rIns="91425" bIns="45700" anchor="t" anchorCtr="0">
-            <a:noAutofit/>
-          </a:bodyPr>
-          <a:lstStyle/>
-          <a:p>
-            <a:pPr marL="285750" marR="0" lvl="0" indent="-285750" algn="l" rtl="0">
-              <a:lnSpc>
-                <a:spcPct val="100000"/>
-              </a:lnSpc>
-              <a:spcBef>
-                <a:spcPts val="0"/>
-              </a:spcBef>
-              <a:spcAft>
-                <a:spcPts val="0"/>
-              </a:spcAft>
-              <a:buClr>
-                <a:srgbClr val="000000"/>
-              </a:buClr>
-              <a:buSzPts val="1600"/>
-              <a:buFont typeface="Arial" panose="020B0604020202020204" pitchFamily="34" charset="0"/>
-              <a:buChar char="•"/>
-            </a:pPr>
-            <a:r>
-              <a:rPr lang="ko-KR" altLang="en-US" sz="1800">
-                <a:solidFill>
-                  <a:schemeClr val="dk1"/>
-                </a:solidFill>
-                <a:latin typeface="페이퍼로지 4 Regular" charset="-127"/>
-                <a:ea typeface="페이퍼로지 4 Regular" charset="-127"/>
-                <a:cs typeface="Montserrat SemiBold"/>
-                <a:sym typeface="Montserrat SemiBold"/>
-              </a:rPr>
-              <a:t>해시가 무엇인지</a:t>
-            </a:r>
-            <a:endParaRPr lang="en-US" altLang="ko-KR" sz="1800">
-              <a:solidFill>
-                <a:schemeClr val="dk1"/>
-              </a:solidFill>
-              <a:latin typeface="페이퍼로지 4 Regular" charset="-127"/>
-              <a:ea typeface="페이퍼로지 4 Regular" charset="-127"/>
-              <a:cs typeface="Montserrat SemiBold"/>
-              <a:sym typeface="Montserrat SemiBold"/>
-            </a:endParaRPr>
-          </a:p>
-          <a:p>
-            <a:pPr marL="285750" marR="0" lvl="0" indent="-285750" algn="l" rtl="0">
-              <a:lnSpc>
-                <a:spcPct val="100000"/>
-              </a:lnSpc>
-              <a:spcBef>
-                <a:spcPts val="0"/>
-              </a:spcBef>
-              <a:spcAft>
-                <a:spcPts val="0"/>
-              </a:spcAft>
-              <a:buClr>
-                <a:srgbClr val="000000"/>
-              </a:buClr>
-              <a:buSzPts val="1600"/>
-              <a:buFont typeface="Arial" panose="020B0604020202020204" pitchFamily="34" charset="0"/>
-              <a:buChar char="•"/>
-            </a:pPr>
-            <a:endParaRPr lang="en-US" altLang="ko-KR" sz="1800">
-              <a:solidFill>
-                <a:schemeClr val="dk1"/>
-              </a:solidFill>
-              <a:latin typeface="페이퍼로지 4 Regular" charset="-127"/>
-              <a:ea typeface="페이퍼로지 4 Regular" charset="-127"/>
-              <a:cs typeface="Montserrat SemiBold"/>
-              <a:sym typeface="Montserrat SemiBold"/>
-            </a:endParaRPr>
-          </a:p>
-          <a:p>
-            <a:pPr marL="285750" marR="0" lvl="0" indent="-285750" algn="l" rtl="0">
-              <a:lnSpc>
-                <a:spcPct val="100000"/>
-              </a:lnSpc>
-              <a:spcBef>
-                <a:spcPts val="0"/>
-              </a:spcBef>
-              <a:spcAft>
-                <a:spcPts val="0"/>
-              </a:spcAft>
-              <a:buClr>
-                <a:srgbClr val="000000"/>
-              </a:buClr>
-              <a:buSzPts val="1600"/>
-              <a:buFont typeface="Arial" panose="020B0604020202020204" pitchFamily="34" charset="0"/>
-              <a:buChar char="•"/>
-            </a:pPr>
-            <a:r>
-              <a:rPr lang="ko-KR" altLang="en-US" sz="1800">
-                <a:solidFill>
-                  <a:schemeClr val="dk1"/>
-                </a:solidFill>
-                <a:latin typeface="페이퍼로지 4 Regular" charset="-127"/>
-                <a:ea typeface="페이퍼로지 4 Regular" charset="-127"/>
-                <a:cs typeface="Montserrat SemiBold"/>
-                <a:sym typeface="Montserrat SemiBold"/>
-              </a:rPr>
-              <a:t>무엇이 있는지 </a:t>
-            </a:r>
-            <a:r>
-              <a:rPr lang="en-US" altLang="ko-KR" sz="1800">
-                <a:solidFill>
-                  <a:schemeClr val="dk1"/>
-                </a:solidFill>
-                <a:latin typeface="페이퍼로지 4 Regular" charset="-127"/>
-                <a:ea typeface="페이퍼로지 4 Regular" charset="-127"/>
-                <a:cs typeface="Montserrat SemiBold"/>
-                <a:sym typeface="Montserrat SemiBold"/>
-              </a:rPr>
-              <a:t>(</a:t>
-            </a:r>
-            <a:r>
-              <a:rPr lang="ko-KR" altLang="en-US" sz="1800">
-                <a:solidFill>
-                  <a:schemeClr val="dk1"/>
-                </a:solidFill>
-                <a:latin typeface="페이퍼로지 4 Regular" charset="-127"/>
-                <a:ea typeface="페이퍼로지 4 Regular" charset="-127"/>
-                <a:cs typeface="Montserrat SemiBold"/>
-                <a:sym typeface="Montserrat SemiBold"/>
-              </a:rPr>
-              <a:t>차이는 무엇인지</a:t>
-            </a:r>
-            <a:r>
-              <a:rPr lang="en-US" altLang="ko-KR" sz="1800">
-                <a:solidFill>
-                  <a:schemeClr val="dk1"/>
-                </a:solidFill>
-                <a:latin typeface="페이퍼로지 4 Regular" charset="-127"/>
-                <a:ea typeface="페이퍼로지 4 Regular" charset="-127"/>
-                <a:cs typeface="Montserrat SemiBold"/>
-                <a:sym typeface="Montserrat SemiBold"/>
-              </a:rPr>
-              <a:t>)</a:t>
-            </a:r>
-          </a:p>
-          <a:p>
-            <a:pPr marL="285750" marR="0" lvl="0" indent="-285750" algn="l" rtl="0">
-              <a:lnSpc>
-                <a:spcPct val="100000"/>
-              </a:lnSpc>
-              <a:spcBef>
-                <a:spcPts val="0"/>
-              </a:spcBef>
-              <a:spcAft>
-                <a:spcPts val="0"/>
-              </a:spcAft>
-              <a:buClr>
-                <a:srgbClr val="000000"/>
-              </a:buClr>
-              <a:buSzPts val="1600"/>
-              <a:buFont typeface="Arial" panose="020B0604020202020204" pitchFamily="34" charset="0"/>
-              <a:buChar char="•"/>
-            </a:pPr>
-            <a:endParaRPr lang="en-US" altLang="ko-KR" sz="1800">
-              <a:solidFill>
-                <a:schemeClr val="dk1"/>
-              </a:solidFill>
-              <a:latin typeface="페이퍼로지 4 Regular" charset="-127"/>
-              <a:ea typeface="페이퍼로지 4 Regular" charset="-127"/>
-              <a:cs typeface="Montserrat SemiBold"/>
-              <a:sym typeface="Montserrat SemiBold"/>
-            </a:endParaRPr>
-          </a:p>
-          <a:p>
-            <a:pPr marL="285750" marR="0" lvl="0" indent="-285750" algn="l" rtl="0">
-              <a:lnSpc>
-                <a:spcPct val="100000"/>
-              </a:lnSpc>
-              <a:spcBef>
-                <a:spcPts val="0"/>
-              </a:spcBef>
-              <a:spcAft>
-                <a:spcPts val="0"/>
-              </a:spcAft>
-              <a:buClr>
-                <a:srgbClr val="000000"/>
-              </a:buClr>
-              <a:buSzPts val="1600"/>
-              <a:buFont typeface="Arial" panose="020B0604020202020204" pitchFamily="34" charset="0"/>
-              <a:buChar char="•"/>
-            </a:pPr>
-            <a:r>
-              <a:rPr lang="ko-KR" altLang="en-US" sz="1800">
-                <a:solidFill>
-                  <a:schemeClr val="dk1"/>
-                </a:solidFill>
-                <a:latin typeface="페이퍼로지 4 Regular" charset="-127"/>
-                <a:ea typeface="페이퍼로지 4 Regular" charset="-127"/>
-                <a:cs typeface="Montserrat SemiBold"/>
-                <a:sym typeface="Montserrat SemiBold"/>
-              </a:rPr>
-              <a:t>어디에 사용되는지</a:t>
-            </a:r>
-            <a:endParaRPr lang="en-US" altLang="ko-KR" sz="1800">
-              <a:solidFill>
-                <a:schemeClr val="dk1"/>
-              </a:solidFill>
-              <a:latin typeface="페이퍼로지 4 Regular" charset="-127"/>
-              <a:ea typeface="페이퍼로지 4 Regular" charset="-127"/>
-              <a:cs typeface="Montserrat SemiBold"/>
-              <a:sym typeface="Montserrat SemiBold"/>
-            </a:endParaRPr>
-          </a:p>
-          <a:p>
-            <a:pPr marL="285750" marR="0" lvl="0" indent="-285750" algn="l" rtl="0">
-              <a:lnSpc>
-                <a:spcPct val="100000"/>
-              </a:lnSpc>
-              <a:spcBef>
-                <a:spcPts val="0"/>
-              </a:spcBef>
-              <a:spcAft>
-                <a:spcPts val="0"/>
-              </a:spcAft>
-              <a:buClr>
-                <a:srgbClr val="000000"/>
-              </a:buClr>
-              <a:buSzPts val="1600"/>
-              <a:buFont typeface="Arial" panose="020B0604020202020204" pitchFamily="34" charset="0"/>
-              <a:buChar char="•"/>
-            </a:pPr>
-            <a:endParaRPr lang="en-US" altLang="ko-KR" sz="1800">
-              <a:solidFill>
-                <a:schemeClr val="dk1"/>
-              </a:solidFill>
-              <a:latin typeface="페이퍼로지 4 Regular" charset="-127"/>
-              <a:ea typeface="페이퍼로지 4 Regular" charset="-127"/>
-              <a:cs typeface="Montserrat SemiBold"/>
-              <a:sym typeface="Montserrat SemiBold"/>
-            </a:endParaRPr>
-          </a:p>
-          <a:p>
-            <a:pPr marL="285750" marR="0" lvl="0" indent="-285750" algn="l" rtl="0">
-              <a:lnSpc>
-                <a:spcPct val="100000"/>
-              </a:lnSpc>
-              <a:spcBef>
-                <a:spcPts val="0"/>
-              </a:spcBef>
-              <a:spcAft>
-                <a:spcPts val="0"/>
-              </a:spcAft>
-              <a:buClr>
-                <a:srgbClr val="000000"/>
-              </a:buClr>
-              <a:buSzPts val="1600"/>
-              <a:buFont typeface="Arial" panose="020B0604020202020204" pitchFamily="34" charset="0"/>
-              <a:buChar char="•"/>
-            </a:pPr>
-            <a:r>
-              <a:rPr lang="ko-KR" altLang="en-US" sz="1800">
-                <a:solidFill>
-                  <a:schemeClr val="dk1"/>
-                </a:solidFill>
-                <a:latin typeface="페이퍼로지 4 Regular" charset="-127"/>
-                <a:ea typeface="페이퍼로지 4 Regular" charset="-127"/>
-                <a:cs typeface="Montserrat SemiBold"/>
-                <a:sym typeface="Montserrat SemiBold"/>
-              </a:rPr>
-              <a:t>내용을 찾아보면서 생긴 의문에 대한 탐색</a:t>
-            </a:r>
-            <a:r>
-              <a:rPr lang="en-US" altLang="ko-KR" sz="1800">
-                <a:solidFill>
-                  <a:schemeClr val="dk1"/>
-                </a:solidFill>
-                <a:latin typeface="페이퍼로지 4 Regular" charset="-127"/>
-                <a:ea typeface="페이퍼로지 4 Regular" charset="-127"/>
-                <a:cs typeface="Montserrat SemiBold"/>
-                <a:sym typeface="Montserrat SemiBold"/>
-              </a:rPr>
-              <a:t>..</a:t>
-            </a:r>
-          </a:p>
-          <a:p>
-            <a:pPr marL="285750" marR="0" lvl="0" indent="-285750" algn="l" rtl="0">
-              <a:lnSpc>
-                <a:spcPct val="100000"/>
-              </a:lnSpc>
-              <a:spcBef>
-                <a:spcPts val="0"/>
-              </a:spcBef>
-              <a:spcAft>
-                <a:spcPts val="0"/>
-              </a:spcAft>
-              <a:buClr>
-                <a:srgbClr val="000000"/>
-              </a:buClr>
-              <a:buSzPts val="1600"/>
-              <a:buFont typeface="Arial" panose="020B0604020202020204" pitchFamily="34" charset="0"/>
-              <a:buChar char="•"/>
-            </a:pPr>
-            <a:endParaRPr lang="en-US" altLang="ko-KR" sz="800">
-              <a:solidFill>
-                <a:schemeClr val="dk1"/>
-              </a:solidFill>
-              <a:latin typeface="페이퍼로지 4 Regular" charset="-127"/>
-              <a:ea typeface="페이퍼로지 4 Regular" charset="-127"/>
-              <a:cs typeface="Montserrat SemiBold"/>
-              <a:sym typeface="Montserrat SemiBold"/>
-            </a:endParaRPr>
-          </a:p>
-          <a:p>
-            <a:pPr marL="285750" lvl="2" indent="346075">
-              <a:buSzPts val="1600"/>
-              <a:buFont typeface="Arial" panose="020B0604020202020204" pitchFamily="34" charset="0"/>
-              <a:buChar char="•"/>
-            </a:pPr>
-            <a:r>
-              <a:rPr lang="en-US" altLang="ko-KR" sz="1600">
-                <a:solidFill>
-                  <a:schemeClr val="tx1">
-                    <a:lumMod val="65000"/>
-                    <a:lumOff val="35000"/>
-                  </a:schemeClr>
-                </a:solidFill>
-                <a:latin typeface="페이퍼로지 4 Regular" charset="-127"/>
-                <a:ea typeface="페이퍼로지 4 Regular" charset="-127"/>
-                <a:cs typeface="Montserrat SemiBold"/>
-                <a:sym typeface="Montserrat SemiBold"/>
-              </a:rPr>
-              <a:t>CheckSum?</a:t>
-            </a:r>
-          </a:p>
-          <a:p>
-            <a:pPr marL="285750" lvl="2" indent="346075">
-              <a:buSzPts val="1600"/>
-              <a:buFont typeface="Arial" panose="020B0604020202020204" pitchFamily="34" charset="0"/>
-              <a:buChar char="•"/>
-            </a:pPr>
-            <a:r>
-              <a:rPr lang="en-US" altLang="ko-KR" sz="1600">
-                <a:solidFill>
-                  <a:schemeClr val="tx1">
-                    <a:lumMod val="65000"/>
-                    <a:lumOff val="35000"/>
-                  </a:schemeClr>
-                </a:solidFill>
-                <a:latin typeface="페이퍼로지 4 Regular" charset="-127"/>
-                <a:ea typeface="페이퍼로지 4 Regular" charset="-127"/>
-                <a:cs typeface="Montserrat SemiBold"/>
-                <a:sym typeface="Montserrat SemiBold"/>
-              </a:rPr>
-              <a:t>AES-256-GCM </a:t>
-            </a:r>
-          </a:p>
-          <a:p>
-            <a:pPr marL="285750" lvl="2" indent="346075">
-              <a:buSzPts val="1600"/>
-              <a:buFont typeface="Arial" panose="020B0604020202020204" pitchFamily="34" charset="0"/>
-              <a:buChar char="•"/>
-            </a:pPr>
-            <a:r>
-              <a:rPr lang="en-US" altLang="ko-KR" sz="1600">
-                <a:solidFill>
-                  <a:schemeClr val="tx1">
-                    <a:lumMod val="65000"/>
-                    <a:lumOff val="35000"/>
-                  </a:schemeClr>
-                </a:solidFill>
-                <a:latin typeface="페이퍼로지 4 Regular" charset="-127"/>
-                <a:ea typeface="페이퍼로지 4 Regular" charset="-127"/>
-                <a:cs typeface="Montserrat SemiBold"/>
-                <a:sym typeface="Montserrat SemiBold"/>
-              </a:rPr>
-              <a:t>Google Chrome password_value Encryption</a:t>
-            </a:r>
-          </a:p>
-          <a:p>
-            <a:pPr marL="285750" lvl="2">
-              <a:buSzPts val="1600"/>
-            </a:pPr>
-            <a:endParaRPr lang="en-US" altLang="ko-KR" sz="1600">
-              <a:solidFill>
-                <a:schemeClr val="tx1">
-                  <a:lumMod val="65000"/>
-                  <a:lumOff val="35000"/>
-                </a:schemeClr>
-              </a:solidFill>
-              <a:latin typeface="페이퍼로지 4 Regular" charset="-127"/>
-              <a:ea typeface="페이퍼로지 4 Regular" charset="-127"/>
-              <a:cs typeface="Montserrat SemiBold"/>
-              <a:sym typeface="Montserrat SemiBold"/>
-            </a:endParaRPr>
-          </a:p>
-          <a:p>
-            <a:pPr marL="285750" lvl="2" indent="157163">
-              <a:buSzPts val="1600"/>
-              <a:buFont typeface="Arial" panose="020B0604020202020204" pitchFamily="34" charset="0"/>
-              <a:buChar char="•"/>
-            </a:pPr>
-            <a:endParaRPr lang="en-US" altLang="ko-KR" sz="1800" dirty="0">
-              <a:solidFill>
-                <a:schemeClr val="dk1"/>
-              </a:solidFill>
-              <a:latin typeface="페이퍼로지 4 Regular" charset="-127"/>
-              <a:ea typeface="페이퍼로지 4 Regular" charset="-127"/>
-              <a:cs typeface="Montserrat SemiBold"/>
-              <a:sym typeface="Montserrat SemiBold"/>
-            </a:endParaRPr>
-          </a:p>
-        </p:txBody>
-      </p:sp>
-      <p:sp>
-        <p:nvSpPr>
-          <p:cNvPr id="170" name="Google Shape;170;p19">
-            <a:extLst>
-              <a:ext uri="{FF2B5EF4-FFF2-40B4-BE49-F238E27FC236}">
-                <a16:creationId xmlns:a16="http://schemas.microsoft.com/office/drawing/2014/main" id="{1AFE6C03-798D-CD87-1C91-C47CCD364607}"/>
-              </a:ext>
-            </a:extLst>
-          </p:cNvPr>
-          <p:cNvSpPr txBox="1">
-            <a:spLocks noGrp="1"/>
-          </p:cNvSpPr>
-          <p:nvPr>
-            <p:ph type="title"/>
-          </p:nvPr>
-        </p:nvSpPr>
-        <p:spPr>
-          <a:xfrm>
-            <a:off x="452550" y="121018"/>
-            <a:ext cx="8238900" cy="561600"/>
-          </a:xfrm>
-          <a:prstGeom prst="rect">
-            <a:avLst/>
-          </a:prstGeom>
-          <a:ln>
-            <a:noFill/>
-          </a:ln>
-        </p:spPr>
-        <p:txBody>
-          <a:bodyPr spcFirstLastPara="1" wrap="square" lIns="91425" tIns="91425" rIns="91425" bIns="91425" anchor="t" anchorCtr="0">
-            <a:noAutofit/>
-          </a:bodyPr>
-          <a:lstStyle/>
-          <a:p>
-            <a:pPr lvl="0"/>
-            <a:r>
-              <a:rPr lang="en" altLang="ko-KR">
-                <a:latin typeface="페이퍼로지 6 SemiBold" pitchFamily="2" charset="-127"/>
-                <a:ea typeface="페이퍼로지 6 SemiBold" pitchFamily="2" charset="-127"/>
-              </a:rPr>
-              <a:t>Overview</a:t>
-            </a:r>
-            <a:endParaRPr dirty="0"/>
-          </a:p>
-        </p:txBody>
-      </p:sp>
-      <p:cxnSp>
-        <p:nvCxnSpPr>
-          <p:cNvPr id="3" name="직선 연결선 2">
-            <a:extLst>
-              <a:ext uri="{FF2B5EF4-FFF2-40B4-BE49-F238E27FC236}">
-                <a16:creationId xmlns:a16="http://schemas.microsoft.com/office/drawing/2014/main" id="{2F9182BB-CE65-7A7F-D6FF-F08D370ACE56}"/>
-              </a:ext>
-            </a:extLst>
-          </p:cNvPr>
-          <p:cNvCxnSpPr/>
-          <p:nvPr/>
-        </p:nvCxnSpPr>
-        <p:spPr>
-          <a:xfrm>
-            <a:off x="387275" y="763285"/>
-            <a:ext cx="8240358" cy="0"/>
-          </a:xfrm>
-          <a:prstGeom prst="line">
-            <a:avLst/>
-          </a:prstGeom>
-          <a:ln w="38100">
-            <a:solidFill>
-              <a:srgbClr val="51EEBC"/>
-            </a:solidFill>
-          </a:ln>
-        </p:spPr>
-        <p:style>
-          <a:lnRef idx="1">
-            <a:schemeClr val="accent1"/>
-          </a:lnRef>
-          <a:fillRef idx="0">
-            <a:schemeClr val="accent1"/>
-          </a:fillRef>
-          <a:effectRef idx="0">
-            <a:schemeClr val="accent1"/>
-          </a:effectRef>
-          <a:fontRef idx="minor">
-            <a:schemeClr val="tx1"/>
-          </a:fontRef>
-        </p:style>
-      </p:cxnSp>
-    </p:spTree>
-    <p:extLst>
-      <p:ext uri="{BB962C8B-B14F-4D97-AF65-F5344CB8AC3E}">
-        <p14:creationId xmlns:p14="http://schemas.microsoft.com/office/powerpoint/2010/main" val="2338792561"/>
-      </p:ext>
-    </p:extLst>
-  </p:cSld>
-  <p:clrMapOvr>
-    <a:masterClrMapping/>
-  </p:clrMapOvr>
-</p:sld>
-</file>
-
-<file path=ppt/slides/slide20.xml><?xml version="1.0" encoding="utf-8"?>
+<file path=ppt/slides/slide22.xml><?xml version="1.0" encoding="utf-8"?>
 <p:sld xmlns:a="http://schemas.openxmlformats.org/drawingml/2006/main" xmlns:r="http://schemas.openxmlformats.org/officeDocument/2006/relationships" xmlns:p="http://schemas.openxmlformats.org/presentationml/2006/main">
   <p:cSld>
     <p:spTree>
@@ -19941,7 +24133,7 @@
 </p:sld>
 </file>
 
-<file path=ppt/slides/slide21.xml><?xml version="1.0" encoding="utf-8"?>
+<file path=ppt/slides/slide23.xml><?xml version="1.0" encoding="utf-8"?>
 <p:sld xmlns:a="http://schemas.openxmlformats.org/drawingml/2006/main" xmlns:r="http://schemas.openxmlformats.org/officeDocument/2006/relationships" xmlns:p="http://schemas.openxmlformats.org/presentationml/2006/main">
   <p:cSld>
     <p:spTree>
@@ -20301,7 +24493,7 @@
 </p:sld>
 </file>
 
-<file path=ppt/slides/slide22.xml><?xml version="1.0" encoding="utf-8"?>
+<file path=ppt/slides/slide24.xml><?xml version="1.0" encoding="utf-8"?>
 <p:sld xmlns:a="http://schemas.openxmlformats.org/drawingml/2006/main" xmlns:r="http://schemas.openxmlformats.org/officeDocument/2006/relationships" xmlns:p="http://schemas.openxmlformats.org/presentationml/2006/main">
   <p:cSld>
     <p:spTree>
@@ -21546,7 +25738,7 @@
           <p:nvPr>
             <p:extLst>
               <p:ext uri="{D42A27DB-BD31-4B8C-83A1-F6EECF244321}">
-                <p14:modId xmlns:p14="http://schemas.microsoft.com/office/powerpoint/2010/main" val="2486197062"/>
+                <p14:modId xmlns:p14="http://schemas.microsoft.com/office/powerpoint/2010/main" val="3454548213"/>
               </p:ext>
             </p:extLst>
           </p:nvPr>
@@ -21599,12 +25791,15 @@
                     <a:p>
                       <a:pPr latinLnBrk="1"/>
                       <a:r>
-                        <a:rPr lang="ko-KR" altLang="en-US"/>
+                        <a:rPr lang="ko-KR" altLang="en-US">
+                          <a:latin typeface="페이퍼로지 4 Regular" pitchFamily="2" charset="-127"/>
+                          <a:ea typeface="페이퍼로지 4 Regular" pitchFamily="2" charset="-127"/>
+                        </a:rPr>
                         <a:t>구분</a:t>
                       </a:r>
                     </a:p>
                   </a:txBody>
-                  <a:tcPr/>
+                  <a:tcPr anchor="ctr"/>
                 </a:tc>
                 <a:tc>
                   <a:txBody>
@@ -21613,12 +25808,15 @@
                     <a:p>
                       <a:pPr latinLnBrk="1"/>
                       <a:r>
-                        <a:rPr lang="ko-KR" altLang="en-US"/>
+                        <a:rPr lang="ko-KR" altLang="en-US">
+                          <a:latin typeface="페이퍼로지 4 Regular" pitchFamily="2" charset="-127"/>
+                          <a:ea typeface="페이퍼로지 4 Regular" pitchFamily="2" charset="-127"/>
+                        </a:rPr>
                         <a:t>알고리즘 구조</a:t>
                       </a:r>
                     </a:p>
                   </a:txBody>
-                  <a:tcPr/>
+                  <a:tcPr anchor="ctr"/>
                 </a:tc>
                 <a:tc>
                   <a:txBody>
@@ -21627,12 +25825,15 @@
                     <a:p>
                       <a:pPr latinLnBrk="1"/>
                       <a:r>
-                        <a:rPr lang="ko-KR" altLang="en-US"/>
+                        <a:rPr lang="ko-KR" altLang="en-US">
+                          <a:latin typeface="페이퍼로지 4 Regular" pitchFamily="2" charset="-127"/>
+                          <a:ea typeface="페이퍼로지 4 Regular" pitchFamily="2" charset="-127"/>
+                        </a:rPr>
                         <a:t>신뢰도</a:t>
                       </a:r>
                     </a:p>
                   </a:txBody>
-                  <a:tcPr/>
+                  <a:tcPr anchor="ctr"/>
                 </a:tc>
                 <a:tc>
                   <a:txBody>
@@ -21641,12 +25842,15 @@
                     <a:p>
                       <a:pPr latinLnBrk="1"/>
                       <a:r>
-                        <a:rPr lang="ko-KR" altLang="en-US"/>
+                        <a:rPr lang="ko-KR" altLang="en-US">
+                          <a:latin typeface="페이퍼로지 4 Regular" pitchFamily="2" charset="-127"/>
+                          <a:ea typeface="페이퍼로지 4 Regular" pitchFamily="2" charset="-127"/>
+                        </a:rPr>
                         <a:t>비고</a:t>
                       </a:r>
                     </a:p>
                   </a:txBody>
-                  <a:tcPr/>
+                  <a:tcPr anchor="ctr"/>
                 </a:tc>
                 <a:extLst>
                   <a:ext uri="{0D108BD9-81ED-4DB2-BD59-A6C34878D82A}">
@@ -21662,13 +25866,19 @@
                     <a:p>
                       <a:pPr latinLnBrk="1"/>
                       <a:r>
-                        <a:rPr lang="en-US" altLang="ko-KR"/>
+                        <a:rPr lang="en-US" altLang="ko-KR">
+                          <a:latin typeface="페이퍼로지 4 Regular" pitchFamily="2" charset="-127"/>
+                          <a:ea typeface="페이퍼로지 4 Regular" pitchFamily="2" charset="-127"/>
+                        </a:rPr>
                         <a:t>MD5</a:t>
                       </a:r>
-                      <a:endParaRPr lang="ko-KR" altLang="en-US"/>
+                      <a:endParaRPr lang="ko-KR" altLang="en-US">
+                        <a:latin typeface="페이퍼로지 4 Regular" pitchFamily="2" charset="-127"/>
+                        <a:ea typeface="페이퍼로지 4 Regular" pitchFamily="2" charset="-127"/>
+                      </a:endParaRPr>
                     </a:p>
                   </a:txBody>
-                  <a:tcPr/>
+                  <a:tcPr anchor="ctr"/>
                 </a:tc>
                 <a:tc>
                   <a:txBody>
@@ -21677,24 +25887,36 @@
                     <a:p>
                       <a:pPr latinLnBrk="1"/>
                       <a:r>
-                        <a:rPr lang="en-US" altLang="ko-KR"/>
+                        <a:rPr lang="en-US" altLang="ko-KR">
+                          <a:latin typeface="페이퍼로지 4 Regular" pitchFamily="2" charset="-127"/>
+                          <a:ea typeface="페이퍼로지 4 Regular" pitchFamily="2" charset="-127"/>
+                        </a:rPr>
                         <a:t>512bit </a:t>
                       </a:r>
                       <a:r>
-                        <a:rPr lang="ko-KR" altLang="en-US"/>
+                        <a:rPr lang="ko-KR" altLang="en-US">
+                          <a:latin typeface="페이퍼로지 4 Regular" pitchFamily="2" charset="-127"/>
+                          <a:ea typeface="페이퍼로지 4 Regular" pitchFamily="2" charset="-127"/>
+                        </a:rPr>
                         <a:t>블록을 </a:t>
                       </a:r>
                       <a:r>
-                        <a:rPr lang="en-US" altLang="ko-KR"/>
+                        <a:rPr lang="en-US" altLang="ko-KR">
+                          <a:latin typeface="페이퍼로지 4 Regular" pitchFamily="2" charset="-127"/>
+                          <a:ea typeface="페이퍼로지 4 Regular" pitchFamily="2" charset="-127"/>
+                        </a:rPr>
                         <a:t>64</a:t>
                       </a:r>
                       <a:r>
-                        <a:rPr lang="ko-KR" altLang="en-US"/>
+                        <a:rPr lang="ko-KR" altLang="en-US">
+                          <a:latin typeface="페이퍼로지 4 Regular" pitchFamily="2" charset="-127"/>
+                          <a:ea typeface="페이퍼로지 4 Regular" pitchFamily="2" charset="-127"/>
+                        </a:rPr>
                         <a:t>회 연산</a:t>
                       </a:r>
                     </a:p>
                   </a:txBody>
-                  <a:tcPr/>
+                  <a:tcPr anchor="ctr"/>
                 </a:tc>
                 <a:tc>
                   <a:txBody>
@@ -21703,12 +25925,15 @@
                     <a:p>
                       <a:pPr latinLnBrk="1"/>
                       <a:r>
-                        <a:rPr lang="ko-KR" altLang="en-US"/>
+                        <a:rPr lang="ko-KR" altLang="en-US">
+                          <a:latin typeface="페이퍼로지 4 Regular" pitchFamily="2" charset="-127"/>
+                          <a:ea typeface="페이퍼로지 4 Regular" pitchFamily="2" charset="-127"/>
+                        </a:rPr>
                         <a:t>낮음</a:t>
                       </a:r>
                     </a:p>
                   </a:txBody>
-                  <a:tcPr/>
+                  <a:tcPr anchor="ctr"/>
                 </a:tc>
                 <a:tc>
                   <a:txBody>
@@ -21717,12 +25942,15 @@
                     <a:p>
                       <a:pPr latinLnBrk="1"/>
                       <a:r>
-                        <a:rPr lang="ko-KR" altLang="en-US"/>
+                        <a:rPr lang="ko-KR" altLang="en-US">
+                          <a:latin typeface="페이퍼로지 4 Regular" pitchFamily="2" charset="-127"/>
+                          <a:ea typeface="페이퍼로지 4 Regular" pitchFamily="2" charset="-127"/>
+                        </a:rPr>
                         <a:t>충돌 성공 사례 존재</a:t>
                       </a:r>
                     </a:p>
                   </a:txBody>
-                  <a:tcPr/>
+                  <a:tcPr anchor="ctr"/>
                 </a:tc>
                 <a:extLst>
                   <a:ext uri="{0D108BD9-81ED-4DB2-BD59-A6C34878D82A}">
@@ -21738,13 +25966,19 @@
                     <a:p>
                       <a:pPr latinLnBrk="1"/>
                       <a:r>
-                        <a:rPr lang="en-US" altLang="ko-KR"/>
+                        <a:rPr lang="en-US" altLang="ko-KR">
+                          <a:latin typeface="페이퍼로지 4 Regular" pitchFamily="2" charset="-127"/>
+                          <a:ea typeface="페이퍼로지 4 Regular" pitchFamily="2" charset="-127"/>
+                        </a:rPr>
                         <a:t>SHA-1</a:t>
                       </a:r>
-                      <a:endParaRPr lang="ko-KR" altLang="en-US"/>
+                      <a:endParaRPr lang="ko-KR" altLang="en-US">
+                        <a:latin typeface="페이퍼로지 4 Regular" pitchFamily="2" charset="-127"/>
+                        <a:ea typeface="페이퍼로지 4 Regular" pitchFamily="2" charset="-127"/>
+                      </a:endParaRPr>
                     </a:p>
                   </a:txBody>
-                  <a:tcPr/>
+                  <a:tcPr anchor="ctr"/>
                 </a:tc>
                 <a:tc>
                   <a:txBody>
@@ -21753,24 +25987,36 @@
                     <a:p>
                       <a:pPr latinLnBrk="1"/>
                       <a:r>
-                        <a:rPr lang="en-US" altLang="ko-KR"/>
+                        <a:rPr lang="en-US" altLang="ko-KR">
+                          <a:latin typeface="페이퍼로지 4 Regular" pitchFamily="2" charset="-127"/>
+                          <a:ea typeface="페이퍼로지 4 Regular" pitchFamily="2" charset="-127"/>
+                        </a:rPr>
                         <a:t>160bit</a:t>
                       </a:r>
                       <a:r>
-                        <a:rPr lang="ko-KR" altLang="en-US"/>
+                        <a:rPr lang="ko-KR" altLang="en-US">
+                          <a:latin typeface="페이퍼로지 4 Regular" pitchFamily="2" charset="-127"/>
+                          <a:ea typeface="페이퍼로지 4 Regular" pitchFamily="2" charset="-127"/>
+                        </a:rPr>
                         <a:t> 출력</a:t>
                       </a:r>
                       <a:r>
-                        <a:rPr lang="en-US" altLang="ko-KR"/>
+                        <a:rPr lang="en-US" altLang="ko-KR">
+                          <a:latin typeface="페이퍼로지 4 Regular" pitchFamily="2" charset="-127"/>
+                          <a:ea typeface="페이퍼로지 4 Regular" pitchFamily="2" charset="-127"/>
+                        </a:rPr>
                         <a:t>, 80</a:t>
                       </a:r>
                       <a:r>
-                        <a:rPr lang="ko-KR" altLang="en-US"/>
+                        <a:rPr lang="ko-KR" altLang="en-US">
+                          <a:latin typeface="페이퍼로지 4 Regular" pitchFamily="2" charset="-127"/>
+                          <a:ea typeface="페이퍼로지 4 Regular" pitchFamily="2" charset="-127"/>
+                        </a:rPr>
                         <a:t>회 연산</a:t>
                       </a:r>
                     </a:p>
                   </a:txBody>
-                  <a:tcPr/>
+                  <a:tcPr anchor="ctr"/>
                 </a:tc>
                 <a:tc>
                   <a:txBody>
@@ -21779,12 +26025,15 @@
                     <a:p>
                       <a:pPr latinLnBrk="1"/>
                       <a:r>
-                        <a:rPr lang="ko-KR" altLang="en-US"/>
+                        <a:rPr lang="ko-KR" altLang="en-US">
+                          <a:latin typeface="페이퍼로지 4 Regular" pitchFamily="2" charset="-127"/>
+                          <a:ea typeface="페이퍼로지 4 Regular" pitchFamily="2" charset="-127"/>
+                        </a:rPr>
                         <a:t>낮음</a:t>
                       </a:r>
                     </a:p>
                   </a:txBody>
-                  <a:tcPr/>
+                  <a:tcPr anchor="ctr"/>
                 </a:tc>
                 <a:tc>
                   <a:txBody>
@@ -21793,12 +26042,15 @@
                     <a:p>
                       <a:pPr latinLnBrk="1"/>
                       <a:r>
-                        <a:rPr lang="ko-KR" altLang="en-US"/>
+                        <a:rPr lang="ko-KR" altLang="en-US">
+                          <a:latin typeface="페이퍼로지 4 Regular" pitchFamily="2" charset="-127"/>
+                          <a:ea typeface="페이퍼로지 4 Regular" pitchFamily="2" charset="-127"/>
+                        </a:rPr>
                         <a:t>충돌 성공 사례 존재</a:t>
                       </a:r>
                     </a:p>
                   </a:txBody>
-                  <a:tcPr/>
+                  <a:tcPr anchor="ctr"/>
                 </a:tc>
                 <a:extLst>
                   <a:ext uri="{0D108BD9-81ED-4DB2-BD59-A6C34878D82A}">
@@ -21814,13 +26066,19 @@
                     <a:p>
                       <a:pPr latinLnBrk="1"/>
                       <a:r>
-                        <a:rPr lang="en-US" altLang="ko-KR"/>
+                        <a:rPr lang="en-US" altLang="ko-KR">
+                          <a:latin typeface="페이퍼로지 4 Regular" pitchFamily="2" charset="-127"/>
+                          <a:ea typeface="페이퍼로지 4 Regular" pitchFamily="2" charset="-127"/>
+                        </a:rPr>
                         <a:t>SHA-256</a:t>
                       </a:r>
-                      <a:endParaRPr lang="ko-KR" altLang="en-US"/>
+                      <a:endParaRPr lang="ko-KR" altLang="en-US">
+                        <a:latin typeface="페이퍼로지 4 Regular" pitchFamily="2" charset="-127"/>
+                        <a:ea typeface="페이퍼로지 4 Regular" pitchFamily="2" charset="-127"/>
+                      </a:endParaRPr>
                     </a:p>
                   </a:txBody>
-                  <a:tcPr/>
+                  <a:tcPr anchor="ctr"/>
                 </a:tc>
                 <a:tc>
                   <a:txBody>
@@ -21829,37 +26087,61 @@
                     <a:p>
                       <a:pPr latinLnBrk="1"/>
                       <a:r>
-                        <a:rPr lang="en-US" altLang="ko-KR"/>
+                        <a:rPr lang="en-US" altLang="ko-KR">
+                          <a:latin typeface="페이퍼로지 4 Regular" pitchFamily="2" charset="-127"/>
+                          <a:ea typeface="페이퍼로지 4 Regular" pitchFamily="2" charset="-127"/>
+                        </a:rPr>
                         <a:t>256bit</a:t>
                       </a:r>
                       <a:r>
-                        <a:rPr lang="ko-KR" altLang="en-US"/>
+                        <a:rPr lang="ko-KR" altLang="en-US">
+                          <a:latin typeface="페이퍼로지 4 Regular" pitchFamily="2" charset="-127"/>
+                          <a:ea typeface="페이퍼로지 4 Regular" pitchFamily="2" charset="-127"/>
+                        </a:rPr>
                         <a:t> 출력</a:t>
                       </a:r>
                       <a:r>
-                        <a:rPr lang="en-US" altLang="ko-KR"/>
+                        <a:rPr lang="en-US" altLang="ko-KR">
+                          <a:latin typeface="페이퍼로지 4 Regular" pitchFamily="2" charset="-127"/>
+                          <a:ea typeface="페이퍼로지 4 Regular" pitchFamily="2" charset="-127"/>
+                        </a:rPr>
                         <a:t>, 64</a:t>
                       </a:r>
                       <a:r>
-                        <a:rPr lang="ko-KR" altLang="en-US"/>
+                        <a:rPr lang="ko-KR" altLang="en-US">
+                          <a:latin typeface="페이퍼로지 4 Regular" pitchFamily="2" charset="-127"/>
+                          <a:ea typeface="페이퍼로지 4 Regular" pitchFamily="2" charset="-127"/>
+                        </a:rPr>
                         <a:t>회 연산</a:t>
                       </a:r>
                       <a:r>
-                        <a:rPr lang="en-US" altLang="ko-KR"/>
+                        <a:rPr lang="en-US" altLang="ko-KR">
+                          <a:latin typeface="페이퍼로지 4 Regular" pitchFamily="2" charset="-127"/>
+                          <a:ea typeface="페이퍼로지 4 Regular" pitchFamily="2" charset="-127"/>
+                        </a:rPr>
                         <a:t>(</a:t>
                       </a:r>
                       <a:r>
-                        <a:rPr lang="ko-KR" altLang="en-US"/>
+                        <a:rPr lang="ko-KR" altLang="en-US">
+                          <a:latin typeface="페이퍼로지 4 Regular" pitchFamily="2" charset="-127"/>
+                          <a:ea typeface="페이퍼로지 4 Regular" pitchFamily="2" charset="-127"/>
+                        </a:rPr>
                         <a:t>복잡도 ▲</a:t>
                       </a:r>
                       <a:r>
-                        <a:rPr lang="en-US" altLang="ko-KR"/>
+                        <a:rPr lang="en-US" altLang="ko-KR">
+                          <a:latin typeface="페이퍼로지 4 Regular" pitchFamily="2" charset="-127"/>
+                          <a:ea typeface="페이퍼로지 4 Regular" pitchFamily="2" charset="-127"/>
+                        </a:rPr>
                         <a:t>)</a:t>
                       </a:r>
-                      <a:endParaRPr lang="ko-KR" altLang="en-US"/>
+                      <a:endParaRPr lang="ko-KR" altLang="en-US">
+                        <a:latin typeface="페이퍼로지 4 Regular" pitchFamily="2" charset="-127"/>
+                        <a:ea typeface="페이퍼로지 4 Regular" pitchFamily="2" charset="-127"/>
+                      </a:endParaRPr>
                     </a:p>
                   </a:txBody>
-                  <a:tcPr/>
+                  <a:tcPr anchor="ctr"/>
                 </a:tc>
                 <a:tc>
                   <a:txBody>
@@ -21868,12 +26150,15 @@
                     <a:p>
                       <a:pPr latinLnBrk="1"/>
                       <a:r>
-                        <a:rPr lang="ko-KR" altLang="en-US"/>
+                        <a:rPr lang="ko-KR" altLang="en-US">
+                          <a:latin typeface="페이퍼로지 4 Regular" pitchFamily="2" charset="-127"/>
+                          <a:ea typeface="페이퍼로지 4 Regular" pitchFamily="2" charset="-127"/>
+                        </a:rPr>
                         <a:t>매우 높음</a:t>
                       </a:r>
                     </a:p>
                   </a:txBody>
-                  <a:tcPr/>
+                  <a:tcPr anchor="ctr"/>
                 </a:tc>
                 <a:tc>
                   <a:txBody>
@@ -21882,12 +26167,15 @@
                     <a:p>
                       <a:pPr latinLnBrk="1"/>
                       <a:r>
-                        <a:rPr lang="ko-KR" altLang="en-US"/>
+                        <a:rPr lang="ko-KR" altLang="en-US">
+                          <a:latin typeface="페이퍼로지 4 Regular" pitchFamily="2" charset="-127"/>
+                          <a:ea typeface="페이퍼로지 4 Regular" pitchFamily="2" charset="-127"/>
+                        </a:rPr>
                         <a:t>표준 알고리즘</a:t>
                       </a:r>
                     </a:p>
                   </a:txBody>
-                  <a:tcPr/>
+                  <a:tcPr anchor="ctr"/>
                 </a:tc>
                 <a:extLst>
                   <a:ext uri="{0D108BD9-81ED-4DB2-BD59-A6C34878D82A}">
@@ -21903,13 +26191,19 @@
                     <a:p>
                       <a:pPr latinLnBrk="1"/>
                       <a:r>
-                        <a:rPr lang="en-US" altLang="ko-KR"/>
+                        <a:rPr lang="en-US" altLang="ko-KR">
+                          <a:latin typeface="페이퍼로지 4 Regular" pitchFamily="2" charset="-127"/>
+                          <a:ea typeface="페이퍼로지 4 Regular" pitchFamily="2" charset="-127"/>
+                        </a:rPr>
                         <a:t>SHA-3</a:t>
                       </a:r>
-                      <a:endParaRPr lang="ko-KR" altLang="en-US"/>
+                      <a:endParaRPr lang="ko-KR" altLang="en-US">
+                        <a:latin typeface="페이퍼로지 4 Regular" pitchFamily="2" charset="-127"/>
+                        <a:ea typeface="페이퍼로지 4 Regular" pitchFamily="2" charset="-127"/>
+                      </a:endParaRPr>
                     </a:p>
                   </a:txBody>
-                  <a:tcPr/>
+                  <a:tcPr anchor="ctr"/>
                 </a:tc>
                 <a:tc>
                   <a:txBody>
@@ -21918,21 +26212,33 @@
                     <a:p>
                       <a:pPr latinLnBrk="1"/>
                       <a:r>
-                        <a:rPr lang="en-US" altLang="ko-KR"/>
+                        <a:rPr lang="en-US" altLang="ko-KR">
+                          <a:latin typeface="페이퍼로지 4 Regular" pitchFamily="2" charset="-127"/>
+                          <a:ea typeface="페이퍼로지 4 Regular" pitchFamily="2" charset="-127"/>
+                        </a:rPr>
                         <a:t>Sponge </a:t>
                       </a:r>
                       <a:r>
-                        <a:rPr lang="ko-KR" altLang="en-US"/>
+                        <a:rPr lang="ko-KR" altLang="en-US">
+                          <a:latin typeface="페이퍼로지 4 Regular" pitchFamily="2" charset="-127"/>
+                          <a:ea typeface="페이퍼로지 4 Regular" pitchFamily="2" charset="-127"/>
+                        </a:rPr>
                         <a:t>구조</a:t>
                       </a:r>
                       <a:r>
-                        <a:rPr lang="en-US" altLang="ko-KR"/>
+                        <a:rPr lang="en-US" altLang="ko-KR">
+                          <a:latin typeface="페이퍼로지 4 Regular" pitchFamily="2" charset="-127"/>
+                          <a:ea typeface="페이퍼로지 4 Regular" pitchFamily="2" charset="-127"/>
+                        </a:rPr>
                         <a:t>?</a:t>
                       </a:r>
-                      <a:endParaRPr lang="ko-KR" altLang="en-US"/>
+                      <a:endParaRPr lang="ko-KR" altLang="en-US">
+                        <a:latin typeface="페이퍼로지 4 Regular" pitchFamily="2" charset="-127"/>
+                        <a:ea typeface="페이퍼로지 4 Regular" pitchFamily="2" charset="-127"/>
+                      </a:endParaRPr>
                     </a:p>
                   </a:txBody>
-                  <a:tcPr/>
+                  <a:tcPr anchor="ctr"/>
                 </a:tc>
                 <a:tc>
                   <a:txBody>
@@ -21941,12 +26247,15 @@
                     <a:p>
                       <a:pPr latinLnBrk="1"/>
                       <a:r>
-                        <a:rPr lang="ko-KR" altLang="en-US"/>
+                        <a:rPr lang="ko-KR" altLang="en-US">
+                          <a:latin typeface="페이퍼로지 4 Regular" pitchFamily="2" charset="-127"/>
+                          <a:ea typeface="페이퍼로지 4 Regular" pitchFamily="2" charset="-127"/>
+                        </a:rPr>
                         <a:t>매우 높음</a:t>
                       </a:r>
                     </a:p>
                   </a:txBody>
-                  <a:tcPr/>
+                  <a:tcPr anchor="ctr"/>
                 </a:tc>
                 <a:tc>
                   <a:txBody>
@@ -21955,24 +26264,36 @@
                     <a:p>
                       <a:pPr latinLnBrk="1"/>
                       <a:r>
-                        <a:rPr lang="en-US" altLang="ko-KR"/>
+                        <a:rPr lang="en-US" altLang="ko-KR">
+                          <a:latin typeface="페이퍼로지 4 Regular" pitchFamily="2" charset="-127"/>
+                          <a:ea typeface="페이퍼로지 4 Regular" pitchFamily="2" charset="-127"/>
+                        </a:rPr>
                         <a:t>SHA-2</a:t>
                       </a:r>
                       <a:r>
-                        <a:rPr lang="ko-KR" altLang="en-US"/>
+                        <a:rPr lang="ko-KR" altLang="en-US">
+                          <a:latin typeface="페이퍼로지 4 Regular" pitchFamily="2" charset="-127"/>
+                          <a:ea typeface="페이퍼로지 4 Regular" pitchFamily="2" charset="-127"/>
+                        </a:rPr>
                         <a:t>가 깨지면 보험</a:t>
                       </a:r>
                       <a:r>
-                        <a:rPr lang="en-US" altLang="ko-KR"/>
+                        <a:rPr lang="en-US" altLang="ko-KR">
+                          <a:latin typeface="페이퍼로지 4 Regular" pitchFamily="2" charset="-127"/>
+                          <a:ea typeface="페이퍼로지 4 Regular" pitchFamily="2" charset="-127"/>
+                        </a:rPr>
                         <a:t> </a:t>
                       </a:r>
                       <a:r>
-                        <a:rPr lang="ko-KR" altLang="en-US"/>
+                        <a:rPr lang="ko-KR" altLang="en-US">
+                          <a:latin typeface="페이퍼로지 4 Regular" pitchFamily="2" charset="-127"/>
+                          <a:ea typeface="페이퍼로지 4 Regular" pitchFamily="2" charset="-127"/>
+                        </a:rPr>
                         <a:t>정도의 존재감</a:t>
                       </a:r>
                     </a:p>
                   </a:txBody>
-                  <a:tcPr/>
+                  <a:tcPr anchor="ctr"/>
                 </a:tc>
                 <a:extLst>
                   <a:ext uri="{0D108BD9-81ED-4DB2-BD59-A6C34878D82A}">
